--- a/2026/LEC/03-1 Экспоненциальное сглаживание и профет.pptx
+++ b/2026/LEC/03-1 Экспоненциальное сглаживание и профет.pptx
@@ -5,36 +5,38 @@
     <p:sldMasterId id="2147483648" r:id="rId1"/>
   </p:sldMasterIdLst>
   <p:notesMasterIdLst>
-    <p:notesMasterId r:id="rId29"/>
+    <p:notesMasterId r:id="rId31"/>
   </p:notesMasterIdLst>
   <p:sldIdLst>
     <p:sldId id="256" r:id="rId2"/>
-    <p:sldId id="417" r:id="rId3"/>
-    <p:sldId id="453" r:id="rId4"/>
-    <p:sldId id="414" r:id="rId5"/>
-    <p:sldId id="431" r:id="rId6"/>
-    <p:sldId id="415" r:id="rId7"/>
-    <p:sldId id="418" r:id="rId8"/>
-    <p:sldId id="426" r:id="rId9"/>
-    <p:sldId id="416" r:id="rId10"/>
-    <p:sldId id="419" r:id="rId11"/>
-    <p:sldId id="421" r:id="rId12"/>
-    <p:sldId id="434" r:id="rId13"/>
-    <p:sldId id="422" r:id="rId14"/>
-    <p:sldId id="423" r:id="rId15"/>
-    <p:sldId id="425" r:id="rId16"/>
-    <p:sldId id="427" r:id="rId17"/>
-    <p:sldId id="424" r:id="rId18"/>
-    <p:sldId id="428" r:id="rId19"/>
-    <p:sldId id="429" r:id="rId20"/>
-    <p:sldId id="430" r:id="rId21"/>
-    <p:sldId id="456" r:id="rId22"/>
-    <p:sldId id="459" r:id="rId23"/>
-    <p:sldId id="442" r:id="rId24"/>
-    <p:sldId id="443" r:id="rId25"/>
-    <p:sldId id="444" r:id="rId26"/>
-    <p:sldId id="460" r:id="rId27"/>
-    <p:sldId id="461" r:id="rId28"/>
+    <p:sldId id="462" r:id="rId3"/>
+    <p:sldId id="463" r:id="rId4"/>
+    <p:sldId id="417" r:id="rId5"/>
+    <p:sldId id="453" r:id="rId6"/>
+    <p:sldId id="414" r:id="rId7"/>
+    <p:sldId id="431" r:id="rId8"/>
+    <p:sldId id="415" r:id="rId9"/>
+    <p:sldId id="418" r:id="rId10"/>
+    <p:sldId id="426" r:id="rId11"/>
+    <p:sldId id="416" r:id="rId12"/>
+    <p:sldId id="419" r:id="rId13"/>
+    <p:sldId id="421" r:id="rId14"/>
+    <p:sldId id="434" r:id="rId15"/>
+    <p:sldId id="422" r:id="rId16"/>
+    <p:sldId id="423" r:id="rId17"/>
+    <p:sldId id="425" r:id="rId18"/>
+    <p:sldId id="427" r:id="rId19"/>
+    <p:sldId id="424" r:id="rId20"/>
+    <p:sldId id="428" r:id="rId21"/>
+    <p:sldId id="429" r:id="rId22"/>
+    <p:sldId id="430" r:id="rId23"/>
+    <p:sldId id="456" r:id="rId24"/>
+    <p:sldId id="459" r:id="rId25"/>
+    <p:sldId id="442" r:id="rId26"/>
+    <p:sldId id="443" r:id="rId27"/>
+    <p:sldId id="444" r:id="rId28"/>
+    <p:sldId id="460" r:id="rId29"/>
+    <p:sldId id="461" r:id="rId30"/>
   </p:sldIdLst>
   <p:sldSz cx="12192000" cy="6858000"/>
   <p:notesSz cx="6858000" cy="9144000"/>
@@ -139,6 +141,8 @@
         <p14:section name="Раздел по умолчанию" id="{201EE05C-F9E4-4BBB-A5C1-9C9F75E33B4A}">
           <p14:sldIdLst>
             <p14:sldId id="256"/>
+            <p14:sldId id="462"/>
+            <p14:sldId id="463"/>
             <p14:sldId id="417"/>
             <p14:sldId id="453"/>
             <p14:sldId id="414"/>
@@ -258,7 +262,7 @@
           <a:p>
             <a:fld id="{C730246F-5962-E14A-AAF2-985CCFDAC345}" type="datetimeFigureOut">
               <a:rPr lang="ru-RU" smtClean="0"/>
-              <a:t>20.08.2025</a:t>
+              <a:t>12.03.2026</a:t>
             </a:fld>
             <a:endParaRPr lang="ru-RU"/>
           </a:p>
@@ -590,7 +594,7 @@
           <a:p>
             <a:fld id="{1EA4F326-5F8D-6A4F-9B75-A3402553DF5F}" type="slidenum">
               <a:rPr lang="ru-RU" smtClean="0"/>
-              <a:t>2</a:t>
+              <a:t>4</a:t>
             </a:fld>
             <a:endParaRPr lang="ru-RU"/>
           </a:p>
@@ -600,6 +604,94 @@
     <p:extLst>
       <p:ext uri="{BB962C8B-B14F-4D97-AF65-F5344CB8AC3E}">
         <p14:creationId xmlns:p14="http://schemas.microsoft.com/office/powerpoint/2010/main" val="3817053040"/>
+      </p:ext>
+    </p:extLst>
+  </p:cSld>
+  <p:clrMapOvr>
+    <a:masterClrMapping/>
+  </p:clrMapOvr>
+</p:notes>
+</file>
+
+<file path=ppt/notesSlides/notesSlide10.xml><?xml version="1.0" encoding="utf-8"?>
+<p:notes xmlns:a="http://schemas.openxmlformats.org/drawingml/2006/main" xmlns:r="http://schemas.openxmlformats.org/officeDocument/2006/relationships" xmlns:p="http://schemas.openxmlformats.org/presentationml/2006/main">
+  <p:cSld>
+    <p:spTree>
+      <p:nvGrpSpPr>
+        <p:cNvPr id="1" name=""/>
+        <p:cNvGrpSpPr/>
+        <p:nvPr/>
+      </p:nvGrpSpPr>
+      <p:grpSpPr>
+        <a:xfrm>
+          <a:off x="0" y="0"/>
+          <a:ext cx="0" cy="0"/>
+          <a:chOff x="0" y="0"/>
+          <a:chExt cx="0" cy="0"/>
+        </a:xfrm>
+      </p:grpSpPr>
+      <p:sp>
+        <p:nvSpPr>
+          <p:cNvPr id="2" name="Образ слайда 1"/>
+          <p:cNvSpPr>
+            <a:spLocks noGrp="1" noRot="1" noChangeAspect="1"/>
+          </p:cNvSpPr>
+          <p:nvPr>
+            <p:ph type="sldImg"/>
+          </p:nvPr>
+        </p:nvSpPr>
+        <p:spPr/>
+      </p:sp>
+      <p:sp>
+        <p:nvSpPr>
+          <p:cNvPr id="3" name="Заметки 2"/>
+          <p:cNvSpPr>
+            <a:spLocks noGrp="1"/>
+          </p:cNvSpPr>
+          <p:nvPr>
+            <p:ph type="body" idx="1"/>
+          </p:nvPr>
+        </p:nvSpPr>
+        <p:spPr/>
+        <p:txBody>
+          <a:bodyPr/>
+          <a:lstStyle/>
+          <a:p>
+            <a:r>
+              <a:rPr lang="en-US" dirty="0" smtClean="0"/>
+              <a:t>https://www.ritchievink.com/blog/2018/10/09/build-facebooks-prophet-in-pymc3-bayesian-time-series-analyis-with-generalized-additive-models/</a:t>
+            </a:r>
+            <a:endParaRPr lang="ru-RU" dirty="0"/>
+          </a:p>
+        </p:txBody>
+      </p:sp>
+      <p:sp>
+        <p:nvSpPr>
+          <p:cNvPr id="4" name="Номер слайда 3"/>
+          <p:cNvSpPr>
+            <a:spLocks noGrp="1"/>
+          </p:cNvSpPr>
+          <p:nvPr>
+            <p:ph type="sldNum" sz="quarter" idx="10"/>
+          </p:nvPr>
+        </p:nvSpPr>
+        <p:spPr/>
+        <p:txBody>
+          <a:bodyPr/>
+          <a:lstStyle/>
+          <a:p>
+            <a:fld id="{1EA4F326-5F8D-6A4F-9B75-A3402553DF5F}" type="slidenum">
+              <a:rPr lang="ru-RU" smtClean="0"/>
+              <a:t>25</a:t>
+            </a:fld>
+            <a:endParaRPr lang="ru-RU"/>
+          </a:p>
+        </p:txBody>
+      </p:sp>
+    </p:spTree>
+    <p:extLst>
+      <p:ext uri="{BB962C8B-B14F-4D97-AF65-F5344CB8AC3E}">
+        <p14:creationId xmlns:p14="http://schemas.microsoft.com/office/powerpoint/2010/main" val="3230719507"/>
       </p:ext>
     </p:extLst>
   </p:cSld>
@@ -674,7 +766,7 @@
           <a:p>
             <a:fld id="{1EA4F326-5F8D-6A4F-9B75-A3402553DF5F}" type="slidenum">
               <a:rPr lang="ru-RU" smtClean="0"/>
-              <a:t>3</a:t>
+              <a:t>5</a:t>
             </a:fld>
             <a:endParaRPr lang="ru-RU"/>
           </a:p>
@@ -758,7 +850,7 @@
           <a:p>
             <a:fld id="{1EA4F326-5F8D-6A4F-9B75-A3402553DF5F}" type="slidenum">
               <a:rPr lang="ru-RU" smtClean="0"/>
-              <a:t>4</a:t>
+              <a:t>6</a:t>
             </a:fld>
             <a:endParaRPr lang="ru-RU"/>
           </a:p>
@@ -842,7 +934,7 @@
           <a:p>
             <a:fld id="{1EA4F326-5F8D-6A4F-9B75-A3402553DF5F}" type="slidenum">
               <a:rPr lang="ru-RU" smtClean="0"/>
-              <a:t>5</a:t>
+              <a:t>7</a:t>
             </a:fld>
             <a:endParaRPr lang="ru-RU"/>
           </a:p>
@@ -926,7 +1018,7 @@
           <a:p>
             <a:fld id="{1EA4F326-5F8D-6A4F-9B75-A3402553DF5F}" type="slidenum">
               <a:rPr lang="ru-RU" smtClean="0"/>
-              <a:t>6</a:t>
+              <a:t>8</a:t>
             </a:fld>
             <a:endParaRPr lang="ru-RU"/>
           </a:p>
@@ -1010,7 +1102,7 @@
           <a:p>
             <a:fld id="{1EA4F326-5F8D-6A4F-9B75-A3402553DF5F}" type="slidenum">
               <a:rPr lang="ru-RU" smtClean="0"/>
-              <a:t>7</a:t>
+              <a:t>9</a:t>
             </a:fld>
             <a:endParaRPr lang="ru-RU"/>
           </a:p>
@@ -1094,7 +1186,7 @@
           <a:p>
             <a:fld id="{1EA4F326-5F8D-6A4F-9B75-A3402553DF5F}" type="slidenum">
               <a:rPr lang="ru-RU" smtClean="0"/>
-              <a:t>8</a:t>
+              <a:t>10</a:t>
             </a:fld>
             <a:endParaRPr lang="ru-RU"/>
           </a:p>
@@ -1178,7 +1270,7 @@
           <a:p>
             <a:fld id="{1EA4F326-5F8D-6A4F-9B75-A3402553DF5F}" type="slidenum">
               <a:rPr lang="ru-RU" smtClean="0"/>
-              <a:t>9</a:t>
+              <a:t>11</a:t>
             </a:fld>
             <a:endParaRPr lang="ru-RU"/>
           </a:p>
@@ -1262,7 +1354,7 @@
           <a:p>
             <a:fld id="{1EA4F326-5F8D-6A4F-9B75-A3402553DF5F}" type="slidenum">
               <a:rPr lang="ru-RU" smtClean="0"/>
-              <a:t>10</a:t>
+              <a:t>12</a:t>
             </a:fld>
             <a:endParaRPr lang="ru-RU"/>
           </a:p>
@@ -1430,7 +1522,7 @@
           <a:p>
             <a:fld id="{44343DC6-30E4-4569-999A-C703F926F2AF}" type="datetimeFigureOut">
               <a:rPr lang="en-US" smtClean="0"/>
-              <a:t>8/20/2025</a:t>
+              <a:t>3/12/2026</a:t>
             </a:fld>
             <a:endParaRPr lang="en-US"/>
           </a:p>
@@ -1630,7 +1722,7 @@
           <a:p>
             <a:fld id="{44343DC6-30E4-4569-999A-C703F926F2AF}" type="datetimeFigureOut">
               <a:rPr lang="en-US" smtClean="0"/>
-              <a:t>8/20/2025</a:t>
+              <a:t>3/12/2026</a:t>
             </a:fld>
             <a:endParaRPr lang="en-US"/>
           </a:p>
@@ -1840,7 +1932,7 @@
           <a:p>
             <a:fld id="{44343DC6-30E4-4569-999A-C703F926F2AF}" type="datetimeFigureOut">
               <a:rPr lang="en-US" smtClean="0"/>
-              <a:t>8/20/2025</a:t>
+              <a:t>3/12/2026</a:t>
             </a:fld>
             <a:endParaRPr lang="en-US"/>
           </a:p>
@@ -2040,7 +2132,7 @@
           <a:p>
             <a:fld id="{44343DC6-30E4-4569-999A-C703F926F2AF}" type="datetimeFigureOut">
               <a:rPr lang="en-US" smtClean="0"/>
-              <a:t>8/20/2025</a:t>
+              <a:t>3/12/2026</a:t>
             </a:fld>
             <a:endParaRPr lang="en-US"/>
           </a:p>
@@ -2316,7 +2408,7 @@
           <a:p>
             <a:fld id="{44343DC6-30E4-4569-999A-C703F926F2AF}" type="datetimeFigureOut">
               <a:rPr lang="en-US" smtClean="0"/>
-              <a:t>8/20/2025</a:t>
+              <a:t>3/12/2026</a:t>
             </a:fld>
             <a:endParaRPr lang="en-US"/>
           </a:p>
@@ -2584,7 +2676,7 @@
           <a:p>
             <a:fld id="{44343DC6-30E4-4569-999A-C703F926F2AF}" type="datetimeFigureOut">
               <a:rPr lang="en-US" smtClean="0"/>
-              <a:t>8/20/2025</a:t>
+              <a:t>3/12/2026</a:t>
             </a:fld>
             <a:endParaRPr lang="en-US"/>
           </a:p>
@@ -2999,7 +3091,7 @@
           <a:p>
             <a:fld id="{44343DC6-30E4-4569-999A-C703F926F2AF}" type="datetimeFigureOut">
               <a:rPr lang="en-US" smtClean="0"/>
-              <a:t>8/20/2025</a:t>
+              <a:t>3/12/2026</a:t>
             </a:fld>
             <a:endParaRPr lang="en-US"/>
           </a:p>
@@ -3141,7 +3233,7 @@
           <a:p>
             <a:fld id="{44343DC6-30E4-4569-999A-C703F926F2AF}" type="datetimeFigureOut">
               <a:rPr lang="en-US" smtClean="0"/>
-              <a:t>8/20/2025</a:t>
+              <a:t>3/12/2026</a:t>
             </a:fld>
             <a:endParaRPr lang="en-US"/>
           </a:p>
@@ -3254,7 +3346,7 @@
           <a:p>
             <a:fld id="{44343DC6-30E4-4569-999A-C703F926F2AF}" type="datetimeFigureOut">
               <a:rPr lang="en-US" smtClean="0"/>
-              <a:t>8/20/2025</a:t>
+              <a:t>3/12/2026</a:t>
             </a:fld>
             <a:endParaRPr lang="en-US"/>
           </a:p>
@@ -3567,7 +3659,7 @@
           <a:p>
             <a:fld id="{44343DC6-30E4-4569-999A-C703F926F2AF}" type="datetimeFigureOut">
               <a:rPr lang="en-US" smtClean="0"/>
-              <a:t>8/20/2025</a:t>
+              <a:t>3/12/2026</a:t>
             </a:fld>
             <a:endParaRPr lang="en-US"/>
           </a:p>
@@ -3856,7 +3948,7 @@
           <a:p>
             <a:fld id="{44343DC6-30E4-4569-999A-C703F926F2AF}" type="datetimeFigureOut">
               <a:rPr lang="en-US" smtClean="0"/>
-              <a:t>8/20/2025</a:t>
+              <a:t>3/12/2026</a:t>
             </a:fld>
             <a:endParaRPr lang="en-US"/>
           </a:p>
@@ -4099,7 +4191,7 @@
           <a:p>
             <a:fld id="{44343DC6-30E4-4569-999A-C703F926F2AF}" type="datetimeFigureOut">
               <a:rPr lang="en-US" smtClean="0"/>
-              <a:t>8/20/2025</a:t>
+              <a:t>3/12/2026</a:t>
             </a:fld>
             <a:endParaRPr lang="en-US"/>
           </a:p>
@@ -4615,6 +4707,1618 @@
         </p:nvSpPr>
         <p:spPr>
           <a:xfrm>
+            <a:off x="226957" y="93606"/>
+            <a:ext cx="11802295" cy="757854"/>
+          </a:xfrm>
+        </p:spPr>
+        <p:txBody>
+          <a:bodyPr>
+            <a:normAutofit/>
+          </a:bodyPr>
+          <a:lstStyle/>
+          <a:p>
+            <a:pPr algn="ctr"/>
+            <a:r>
+              <a:rPr lang="ru-RU" sz="3200" b="1" dirty="0"/>
+              <a:t>Модель </a:t>
+            </a:r>
+            <a:r>
+              <a:rPr lang="en-US" sz="3200" b="1" dirty="0"/>
+              <a:t>Holt</a:t>
+            </a:r>
+            <a:r>
+              <a:rPr lang="ru-RU" sz="3200" b="1" dirty="0"/>
+              <a:t>-</a:t>
+            </a:r>
+            <a:r>
+              <a:rPr lang="en-US" sz="3200" b="1" dirty="0"/>
+              <a:t>Winters </a:t>
+            </a:r>
+            <a:r>
+              <a:rPr lang="ru-RU" sz="3200" b="1" dirty="0"/>
+              <a:t> - тройное экспоненциальное сглаживание</a:t>
+            </a:r>
+            <a:endParaRPr lang="ru-RU" sz="3600" b="1" dirty="0"/>
+          </a:p>
+        </p:txBody>
+      </p:sp>
+      <p:sp>
+        <p:nvSpPr>
+          <p:cNvPr id="4" name="Объект 3"/>
+          <p:cNvSpPr>
+            <a:spLocks noGrp="1"/>
+          </p:cNvSpPr>
+          <p:nvPr>
+            <p:ph idx="1"/>
+          </p:nvPr>
+        </p:nvSpPr>
+        <p:spPr>
+          <a:xfrm>
+            <a:off x="226956" y="739410"/>
+            <a:ext cx="6775824" cy="5595061"/>
+          </a:xfrm>
+        </p:spPr>
+        <p:txBody>
+          <a:bodyPr>
+            <a:noAutofit/>
+          </a:bodyPr>
+          <a:lstStyle/>
+          <a:p>
+            <a:r>
+              <a:rPr lang="en-US" sz="2100" dirty="0"/>
+              <a:t>SES - </a:t>
+            </a:r>
+            <a:r>
+              <a:rPr lang="ru-RU" sz="2100" dirty="0"/>
+              <a:t>Для небольшого периода и одношагового прогноза.</a:t>
+            </a:r>
+          </a:p>
+          <a:p>
+            <a:pPr lvl="1"/>
+            <a:r>
+              <a:rPr lang="ru-RU" sz="2100" dirty="0"/>
+              <a:t>Желательно, чтобы  данные были стационарны или очень медленно меняющиеся</a:t>
+            </a:r>
+          </a:p>
+          <a:p>
+            <a:pPr lvl="1"/>
+            <a:r>
+              <a:rPr lang="ru-RU" sz="2100" dirty="0"/>
+              <a:t>Напр. 2 месяца, горизонт 1-2 дня.</a:t>
+            </a:r>
+          </a:p>
+          <a:p>
+            <a:r>
+              <a:rPr lang="en-US" sz="2100" dirty="0"/>
+              <a:t>Holt (DES) – </a:t>
+            </a:r>
+            <a:r>
+              <a:rPr lang="ru-RU" sz="2100" dirty="0"/>
+              <a:t>если преимущественно в данных тренд (медленные монотонные изменения).</a:t>
+            </a:r>
+          </a:p>
+          <a:p>
+            <a:pPr lvl="1"/>
+            <a:r>
+              <a:rPr lang="ru-RU" sz="2100" dirty="0"/>
+              <a:t>Возможен многошаговый прогноз если поведение ВР монотонно. </a:t>
+            </a:r>
+          </a:p>
+          <a:p>
+            <a:pPr lvl="1"/>
+            <a:r>
+              <a:rPr lang="ru-RU" sz="2100" dirty="0"/>
+              <a:t>Напр. 1 год, горизонт 1-4 недели</a:t>
+            </a:r>
+          </a:p>
+          <a:p>
+            <a:r>
+              <a:rPr lang="en-US" sz="2100" dirty="0"/>
+              <a:t>HW (TES) – </a:t>
+            </a:r>
+            <a:r>
+              <a:rPr lang="ru-RU" sz="2100" dirty="0"/>
+              <a:t>если данные имеют одну сезонность регулярного вида.</a:t>
+            </a:r>
+          </a:p>
+          <a:p>
+            <a:pPr lvl="1"/>
+            <a:r>
+              <a:rPr lang="ru-RU" sz="1700" dirty="0"/>
+              <a:t>Возможен сложный</a:t>
+            </a:r>
+            <a:r>
+              <a:rPr lang="en-US" sz="1700" dirty="0"/>
+              <a:t> </a:t>
+            </a:r>
+            <a:r>
+              <a:rPr lang="ru-RU" sz="1700" dirty="0"/>
+              <a:t>(не </a:t>
+            </a:r>
+            <a:r>
+              <a:rPr lang="ru-RU" sz="1700" dirty="0" err="1"/>
+              <a:t>гаронический</a:t>
+            </a:r>
+            <a:r>
+              <a:rPr lang="ru-RU" sz="1700" dirty="0"/>
+              <a:t>) паттерн но с одним известным периодом</a:t>
+            </a:r>
+            <a:r>
+              <a:rPr lang="en-US" sz="1700" dirty="0"/>
+              <a:t> </a:t>
+            </a:r>
+            <a:r>
+              <a:rPr lang="ru-RU" sz="1700" dirty="0"/>
+              <a:t>(регулярная сезонность)</a:t>
+            </a:r>
+          </a:p>
+          <a:p>
+            <a:pPr lvl="1"/>
+            <a:r>
+              <a:rPr lang="ru-RU" sz="2100" dirty="0"/>
+              <a:t> напр. 10 лет, горизонт 1-2 месяца</a:t>
+            </a:r>
+          </a:p>
+        </p:txBody>
+      </p:sp>
+      <p:pic>
+        <p:nvPicPr>
+          <p:cNvPr id="8194" name="Picture 2" descr="Visualize how the Exponential Smoothing (ETS) algorithm works, Image by Author"/>
+          <p:cNvPicPr>
+            <a:picLocks noChangeAspect="1" noChangeArrowheads="1"/>
+          </p:cNvPicPr>
+          <p:nvPr/>
+        </p:nvPicPr>
+        <p:blipFill rotWithShape="1">
+          <a:blip r:embed="rId3" cstate="hqprint">
+            <a:extLst>
+              <a:ext uri="{28A0092B-C50C-407E-A947-70E740481C1C}">
+                <a14:useLocalDpi xmlns:a14="http://schemas.microsoft.com/office/drawing/2010/main" val="0"/>
+              </a:ext>
+            </a:extLst>
+          </a:blip>
+          <a:srcRect l="49074"/>
+          <a:stretch/>
+        </p:blipFill>
+        <p:spPr bwMode="auto">
+          <a:xfrm>
+            <a:off x="7002780" y="722190"/>
+            <a:ext cx="4912297" cy="5425887"/>
+          </a:xfrm>
+          <a:prstGeom prst="rect">
+            <a:avLst/>
+          </a:prstGeom>
+          <a:noFill/>
+          <a:extLst>
+            <a:ext uri="{909E8E84-426E-40DD-AFC4-6F175D3DCCD1}">
+              <a14:hiddenFill xmlns:a14="http://schemas.microsoft.com/office/drawing/2010/main">
+                <a:solidFill>
+                  <a:srgbClr val="FFFFFF"/>
+                </a:solidFill>
+              </a14:hiddenFill>
+            </a:ext>
+          </a:extLst>
+        </p:spPr>
+      </p:pic>
+      <p:sp>
+        <p:nvSpPr>
+          <p:cNvPr id="7" name="Прямоугольник 6"/>
+          <p:cNvSpPr/>
+          <p:nvPr/>
+        </p:nvSpPr>
+        <p:spPr>
+          <a:xfrm>
+            <a:off x="838200" y="6351691"/>
+            <a:ext cx="8875383" cy="369332"/>
+          </a:xfrm>
+          <a:prstGeom prst="rect">
+            <a:avLst/>
+          </a:prstGeom>
+        </p:spPr>
+        <p:txBody>
+          <a:bodyPr wrap="square">
+            <a:spAutoFit/>
+          </a:bodyPr>
+          <a:lstStyle/>
+          <a:p>
+            <a:r>
+              <a:rPr lang="ru-RU" dirty="0"/>
+              <a:t>https://towardsdatascience.com/forecast-multiple-time-series-like-a-master-1579a2b6f18d/</a:t>
+            </a:r>
+          </a:p>
+        </p:txBody>
+      </p:sp>
+    </p:spTree>
+    <p:extLst>
+      <p:ext uri="{BB962C8B-B14F-4D97-AF65-F5344CB8AC3E}">
+        <p14:creationId xmlns:p14="http://schemas.microsoft.com/office/powerpoint/2010/main" val="4171603156"/>
+      </p:ext>
+    </p:extLst>
+  </p:cSld>
+  <p:clrMapOvr>
+    <a:masterClrMapping/>
+  </p:clrMapOvr>
+  <p:timing>
+    <p:tnLst>
+      <p:par>
+        <p:cTn id="1" dur="indefinite" restart="never" nodeType="tmRoot"/>
+      </p:par>
+    </p:tnLst>
+  </p:timing>
+</p:sld>
+</file>
+
+<file path=ppt/slides/slide11.xml><?xml version="1.0" encoding="utf-8"?>
+<p:sld xmlns:a="http://schemas.openxmlformats.org/drawingml/2006/main" xmlns:r="http://schemas.openxmlformats.org/officeDocument/2006/relationships" xmlns:p="http://schemas.openxmlformats.org/presentationml/2006/main">
+  <p:cSld>
+    <p:spTree>
+      <p:nvGrpSpPr>
+        <p:cNvPr id="1" name=""/>
+        <p:cNvGrpSpPr/>
+        <p:nvPr/>
+      </p:nvGrpSpPr>
+      <p:grpSpPr>
+        <a:xfrm>
+          <a:off x="0" y="0"/>
+          <a:ext cx="0" cy="0"/>
+          <a:chOff x="0" y="0"/>
+          <a:chExt cx="0" cy="0"/>
+        </a:xfrm>
+      </p:grpSpPr>
+      <p:sp>
+        <p:nvSpPr>
+          <p:cNvPr id="2" name="Заголовок 1">
+            <a:extLst>
+              <a:ext uri="{FF2B5EF4-FFF2-40B4-BE49-F238E27FC236}">
+                <a16:creationId xmlns:a16="http://schemas.microsoft.com/office/drawing/2014/main" id="{3FB6B433-AB20-4BD4-8E77-84B856A5D608}"/>
+              </a:ext>
+            </a:extLst>
+          </p:cNvPr>
+          <p:cNvSpPr>
+            <a:spLocks noGrp="1"/>
+          </p:cNvSpPr>
+          <p:nvPr>
+            <p:ph type="title"/>
+          </p:nvPr>
+        </p:nvSpPr>
+        <p:spPr>
+          <a:xfrm>
+            <a:off x="226957" y="93605"/>
+            <a:ext cx="11802295" cy="933115"/>
+          </a:xfrm>
+        </p:spPr>
+        <p:txBody>
+          <a:bodyPr>
+            <a:normAutofit fontScale="90000"/>
+          </a:bodyPr>
+          <a:lstStyle/>
+          <a:p>
+            <a:pPr algn="ctr"/>
+            <a:r>
+              <a:rPr lang="ru-RU" sz="3200" b="1" dirty="0"/>
+              <a:t>Модели </a:t>
+            </a:r>
+            <a:r>
+              <a:rPr lang="en-US" sz="3200" b="1" dirty="0"/>
+              <a:t>Error-Trend-Seasonality</a:t>
+            </a:r>
+            <a:r>
+              <a:rPr lang="ru-RU" sz="3200" b="1" dirty="0"/>
+              <a:t> (</a:t>
+            </a:r>
+            <a:r>
+              <a:rPr lang="ru-RU" sz="3600" b="1" dirty="0"/>
+              <a:t>экспоненциальное сглаживание)</a:t>
+            </a:r>
+          </a:p>
+        </p:txBody>
+      </p:sp>
+      <mc:AlternateContent xmlns:mc="http://schemas.openxmlformats.org/markup-compatibility/2006" xmlns:a14="http://schemas.microsoft.com/office/drawing/2010/main">
+        <mc:Choice Requires="a14">
+          <p:sp>
+            <p:nvSpPr>
+              <p:cNvPr id="3" name="Объект 2">
+                <a:extLst>
+                  <a:ext uri="{FF2B5EF4-FFF2-40B4-BE49-F238E27FC236}">
+                    <a16:creationId xmlns:a16="http://schemas.microsoft.com/office/drawing/2014/main" id="{9CFDC76D-90F0-4FD7-8BA6-954D6D2E6FFD}"/>
+                  </a:ext>
+                </a:extLst>
+              </p:cNvPr>
+              <p:cNvSpPr>
+                <a:spLocks noGrp="1"/>
+              </p:cNvSpPr>
+              <p:nvPr>
+                <p:ph idx="1"/>
+              </p:nvPr>
+            </p:nvSpPr>
+            <p:spPr>
+              <a:xfrm>
+                <a:off x="206264" y="769492"/>
+                <a:ext cx="11985736" cy="5509656"/>
+              </a:xfrm>
+            </p:spPr>
+            <p:txBody>
+              <a:bodyPr>
+                <a:normAutofit/>
+              </a:bodyPr>
+              <a:lstStyle/>
+              <a:p>
+                <a:pPr marL="0" indent="0">
+                  <a:lnSpc>
+                    <a:spcPct val="110000"/>
+                  </a:lnSpc>
+                  <a:buNone/>
+                </a:pPr>
+                <a:r>
+                  <a:rPr lang="en-US" sz="2200" dirty="0"/>
+                  <a:t> </a:t>
+                </a:r>
+                <a:r>
+                  <a:rPr lang="ru-RU" sz="2200" dirty="0"/>
+                  <a:t>Рассмотрим </a:t>
+                </a:r>
+                <a:r>
+                  <a:rPr lang="en-US" sz="2200" dirty="0"/>
+                  <a:t>SES </a:t>
+                </a:r>
+                <a:r>
+                  <a:rPr lang="ru-RU" sz="2200" dirty="0"/>
+                  <a:t>в виде части модели </a:t>
+                </a:r>
+                <a:r>
+                  <a:rPr lang="en-US" sz="2200" dirty="0"/>
+                  <a:t>Holt-Winters</a:t>
+                </a:r>
+              </a:p>
+              <a:p>
+                <a:pPr marL="0" indent="0" algn="ctr">
+                  <a:lnSpc>
+                    <a:spcPct val="110000"/>
+                  </a:lnSpc>
+                  <a:buNone/>
+                </a:pPr>
+                <a14:m>
+                  <m:oMathPara xmlns:m="http://schemas.openxmlformats.org/officeDocument/2006/math">
+                    <m:oMathParaPr>
+                      <m:jc m:val="centerGroup"/>
+                    </m:oMathParaPr>
+                    <m:oMath xmlns:m="http://schemas.openxmlformats.org/officeDocument/2006/math">
+                      <m:sSub>
+                        <m:sSubPr>
+                          <m:ctrlPr>
+                            <a:rPr lang="en-US" sz="2200" i="1">
+                              <a:latin typeface="Cambria Math" panose="02040503050406030204" pitchFamily="18" charset="0"/>
+                            </a:rPr>
+                          </m:ctrlPr>
+                        </m:sSubPr>
+                        <m:e>
+                          <m:acc>
+                            <m:accPr>
+                              <m:chr m:val="̂"/>
+                              <m:ctrlPr>
+                                <a:rPr lang="en-US" sz="2200" i="1">
+                                  <a:latin typeface="Cambria Math" panose="02040503050406030204" pitchFamily="18" charset="0"/>
+                                </a:rPr>
+                              </m:ctrlPr>
+                            </m:accPr>
+                            <m:e>
+                              <m:r>
+                                <a:rPr lang="en-US" sz="2200" i="1">
+                                  <a:latin typeface="Cambria Math" panose="02040503050406030204" pitchFamily="18" charset="0"/>
+                                </a:rPr>
+                                <m:t>𝑦</m:t>
+                              </m:r>
+                            </m:e>
+                          </m:acc>
+                        </m:e>
+                        <m:sub>
+                          <m:r>
+                            <a:rPr lang="en-US" sz="2200" i="1">
+                              <a:latin typeface="Cambria Math" panose="02040503050406030204" pitchFamily="18" charset="0"/>
+                            </a:rPr>
+                            <m:t>𝑛</m:t>
+                          </m:r>
+                          <m:r>
+                            <a:rPr lang="ru-RU" sz="2200" i="1">
+                              <a:latin typeface="Cambria Math" panose="02040503050406030204" pitchFamily="18" charset="0"/>
+                            </a:rPr>
+                            <m:t>+1</m:t>
+                          </m:r>
+                        </m:sub>
+                      </m:sSub>
+                      <m:r>
+                        <a:rPr lang="en-US" sz="2200" i="1">
+                          <a:latin typeface="Cambria Math" panose="02040503050406030204" pitchFamily="18" charset="0"/>
+                        </a:rPr>
+                        <m:t>=</m:t>
+                      </m:r>
+                      <m:sSub>
+                        <m:sSubPr>
+                          <m:ctrlPr>
+                            <a:rPr lang="en-US" sz="2200" b="0" i="1" smtClean="0">
+                              <a:latin typeface="Cambria Math" panose="02040503050406030204" pitchFamily="18" charset="0"/>
+                            </a:rPr>
+                          </m:ctrlPr>
+                        </m:sSubPr>
+                        <m:e>
+                          <m:r>
+                            <a:rPr lang="en-US" sz="2200" b="0" i="1" smtClean="0">
+                              <a:latin typeface="Cambria Math" panose="02040503050406030204" pitchFamily="18" charset="0"/>
+                            </a:rPr>
+                            <m:t>𝑙</m:t>
+                          </m:r>
+                        </m:e>
+                        <m:sub>
+                          <m:r>
+                            <a:rPr lang="en-US" sz="2200" b="0" i="1" smtClean="0">
+                              <a:latin typeface="Cambria Math" panose="02040503050406030204" pitchFamily="18" charset="0"/>
+                            </a:rPr>
+                            <m:t>𝑛</m:t>
+                          </m:r>
+                        </m:sub>
+                      </m:sSub>
+                    </m:oMath>
+                  </m:oMathPara>
+                </a14:m>
+                <a:endParaRPr lang="en-US" sz="2200" i="1" dirty="0">
+                  <a:latin typeface="Cambria Math" panose="02040503050406030204" pitchFamily="18" charset="0"/>
+                </a:endParaRPr>
+              </a:p>
+              <a:p>
+                <a:pPr marL="0" indent="0" algn="ctr">
+                  <a:lnSpc>
+                    <a:spcPct val="110000"/>
+                  </a:lnSpc>
+                  <a:buNone/>
+                </a:pPr>
+                <a14:m>
+                  <m:oMath xmlns:m="http://schemas.openxmlformats.org/officeDocument/2006/math">
+                    <m:sSub>
+                      <m:sSubPr>
+                        <m:ctrlPr>
+                          <a:rPr lang="en-US" sz="2200" b="0" i="1" smtClean="0">
+                            <a:latin typeface="Cambria Math" panose="02040503050406030204" pitchFamily="18" charset="0"/>
+                          </a:rPr>
+                        </m:ctrlPr>
+                      </m:sSubPr>
+                      <m:e>
+                        <m:r>
+                          <a:rPr lang="en-US" sz="2200" b="0" i="1" smtClean="0">
+                            <a:latin typeface="Cambria Math" panose="02040503050406030204" pitchFamily="18" charset="0"/>
+                          </a:rPr>
+                          <m:t>𝑙</m:t>
+                        </m:r>
+                      </m:e>
+                      <m:sub>
+                        <m:r>
+                          <a:rPr lang="en-US" sz="2200" b="0" i="1" smtClean="0">
+                            <a:latin typeface="Cambria Math" panose="02040503050406030204" pitchFamily="18" charset="0"/>
+                          </a:rPr>
+                          <m:t>𝑛</m:t>
+                        </m:r>
+                      </m:sub>
+                    </m:sSub>
+                    <m:r>
+                      <a:rPr lang="en-US" sz="2200" b="0" i="1" smtClean="0">
+                        <a:latin typeface="Cambria Math" panose="02040503050406030204" pitchFamily="18" charset="0"/>
+                      </a:rPr>
+                      <m:t>=</m:t>
+                    </m:r>
+                    <m:r>
+                      <a:rPr lang="en-US" sz="2200" i="1">
+                        <a:latin typeface="Cambria Math" panose="02040503050406030204" pitchFamily="18" charset="0"/>
+                      </a:rPr>
+                      <m:t>𝛼</m:t>
+                    </m:r>
+                    <m:sSub>
+                      <m:sSubPr>
+                        <m:ctrlPr>
+                          <a:rPr lang="en-US" sz="2200" i="1">
+                            <a:latin typeface="Cambria Math" panose="02040503050406030204" pitchFamily="18" charset="0"/>
+                          </a:rPr>
+                        </m:ctrlPr>
+                      </m:sSubPr>
+                      <m:e>
+                        <m:r>
+                          <a:rPr lang="en-US" sz="2200" i="1">
+                            <a:latin typeface="Cambria Math" panose="02040503050406030204" pitchFamily="18" charset="0"/>
+                          </a:rPr>
+                          <m:t>𝑦</m:t>
+                        </m:r>
+                      </m:e>
+                      <m:sub>
+                        <m:r>
+                          <a:rPr lang="en-US" sz="2200" i="1">
+                            <a:latin typeface="Cambria Math" panose="02040503050406030204" pitchFamily="18" charset="0"/>
+                          </a:rPr>
+                          <m:t>𝑛</m:t>
+                        </m:r>
+                      </m:sub>
+                    </m:sSub>
+                    <m:r>
+                      <a:rPr lang="en-US" sz="2200" i="1">
+                        <a:latin typeface="Cambria Math" panose="02040503050406030204" pitchFamily="18" charset="0"/>
+                      </a:rPr>
+                      <m:t>+</m:t>
+                    </m:r>
+                    <m:d>
+                      <m:dPr>
+                        <m:ctrlPr>
+                          <a:rPr lang="en-US" sz="2200" i="1">
+                            <a:latin typeface="Cambria Math" panose="02040503050406030204" pitchFamily="18" charset="0"/>
+                          </a:rPr>
+                        </m:ctrlPr>
+                      </m:dPr>
+                      <m:e>
+                        <m:r>
+                          <a:rPr lang="en-US" sz="2200" i="1">
+                            <a:latin typeface="Cambria Math" panose="02040503050406030204" pitchFamily="18" charset="0"/>
+                          </a:rPr>
+                          <m:t>1−</m:t>
+                        </m:r>
+                        <m:r>
+                          <a:rPr lang="en-US" sz="2200" i="1">
+                            <a:latin typeface="Cambria Math" panose="02040503050406030204" pitchFamily="18" charset="0"/>
+                          </a:rPr>
+                          <m:t>𝛼</m:t>
+                        </m:r>
+                      </m:e>
+                    </m:d>
+                    <m:sSub>
+                      <m:sSubPr>
+                        <m:ctrlPr>
+                          <a:rPr lang="en-US" sz="2200" i="1">
+                            <a:latin typeface="Cambria Math" panose="02040503050406030204" pitchFamily="18" charset="0"/>
+                          </a:rPr>
+                        </m:ctrlPr>
+                      </m:sSubPr>
+                      <m:e>
+                        <m:r>
+                          <a:rPr lang="en-US" sz="2200" b="0" i="1" smtClean="0">
+                            <a:latin typeface="Cambria Math" panose="02040503050406030204" pitchFamily="18" charset="0"/>
+                          </a:rPr>
+                          <m:t>𝑙</m:t>
+                        </m:r>
+                      </m:e>
+                      <m:sub>
+                        <m:r>
+                          <a:rPr lang="en-US" sz="2200" i="1">
+                            <a:latin typeface="Cambria Math" panose="02040503050406030204" pitchFamily="18" charset="0"/>
+                          </a:rPr>
+                          <m:t>𝑛</m:t>
+                        </m:r>
+                        <m:r>
+                          <a:rPr lang="en-US" sz="2200" i="1">
+                            <a:latin typeface="Cambria Math" panose="02040503050406030204" pitchFamily="18" charset="0"/>
+                          </a:rPr>
+                          <m:t>−1</m:t>
+                        </m:r>
+                      </m:sub>
+                    </m:sSub>
+                  </m:oMath>
+                </a14:m>
+                <a:r>
+                  <a:rPr lang="ru-RU" sz="2200" dirty="0"/>
+                  <a:t> </a:t>
+                </a:r>
+                <a:endParaRPr lang="en-US" sz="2200" dirty="0"/>
+              </a:p>
+              <a:p>
+                <a:pPr marL="0" indent="0">
+                  <a:lnSpc>
+                    <a:spcPct val="110000"/>
+                  </a:lnSpc>
+                  <a:buNone/>
+                </a:pPr>
+                <a:r>
+                  <a:rPr lang="ru-RU" sz="2200" dirty="0"/>
+                  <a:t>	тогда </a:t>
+                </a:r>
+                <a14:m>
+                  <m:oMath xmlns:m="http://schemas.openxmlformats.org/officeDocument/2006/math">
+                    <m:sSub>
+                      <m:sSubPr>
+                        <m:ctrlPr>
+                          <a:rPr lang="en-US" sz="2200" b="0" i="1" smtClean="0">
+                            <a:latin typeface="Cambria Math" panose="02040503050406030204" pitchFamily="18" charset="0"/>
+                          </a:rPr>
+                        </m:ctrlPr>
+                      </m:sSubPr>
+                      <m:e>
+                        <m:r>
+                          <a:rPr lang="en-US" sz="2200" b="0" i="1" smtClean="0">
+                            <a:latin typeface="Cambria Math" panose="02040503050406030204" pitchFamily="18" charset="0"/>
+                          </a:rPr>
+                          <m:t>𝑙</m:t>
+                        </m:r>
+                      </m:e>
+                      <m:sub>
+                        <m:r>
+                          <a:rPr lang="en-US" sz="2200" b="0" i="1" smtClean="0">
+                            <a:latin typeface="Cambria Math" panose="02040503050406030204" pitchFamily="18" charset="0"/>
+                          </a:rPr>
+                          <m:t>𝑛</m:t>
+                        </m:r>
+                      </m:sub>
+                    </m:sSub>
+                    <m:r>
+                      <a:rPr lang="en-US" sz="2200" b="0" i="1" smtClean="0">
+                        <a:latin typeface="Cambria Math" panose="02040503050406030204" pitchFamily="18" charset="0"/>
+                      </a:rPr>
+                      <m:t>=</m:t>
+                    </m:r>
+                    <m:sSub>
+                      <m:sSubPr>
+                        <m:ctrlPr>
+                          <a:rPr lang="en-US" sz="2200" b="0" i="1" smtClean="0">
+                            <a:latin typeface="Cambria Math" panose="02040503050406030204" pitchFamily="18" charset="0"/>
+                          </a:rPr>
+                        </m:ctrlPr>
+                      </m:sSubPr>
+                      <m:e>
+                        <m:r>
+                          <a:rPr lang="en-US" sz="2200" b="0" i="1" smtClean="0">
+                            <a:latin typeface="Cambria Math" panose="02040503050406030204" pitchFamily="18" charset="0"/>
+                          </a:rPr>
+                          <m:t>𝑙</m:t>
+                        </m:r>
+                      </m:e>
+                      <m:sub>
+                        <m:r>
+                          <a:rPr lang="en-US" sz="2200" b="0" i="1" smtClean="0">
+                            <a:latin typeface="Cambria Math" panose="02040503050406030204" pitchFamily="18" charset="0"/>
+                          </a:rPr>
+                          <m:t>𝑛</m:t>
+                        </m:r>
+                        <m:r>
+                          <a:rPr lang="en-US" sz="2200" b="0" i="1" smtClean="0">
+                            <a:latin typeface="Cambria Math" panose="02040503050406030204" pitchFamily="18" charset="0"/>
+                          </a:rPr>
+                          <m:t>−1</m:t>
+                        </m:r>
+                      </m:sub>
+                    </m:sSub>
+                    <m:r>
+                      <a:rPr lang="en-US" sz="2200" b="0" i="1" smtClean="0">
+                        <a:latin typeface="Cambria Math" panose="02040503050406030204" pitchFamily="18" charset="0"/>
+                      </a:rPr>
+                      <m:t>+</m:t>
+                    </m:r>
+                    <m:r>
+                      <a:rPr lang="en-US" sz="2200" b="0" i="1" smtClean="0">
+                        <a:latin typeface="Cambria Math" panose="02040503050406030204" pitchFamily="18" charset="0"/>
+                      </a:rPr>
+                      <m:t>𝛼</m:t>
+                    </m:r>
+                    <m:d>
+                      <m:dPr>
+                        <m:ctrlPr>
+                          <a:rPr lang="en-US" sz="2200" b="0" i="1" smtClean="0">
+                            <a:latin typeface="Cambria Math" panose="02040503050406030204" pitchFamily="18" charset="0"/>
+                          </a:rPr>
+                        </m:ctrlPr>
+                      </m:dPr>
+                      <m:e>
+                        <m:sSub>
+                          <m:sSubPr>
+                            <m:ctrlPr>
+                              <a:rPr lang="en-US" sz="2200" b="0" i="1" smtClean="0">
+                                <a:latin typeface="Cambria Math" panose="02040503050406030204" pitchFamily="18" charset="0"/>
+                              </a:rPr>
+                            </m:ctrlPr>
+                          </m:sSubPr>
+                          <m:e>
+                            <m:r>
+                              <a:rPr lang="en-US" sz="2200" b="0" i="1" smtClean="0">
+                                <a:latin typeface="Cambria Math" panose="02040503050406030204" pitchFamily="18" charset="0"/>
+                              </a:rPr>
+                              <m:t>𝑦</m:t>
+                            </m:r>
+                          </m:e>
+                          <m:sub>
+                            <m:r>
+                              <a:rPr lang="en-US" sz="2200" b="0" i="1" smtClean="0">
+                                <a:latin typeface="Cambria Math" panose="02040503050406030204" pitchFamily="18" charset="0"/>
+                              </a:rPr>
+                              <m:t>𝑛</m:t>
+                            </m:r>
+                          </m:sub>
+                        </m:sSub>
+                        <m:r>
+                          <a:rPr lang="en-US" sz="2200" b="0" i="1" smtClean="0">
+                            <a:latin typeface="Cambria Math" panose="02040503050406030204" pitchFamily="18" charset="0"/>
+                          </a:rPr>
+                          <m:t>−</m:t>
+                        </m:r>
+                        <m:sSub>
+                          <m:sSubPr>
+                            <m:ctrlPr>
+                              <a:rPr lang="en-US" sz="2200" b="0" i="1" smtClean="0">
+                                <a:latin typeface="Cambria Math" panose="02040503050406030204" pitchFamily="18" charset="0"/>
+                              </a:rPr>
+                            </m:ctrlPr>
+                          </m:sSubPr>
+                          <m:e>
+                            <m:r>
+                              <a:rPr lang="en-US" sz="2200" b="0" i="1" smtClean="0">
+                                <a:latin typeface="Cambria Math" panose="02040503050406030204" pitchFamily="18" charset="0"/>
+                              </a:rPr>
+                              <m:t>𝑙</m:t>
+                            </m:r>
+                          </m:e>
+                          <m:sub>
+                            <m:r>
+                              <a:rPr lang="en-US" sz="2200" b="0" i="1" smtClean="0">
+                                <a:latin typeface="Cambria Math" panose="02040503050406030204" pitchFamily="18" charset="0"/>
+                              </a:rPr>
+                              <m:t>𝑛</m:t>
+                            </m:r>
+                            <m:r>
+                              <a:rPr lang="en-US" sz="2200" b="0" i="1" smtClean="0">
+                                <a:latin typeface="Cambria Math" panose="02040503050406030204" pitchFamily="18" charset="0"/>
+                              </a:rPr>
+                              <m:t>−1</m:t>
+                            </m:r>
+                          </m:sub>
+                        </m:sSub>
+                      </m:e>
+                    </m:d>
+                    <m:r>
+                      <a:rPr lang="en-US" sz="2200" b="0" i="1" smtClean="0">
+                        <a:latin typeface="Cambria Math" panose="02040503050406030204" pitchFamily="18" charset="0"/>
+                      </a:rPr>
+                      <m:t>=</m:t>
+                    </m:r>
+                    <m:sSub>
+                      <m:sSubPr>
+                        <m:ctrlPr>
+                          <a:rPr lang="en-US" sz="2200" i="1">
+                            <a:latin typeface="Cambria Math" panose="02040503050406030204" pitchFamily="18" charset="0"/>
+                          </a:rPr>
+                        </m:ctrlPr>
+                      </m:sSubPr>
+                      <m:e>
+                        <m:r>
+                          <a:rPr lang="en-US" sz="2200" i="1">
+                            <a:latin typeface="Cambria Math" panose="02040503050406030204" pitchFamily="18" charset="0"/>
+                          </a:rPr>
+                          <m:t>𝑙</m:t>
+                        </m:r>
+                      </m:e>
+                      <m:sub>
+                        <m:r>
+                          <a:rPr lang="en-US" sz="2200" i="1">
+                            <a:latin typeface="Cambria Math" panose="02040503050406030204" pitchFamily="18" charset="0"/>
+                          </a:rPr>
+                          <m:t>𝑛</m:t>
+                        </m:r>
+                        <m:r>
+                          <a:rPr lang="en-US" sz="2200" i="1">
+                            <a:latin typeface="Cambria Math" panose="02040503050406030204" pitchFamily="18" charset="0"/>
+                          </a:rPr>
+                          <m:t>−1</m:t>
+                        </m:r>
+                      </m:sub>
+                    </m:sSub>
+                    <m:r>
+                      <a:rPr lang="en-US" sz="2200" i="1">
+                        <a:latin typeface="Cambria Math" panose="02040503050406030204" pitchFamily="18" charset="0"/>
+                      </a:rPr>
+                      <m:t>+</m:t>
+                    </m:r>
+                    <m:r>
+                      <a:rPr lang="en-US" sz="2200" i="1">
+                        <a:latin typeface="Cambria Math" panose="02040503050406030204" pitchFamily="18" charset="0"/>
+                      </a:rPr>
+                      <m:t>𝛼</m:t>
+                    </m:r>
+                    <m:d>
+                      <m:dPr>
+                        <m:ctrlPr>
+                          <a:rPr lang="en-US" sz="2200" i="1">
+                            <a:latin typeface="Cambria Math" panose="02040503050406030204" pitchFamily="18" charset="0"/>
+                          </a:rPr>
+                        </m:ctrlPr>
+                      </m:dPr>
+                      <m:e>
+                        <m:sSub>
+                          <m:sSubPr>
+                            <m:ctrlPr>
+                              <a:rPr lang="en-US" sz="2200" i="1">
+                                <a:latin typeface="Cambria Math" panose="02040503050406030204" pitchFamily="18" charset="0"/>
+                              </a:rPr>
+                            </m:ctrlPr>
+                          </m:sSubPr>
+                          <m:e>
+                            <m:r>
+                              <a:rPr lang="en-US" sz="2200" i="1">
+                                <a:latin typeface="Cambria Math" panose="02040503050406030204" pitchFamily="18" charset="0"/>
+                              </a:rPr>
+                              <m:t>𝑦</m:t>
+                            </m:r>
+                          </m:e>
+                          <m:sub>
+                            <m:r>
+                              <a:rPr lang="en-US" sz="2200" i="1">
+                                <a:latin typeface="Cambria Math" panose="02040503050406030204" pitchFamily="18" charset="0"/>
+                              </a:rPr>
+                              <m:t>𝑛</m:t>
+                            </m:r>
+                          </m:sub>
+                        </m:sSub>
+                        <m:r>
+                          <a:rPr lang="en-US" sz="2200" i="1">
+                            <a:latin typeface="Cambria Math" panose="02040503050406030204" pitchFamily="18" charset="0"/>
+                          </a:rPr>
+                          <m:t>−</m:t>
+                        </m:r>
+                        <m:sSub>
+                          <m:sSubPr>
+                            <m:ctrlPr>
+                              <a:rPr lang="en-US" sz="2200" i="1">
+                                <a:latin typeface="Cambria Math" panose="02040503050406030204" pitchFamily="18" charset="0"/>
+                              </a:rPr>
+                            </m:ctrlPr>
+                          </m:sSubPr>
+                          <m:e>
+                            <m:acc>
+                              <m:accPr>
+                                <m:chr m:val="̂"/>
+                                <m:ctrlPr>
+                                  <a:rPr lang="en-US" sz="2200" i="1">
+                                    <a:latin typeface="Cambria Math" panose="02040503050406030204" pitchFamily="18" charset="0"/>
+                                  </a:rPr>
+                                </m:ctrlPr>
+                              </m:accPr>
+                              <m:e>
+                                <m:r>
+                                  <a:rPr lang="en-US" sz="2200" i="1">
+                                    <a:latin typeface="Cambria Math" panose="02040503050406030204" pitchFamily="18" charset="0"/>
+                                  </a:rPr>
+                                  <m:t>𝑦</m:t>
+                                </m:r>
+                              </m:e>
+                            </m:acc>
+                          </m:e>
+                          <m:sub>
+                            <m:r>
+                              <a:rPr lang="en-US" sz="2200" i="1">
+                                <a:latin typeface="Cambria Math" panose="02040503050406030204" pitchFamily="18" charset="0"/>
+                              </a:rPr>
+                              <m:t>𝑛</m:t>
+                            </m:r>
+                          </m:sub>
+                        </m:sSub>
+                      </m:e>
+                    </m:d>
+                    <m:r>
+                      <a:rPr lang="en-US" sz="2200" b="0" i="1" smtClean="0">
+                        <a:latin typeface="Cambria Math" panose="02040503050406030204" pitchFamily="18" charset="0"/>
+                      </a:rPr>
+                      <m:t>=</m:t>
+                    </m:r>
+                    <m:sSub>
+                      <m:sSubPr>
+                        <m:ctrlPr>
+                          <a:rPr lang="en-US" sz="2200" i="1">
+                            <a:latin typeface="Cambria Math" panose="02040503050406030204" pitchFamily="18" charset="0"/>
+                          </a:rPr>
+                        </m:ctrlPr>
+                      </m:sSubPr>
+                      <m:e>
+                        <m:r>
+                          <a:rPr lang="en-US" sz="2200" i="1">
+                            <a:latin typeface="Cambria Math" panose="02040503050406030204" pitchFamily="18" charset="0"/>
+                          </a:rPr>
+                          <m:t>𝑙</m:t>
+                        </m:r>
+                      </m:e>
+                      <m:sub>
+                        <m:r>
+                          <a:rPr lang="en-US" sz="2200" i="1">
+                            <a:latin typeface="Cambria Math" panose="02040503050406030204" pitchFamily="18" charset="0"/>
+                          </a:rPr>
+                          <m:t>𝑛</m:t>
+                        </m:r>
+                        <m:r>
+                          <a:rPr lang="en-US" sz="2200" i="1">
+                            <a:latin typeface="Cambria Math" panose="02040503050406030204" pitchFamily="18" charset="0"/>
+                          </a:rPr>
+                          <m:t>−1</m:t>
+                        </m:r>
+                      </m:sub>
+                    </m:sSub>
+                    <m:r>
+                      <a:rPr lang="en-US" sz="2200" i="1">
+                        <a:latin typeface="Cambria Math" panose="02040503050406030204" pitchFamily="18" charset="0"/>
+                      </a:rPr>
+                      <m:t>+</m:t>
+                    </m:r>
+                    <m:r>
+                      <a:rPr lang="en-US" sz="2200" i="1">
+                        <a:latin typeface="Cambria Math" panose="02040503050406030204" pitchFamily="18" charset="0"/>
+                      </a:rPr>
+                      <m:t>𝛼</m:t>
+                    </m:r>
+                    <m:sSub>
+                      <m:sSubPr>
+                        <m:ctrlPr>
+                          <a:rPr lang="en-US" sz="2200" b="0" i="1" smtClean="0">
+                            <a:latin typeface="Cambria Math" panose="02040503050406030204" pitchFamily="18" charset="0"/>
+                          </a:rPr>
+                        </m:ctrlPr>
+                      </m:sSubPr>
+                      <m:e>
+                        <m:r>
+                          <a:rPr lang="en-US" sz="2200" b="0" i="1" smtClean="0">
+                            <a:latin typeface="Cambria Math" panose="02040503050406030204" pitchFamily="18" charset="0"/>
+                          </a:rPr>
+                          <m:t>𝑒</m:t>
+                        </m:r>
+                      </m:e>
+                      <m:sub>
+                        <m:r>
+                          <a:rPr lang="en-US" sz="2200" b="0" i="1" smtClean="0">
+                            <a:latin typeface="Cambria Math" panose="02040503050406030204" pitchFamily="18" charset="0"/>
+                          </a:rPr>
+                          <m:t>𝑛</m:t>
+                        </m:r>
+                      </m:sub>
+                    </m:sSub>
+                    <m:r>
+                      <a:rPr lang="en-US" sz="2200" b="0" i="0" smtClean="0">
+                        <a:latin typeface="Cambria Math" panose="02040503050406030204" pitchFamily="18" charset="0"/>
+                      </a:rPr>
+                      <m:t>,  </m:t>
+                    </m:r>
+                  </m:oMath>
+                </a14:m>
+                <a:endParaRPr lang="ru-RU" sz="2200" b="0" i="0" dirty="0">
+                  <a:latin typeface="Cambria Math" panose="02040503050406030204" pitchFamily="18" charset="0"/>
+                </a:endParaRPr>
+              </a:p>
+              <a:p>
+                <a:pPr marL="0" indent="0">
+                  <a:lnSpc>
+                    <a:spcPct val="110000"/>
+                  </a:lnSpc>
+                  <a:buNone/>
+                </a:pPr>
+                <a14:m>
+                  <m:oMath xmlns:m="http://schemas.openxmlformats.org/officeDocument/2006/math">
+                    <m:r>
+                      <a:rPr lang="ru-RU" sz="2200" b="0" i="0" smtClean="0">
+                        <a:latin typeface="Cambria Math" panose="02040503050406030204" pitchFamily="18" charset="0"/>
+                      </a:rPr>
+                      <m:t>где </m:t>
+                    </m:r>
+                    <m:sSub>
+                      <m:sSubPr>
+                        <m:ctrlPr>
+                          <a:rPr lang="en-US" sz="2200" i="1">
+                            <a:latin typeface="Cambria Math" panose="02040503050406030204" pitchFamily="18" charset="0"/>
+                          </a:rPr>
+                        </m:ctrlPr>
+                      </m:sSubPr>
+                      <m:e>
+                        <m:r>
+                          <a:rPr lang="en-US" sz="2200" i="1">
+                            <a:latin typeface="Cambria Math" panose="02040503050406030204" pitchFamily="18" charset="0"/>
+                          </a:rPr>
+                          <m:t>𝑒</m:t>
+                        </m:r>
+                      </m:e>
+                      <m:sub>
+                        <m:r>
+                          <a:rPr lang="en-US" sz="2200" i="1">
+                            <a:latin typeface="Cambria Math" panose="02040503050406030204" pitchFamily="18" charset="0"/>
+                          </a:rPr>
+                          <m:t>𝑛</m:t>
+                        </m:r>
+                      </m:sub>
+                    </m:sSub>
+                  </m:oMath>
+                </a14:m>
+                <a:r>
+                  <a:rPr lang="ru-RU" sz="2200" dirty="0"/>
+                  <a:t> - остаток в модели (инновация) в модели. </a:t>
+                </a:r>
+              </a:p>
+              <a:p>
+                <a:pPr marL="0" indent="0">
+                  <a:lnSpc>
+                    <a:spcPct val="110000"/>
+                  </a:lnSpc>
+                  <a:buNone/>
+                </a:pPr>
+                <a:r>
+                  <a:rPr lang="ru-RU" sz="2200" dirty="0"/>
+                  <a:t>Тогда можно ввести модель </a:t>
+                </a:r>
+                <a:r>
+                  <a:rPr lang="en-US" sz="2200" dirty="0"/>
+                  <a:t>Error-Trend-Seasonality</a:t>
+                </a:r>
+                <a:r>
+                  <a:rPr lang="ru-RU" sz="2200" b="1" dirty="0"/>
+                  <a:t> </a:t>
+                </a:r>
+                <a:r>
+                  <a:rPr lang="en-US" sz="2200" dirty="0"/>
+                  <a:t>ETS(T, S, E)</a:t>
+                </a:r>
+                <a:r>
+                  <a:rPr lang="ru-RU" sz="2200" dirty="0"/>
+                  <a:t>:Тренд </a:t>
+                </a:r>
+                <a:r>
+                  <a:rPr lang="en-US" sz="2200" dirty="0"/>
+                  <a:t>(T)</a:t>
+                </a:r>
+                <a:r>
+                  <a:rPr lang="ru-RU" sz="2200" dirty="0"/>
+                  <a:t> , сезонность</a:t>
+                </a:r>
+                <a:r>
+                  <a:rPr lang="en-US" sz="2200" dirty="0"/>
+                  <a:t> (S)</a:t>
+                </a:r>
+                <a:r>
+                  <a:rPr lang="ru-RU" sz="2200" dirty="0"/>
+                  <a:t> , ошибка модели</a:t>
+                </a:r>
+                <a:r>
+                  <a:rPr lang="en-US" sz="2200" dirty="0"/>
+                  <a:t> (E)</a:t>
+                </a:r>
+                <a:r>
+                  <a:rPr lang="ru-RU" sz="2200" dirty="0"/>
+                  <a:t>.</a:t>
+                </a:r>
+              </a:p>
+              <a:p>
+                <a:pPr marL="0" indent="0">
+                  <a:lnSpc>
+                    <a:spcPct val="110000"/>
+                  </a:lnSpc>
+                  <a:buNone/>
+                </a:pPr>
+                <a:r>
+                  <a:rPr lang="ru-RU" sz="2200" dirty="0"/>
+                  <a:t>Модели могут быть в разных соотношениях </a:t>
+                </a:r>
+                <a:endParaRPr lang="en-US" sz="2200" dirty="0"/>
+              </a:p>
+              <a:p>
+                <a:pPr>
+                  <a:lnSpc>
+                    <a:spcPct val="110000"/>
+                  </a:lnSpc>
+                  <a:spcBef>
+                    <a:spcPts val="0"/>
+                  </a:spcBef>
+                </a:pPr>
+                <a:r>
+                  <a:rPr lang="en-US" sz="2000" dirty="0"/>
+                  <a:t>A – </a:t>
+                </a:r>
+                <a:r>
+                  <a:rPr lang="ru-RU" sz="2000" dirty="0"/>
+                  <a:t>аддитивная модель, </a:t>
+                </a:r>
+                <a:endParaRPr lang="en-US" sz="2000" dirty="0"/>
+              </a:p>
+              <a:p>
+                <a:pPr>
+                  <a:lnSpc>
+                    <a:spcPct val="110000"/>
+                  </a:lnSpc>
+                  <a:spcBef>
+                    <a:spcPts val="0"/>
+                  </a:spcBef>
+                </a:pPr>
+                <a:r>
+                  <a:rPr lang="en-US" sz="2000" dirty="0"/>
+                  <a:t>Ad – </a:t>
+                </a:r>
+                <a:r>
+                  <a:rPr lang="ru-RU" sz="2000" dirty="0"/>
+                  <a:t>затухающая аддитивная модель, </a:t>
+                </a:r>
+                <a:endParaRPr lang="en-US" sz="2000" dirty="0"/>
+              </a:p>
+              <a:p>
+                <a:pPr>
+                  <a:lnSpc>
+                    <a:spcPct val="110000"/>
+                  </a:lnSpc>
+                  <a:spcBef>
+                    <a:spcPts val="0"/>
+                  </a:spcBef>
+                </a:pPr>
+                <a:r>
+                  <a:rPr lang="en-US" sz="2000" dirty="0"/>
+                  <a:t>M – </a:t>
+                </a:r>
+                <a:r>
+                  <a:rPr lang="ru-RU" sz="2000" dirty="0"/>
+                  <a:t>мультипликативная модель, </a:t>
+                </a:r>
+                <a:endParaRPr lang="en-US" sz="2000" dirty="0"/>
+              </a:p>
+              <a:p>
+                <a:pPr>
+                  <a:lnSpc>
+                    <a:spcPct val="110000"/>
+                  </a:lnSpc>
+                  <a:spcBef>
+                    <a:spcPts val="0"/>
+                  </a:spcBef>
+                </a:pPr>
+                <a:r>
+                  <a:rPr lang="en-US" sz="2000" dirty="0"/>
+                  <a:t>N – </a:t>
+                </a:r>
+                <a:r>
+                  <a:rPr lang="ru-RU" sz="2000" dirty="0"/>
+                  <a:t>компонента не</a:t>
+                </a:r>
+                <a:r>
+                  <a:rPr lang="en-US" sz="2000" dirty="0"/>
+                  <a:t> </a:t>
+                </a:r>
+                <a:r>
+                  <a:rPr lang="ru-RU" sz="2000" dirty="0"/>
+                  <a:t>сглаживается</a:t>
+                </a:r>
+              </a:p>
+              <a:p>
+                <a:pPr marL="0" indent="0">
+                  <a:lnSpc>
+                    <a:spcPct val="110000"/>
+                  </a:lnSpc>
+                  <a:spcBef>
+                    <a:spcPts val="0"/>
+                  </a:spcBef>
+                  <a:buNone/>
+                </a:pPr>
+                <a:r>
+                  <a:rPr lang="ru-RU" sz="2000" dirty="0"/>
+                  <a:t>Напр. </a:t>
+                </a:r>
+                <a:r>
+                  <a:rPr lang="en-US" sz="2000" dirty="0"/>
+                  <a:t>ETS (A, A, A) – </a:t>
+                </a:r>
+                <a:r>
+                  <a:rPr lang="ru-RU" sz="2000" dirty="0"/>
+                  <a:t>модель </a:t>
+                </a:r>
+                <a:r>
+                  <a:rPr lang="ru-RU" sz="2000" dirty="0" err="1"/>
+                  <a:t>Холта-Винтерса</a:t>
+                </a:r>
+                <a:r>
+                  <a:rPr lang="ru-RU" sz="2000" dirty="0"/>
+                  <a:t>.</a:t>
+                </a:r>
+              </a:p>
+            </p:txBody>
+          </p:sp>
+        </mc:Choice>
+        <mc:Fallback xmlns="">
+          <p:sp>
+            <p:nvSpPr>
+              <p:cNvPr id="3" name="Объект 2">
+                <a:extLst>
+                  <a:ext uri="{FF2B5EF4-FFF2-40B4-BE49-F238E27FC236}">
+                    <a16:creationId xmlns:a16="http://schemas.microsoft.com/office/drawing/2014/main" id="{9CFDC76D-90F0-4FD7-8BA6-954D6D2E6FFD}"/>
+                  </a:ext>
+                </a:extLst>
+              </p:cNvPr>
+              <p:cNvSpPr>
+                <a:spLocks noGrp="1" noRot="1" noChangeAspect="1" noMove="1" noResize="1" noEditPoints="1" noAdjustHandles="1" noChangeArrowheads="1" noChangeShapeType="1" noTextEdit="1"/>
+              </p:cNvSpPr>
+              <p:nvPr>
+                <p:ph idx="1"/>
+              </p:nvPr>
+            </p:nvSpPr>
+            <p:spPr>
+              <a:xfrm>
+                <a:off x="206264" y="769492"/>
+                <a:ext cx="11985736" cy="5509656"/>
+              </a:xfrm>
+              <a:blipFill>
+                <a:blip r:embed="rId3"/>
+                <a:stretch>
+                  <a:fillRect l="-661" t="-553"/>
+                </a:stretch>
+              </a:blipFill>
+            </p:spPr>
+            <p:txBody>
+              <a:bodyPr/>
+              <a:lstStyle/>
+              <a:p>
+                <a:r>
+                  <a:rPr lang="ru-RU">
+                    <a:noFill/>
+                  </a:rPr>
+                  <a:t> </a:t>
+                </a:r>
+              </a:p>
+            </p:txBody>
+          </p:sp>
+        </mc:Fallback>
+      </mc:AlternateContent>
+      <p:sp>
+        <p:nvSpPr>
+          <p:cNvPr id="5" name="Прямоугольник 4"/>
+          <p:cNvSpPr/>
+          <p:nvPr/>
+        </p:nvSpPr>
+        <p:spPr>
+          <a:xfrm>
+            <a:off x="504825" y="6488668"/>
+            <a:ext cx="9077325" cy="338554"/>
+          </a:xfrm>
+          <a:prstGeom prst="rect">
+            <a:avLst/>
+          </a:prstGeom>
+        </p:spPr>
+        <p:txBody>
+          <a:bodyPr wrap="square">
+            <a:spAutoFit/>
+          </a:bodyPr>
+          <a:lstStyle/>
+          <a:p>
+            <a:r>
+              <a:rPr lang="en-US" sz="1600" dirty="0"/>
+              <a:t>https://openforecast.org/adam/ETSTaxonomy.html</a:t>
+            </a:r>
+            <a:endParaRPr lang="ru-RU" sz="1600" dirty="0"/>
+          </a:p>
+        </p:txBody>
+      </p:sp>
+      <p:sp>
+        <p:nvSpPr>
+          <p:cNvPr id="15" name="Прямоугольник 14"/>
+          <p:cNvSpPr/>
+          <p:nvPr/>
+        </p:nvSpPr>
+        <p:spPr>
+          <a:xfrm>
+            <a:off x="4914900" y="6490811"/>
+            <a:ext cx="5324475" cy="338554"/>
+          </a:xfrm>
+          <a:prstGeom prst="rect">
+            <a:avLst/>
+          </a:prstGeom>
+        </p:spPr>
+        <p:txBody>
+          <a:bodyPr wrap="square">
+            <a:spAutoFit/>
+          </a:bodyPr>
+          <a:lstStyle/>
+          <a:p>
+            <a:r>
+              <a:rPr lang="en-US" sz="1600" dirty="0"/>
+              <a:t>https://otexts.com/fpp2/ets.html</a:t>
+            </a:r>
+            <a:endParaRPr lang="ru-RU" sz="1600" dirty="0"/>
+          </a:p>
+        </p:txBody>
+      </p:sp>
+      <p:sp>
+        <p:nvSpPr>
+          <p:cNvPr id="16" name="Объект 2">
+            <a:extLst>
+              <a:ext uri="{FF2B5EF4-FFF2-40B4-BE49-F238E27FC236}">
+                <a16:creationId xmlns:a16="http://schemas.microsoft.com/office/drawing/2014/main" id="{9CFDC76D-90F0-4FD7-8BA6-954D6D2E6FFD}"/>
+              </a:ext>
+            </a:extLst>
+          </p:cNvPr>
+          <p:cNvSpPr txBox="1">
+            <a:spLocks/>
+          </p:cNvSpPr>
+          <p:nvPr/>
+        </p:nvSpPr>
+        <p:spPr>
+          <a:xfrm>
+            <a:off x="504825" y="979012"/>
+            <a:ext cx="9907643" cy="5502274"/>
+          </a:xfrm>
+          <a:prstGeom prst="rect">
+            <a:avLst/>
+          </a:prstGeom>
+        </p:spPr>
+        <p:txBody>
+          <a:bodyPr vert="horz" lIns="91440" tIns="45720" rIns="91440" bIns="45720" rtlCol="0">
+            <a:normAutofit/>
+          </a:bodyPr>
+          <a:lstStyle>
+            <a:lvl1pPr marL="228600" indent="-228600" algn="l" defTabSz="914400" rtl="0" eaLnBrk="1" latinLnBrk="0" hangingPunct="1">
+              <a:lnSpc>
+                <a:spcPct val="90000"/>
+              </a:lnSpc>
+              <a:spcBef>
+                <a:spcPts val="1000"/>
+              </a:spcBef>
+              <a:buFont typeface="Arial" panose="020B0604020202020204" pitchFamily="34" charset="0"/>
+              <a:buChar char="•"/>
+              <a:defRPr sz="2800" kern="1200">
+                <a:solidFill>
+                  <a:schemeClr val="tx1"/>
+                </a:solidFill>
+                <a:latin typeface="+mn-lt"/>
+                <a:ea typeface="+mn-ea"/>
+                <a:cs typeface="+mn-cs"/>
+              </a:defRPr>
+            </a:lvl1pPr>
+            <a:lvl2pPr marL="685800" indent="-228600" algn="l" defTabSz="914400" rtl="0" eaLnBrk="1" latinLnBrk="0" hangingPunct="1">
+              <a:lnSpc>
+                <a:spcPct val="90000"/>
+              </a:lnSpc>
+              <a:spcBef>
+                <a:spcPts val="500"/>
+              </a:spcBef>
+              <a:buFont typeface="Arial" panose="020B0604020202020204" pitchFamily="34" charset="0"/>
+              <a:buChar char="•"/>
+              <a:defRPr sz="2400" kern="1200">
+                <a:solidFill>
+                  <a:schemeClr val="tx1"/>
+                </a:solidFill>
+                <a:latin typeface="+mn-lt"/>
+                <a:ea typeface="+mn-ea"/>
+                <a:cs typeface="+mn-cs"/>
+              </a:defRPr>
+            </a:lvl2pPr>
+            <a:lvl3pPr marL="1143000" indent="-228600" algn="l" defTabSz="914400" rtl="0" eaLnBrk="1" latinLnBrk="0" hangingPunct="1">
+              <a:lnSpc>
+                <a:spcPct val="90000"/>
+              </a:lnSpc>
+              <a:spcBef>
+                <a:spcPts val="500"/>
+              </a:spcBef>
+              <a:buFont typeface="Arial" panose="020B0604020202020204" pitchFamily="34" charset="0"/>
+              <a:buChar char="•"/>
+              <a:defRPr sz="2000" kern="1200">
+                <a:solidFill>
+                  <a:schemeClr val="tx1"/>
+                </a:solidFill>
+                <a:latin typeface="+mn-lt"/>
+                <a:ea typeface="+mn-ea"/>
+                <a:cs typeface="+mn-cs"/>
+              </a:defRPr>
+            </a:lvl3pPr>
+            <a:lvl4pPr marL="1600200" indent="-228600" algn="l" defTabSz="914400" rtl="0" eaLnBrk="1" latinLnBrk="0" hangingPunct="1">
+              <a:lnSpc>
+                <a:spcPct val="90000"/>
+              </a:lnSpc>
+              <a:spcBef>
+                <a:spcPts val="500"/>
+              </a:spcBef>
+              <a:buFont typeface="Arial" panose="020B0604020202020204" pitchFamily="34" charset="0"/>
+              <a:buChar char="•"/>
+              <a:defRPr sz="1800" kern="1200">
+                <a:solidFill>
+                  <a:schemeClr val="tx1"/>
+                </a:solidFill>
+                <a:latin typeface="+mn-lt"/>
+                <a:ea typeface="+mn-ea"/>
+                <a:cs typeface="+mn-cs"/>
+              </a:defRPr>
+            </a:lvl4pPr>
+            <a:lvl5pPr marL="2057400" indent="-228600" algn="l" defTabSz="914400" rtl="0" eaLnBrk="1" latinLnBrk="0" hangingPunct="1">
+              <a:lnSpc>
+                <a:spcPct val="90000"/>
+              </a:lnSpc>
+              <a:spcBef>
+                <a:spcPts val="500"/>
+              </a:spcBef>
+              <a:buFont typeface="Arial" panose="020B0604020202020204" pitchFamily="34" charset="0"/>
+              <a:buChar char="•"/>
+              <a:defRPr sz="1800" kern="1200">
+                <a:solidFill>
+                  <a:schemeClr val="tx1"/>
+                </a:solidFill>
+                <a:latin typeface="+mn-lt"/>
+                <a:ea typeface="+mn-ea"/>
+                <a:cs typeface="+mn-cs"/>
+              </a:defRPr>
+            </a:lvl5pPr>
+            <a:lvl6pPr marL="2514600" indent="-228600" algn="l" defTabSz="914400" rtl="0" eaLnBrk="1" latinLnBrk="0" hangingPunct="1">
+              <a:lnSpc>
+                <a:spcPct val="90000"/>
+              </a:lnSpc>
+              <a:spcBef>
+                <a:spcPts val="500"/>
+              </a:spcBef>
+              <a:buFont typeface="Arial" panose="020B0604020202020204" pitchFamily="34" charset="0"/>
+              <a:buChar char="•"/>
+              <a:defRPr sz="1800" kern="1200">
+                <a:solidFill>
+                  <a:schemeClr val="tx1"/>
+                </a:solidFill>
+                <a:latin typeface="+mn-lt"/>
+                <a:ea typeface="+mn-ea"/>
+                <a:cs typeface="+mn-cs"/>
+              </a:defRPr>
+            </a:lvl6pPr>
+            <a:lvl7pPr marL="2971800" indent="-228600" algn="l" defTabSz="914400" rtl="0" eaLnBrk="1" latinLnBrk="0" hangingPunct="1">
+              <a:lnSpc>
+                <a:spcPct val="90000"/>
+              </a:lnSpc>
+              <a:spcBef>
+                <a:spcPts val="500"/>
+              </a:spcBef>
+              <a:buFont typeface="Arial" panose="020B0604020202020204" pitchFamily="34" charset="0"/>
+              <a:buChar char="•"/>
+              <a:defRPr sz="1800" kern="1200">
+                <a:solidFill>
+                  <a:schemeClr val="tx1"/>
+                </a:solidFill>
+                <a:latin typeface="+mn-lt"/>
+                <a:ea typeface="+mn-ea"/>
+                <a:cs typeface="+mn-cs"/>
+              </a:defRPr>
+            </a:lvl7pPr>
+            <a:lvl8pPr marL="3429000" indent="-228600" algn="l" defTabSz="914400" rtl="0" eaLnBrk="1" latinLnBrk="0" hangingPunct="1">
+              <a:lnSpc>
+                <a:spcPct val="90000"/>
+              </a:lnSpc>
+              <a:spcBef>
+                <a:spcPts val="500"/>
+              </a:spcBef>
+              <a:buFont typeface="Arial" panose="020B0604020202020204" pitchFamily="34" charset="0"/>
+              <a:buChar char="•"/>
+              <a:defRPr sz="1800" kern="1200">
+                <a:solidFill>
+                  <a:schemeClr val="tx1"/>
+                </a:solidFill>
+                <a:latin typeface="+mn-lt"/>
+                <a:ea typeface="+mn-ea"/>
+                <a:cs typeface="+mn-cs"/>
+              </a:defRPr>
+            </a:lvl8pPr>
+            <a:lvl9pPr marL="3886200" indent="-228600" algn="l" defTabSz="914400" rtl="0" eaLnBrk="1" latinLnBrk="0" hangingPunct="1">
+              <a:lnSpc>
+                <a:spcPct val="90000"/>
+              </a:lnSpc>
+              <a:spcBef>
+                <a:spcPts val="500"/>
+              </a:spcBef>
+              <a:buFont typeface="Arial" panose="020B0604020202020204" pitchFamily="34" charset="0"/>
+              <a:buChar char="•"/>
+              <a:defRPr sz="1800" kern="1200">
+                <a:solidFill>
+                  <a:schemeClr val="tx1"/>
+                </a:solidFill>
+                <a:latin typeface="+mn-lt"/>
+                <a:ea typeface="+mn-ea"/>
+                <a:cs typeface="+mn-cs"/>
+              </a:defRPr>
+            </a:lvl9pPr>
+          </a:lstStyle>
+          <a:p>
+            <a:pPr marL="0" indent="0">
+              <a:buFont typeface="Arial" panose="020B0604020202020204" pitchFamily="34" charset="0"/>
+              <a:buNone/>
+            </a:pPr>
+            <a:r>
+              <a:rPr lang="en-US" sz="2200" dirty="0"/>
+              <a:t> </a:t>
+            </a:r>
+            <a:endParaRPr lang="ru-RU" sz="2000" dirty="0"/>
+          </a:p>
+        </p:txBody>
+      </p:sp>
+      <p:pic>
+        <p:nvPicPr>
+          <p:cNvPr id="8" name="Рисунок 7"/>
+          <p:cNvPicPr>
+            <a:picLocks noChangeAspect="1"/>
+          </p:cNvPicPr>
+          <p:nvPr/>
+        </p:nvPicPr>
+        <p:blipFill>
+          <a:blip r:embed="rId4"/>
+          <a:stretch>
+            <a:fillRect/>
+          </a:stretch>
+        </p:blipFill>
+        <p:spPr>
+          <a:xfrm>
+            <a:off x="5745954" y="3725671"/>
+            <a:ext cx="6283298" cy="2654546"/>
+          </a:xfrm>
+          <a:prstGeom prst="rect">
+            <a:avLst/>
+          </a:prstGeom>
+        </p:spPr>
+      </p:pic>
+      <p:sp>
+        <p:nvSpPr>
+          <p:cNvPr id="18" name="Прямоугольник 17"/>
+          <p:cNvSpPr/>
+          <p:nvPr/>
+        </p:nvSpPr>
+        <p:spPr>
+          <a:xfrm>
+            <a:off x="8201025" y="6359634"/>
+            <a:ext cx="5324475" cy="338554"/>
+          </a:xfrm>
+          <a:prstGeom prst="rect">
+            <a:avLst/>
+          </a:prstGeom>
+        </p:spPr>
+        <p:txBody>
+          <a:bodyPr wrap="square">
+            <a:spAutoFit/>
+          </a:bodyPr>
+          <a:lstStyle/>
+          <a:p>
+            <a:r>
+              <a:rPr lang="ru-RU" sz="1600" dirty="0"/>
+              <a:t>Аналогично мультипликативный тренд</a:t>
+            </a:r>
+          </a:p>
+        </p:txBody>
+      </p:sp>
+    </p:spTree>
+    <p:extLst>
+      <p:ext uri="{BB962C8B-B14F-4D97-AF65-F5344CB8AC3E}">
+        <p14:creationId xmlns:p14="http://schemas.microsoft.com/office/powerpoint/2010/main" val="2495676499"/>
+      </p:ext>
+    </p:extLst>
+  </p:cSld>
+  <p:clrMapOvr>
+    <a:masterClrMapping/>
+  </p:clrMapOvr>
+  <p:timing>
+    <p:tnLst>
+      <p:par>
+        <p:cTn id="1" dur="indefinite" restart="never" nodeType="tmRoot"/>
+      </p:par>
+    </p:tnLst>
+  </p:timing>
+</p:sld>
+</file>
+
+<file path=ppt/slides/slide12.xml><?xml version="1.0" encoding="utf-8"?>
+<p:sld xmlns:a="http://schemas.openxmlformats.org/drawingml/2006/main" xmlns:r="http://schemas.openxmlformats.org/officeDocument/2006/relationships" xmlns:p="http://schemas.openxmlformats.org/presentationml/2006/main">
+  <p:cSld>
+    <p:spTree>
+      <p:nvGrpSpPr>
+        <p:cNvPr id="1" name=""/>
+        <p:cNvGrpSpPr/>
+        <p:nvPr/>
+      </p:nvGrpSpPr>
+      <p:grpSpPr>
+        <a:xfrm>
+          <a:off x="0" y="0"/>
+          <a:ext cx="0" cy="0"/>
+          <a:chOff x="0" y="0"/>
+          <a:chExt cx="0" cy="0"/>
+        </a:xfrm>
+      </p:grpSpPr>
+      <p:sp>
+        <p:nvSpPr>
+          <p:cNvPr id="2" name="Заголовок 1">
+            <a:extLst>
+              <a:ext uri="{FF2B5EF4-FFF2-40B4-BE49-F238E27FC236}">
+                <a16:creationId xmlns:a16="http://schemas.microsoft.com/office/drawing/2014/main" id="{3FB6B433-AB20-4BD4-8E77-84B856A5D608}"/>
+              </a:ext>
+            </a:extLst>
+          </p:cNvPr>
+          <p:cNvSpPr>
+            <a:spLocks noGrp="1"/>
+          </p:cNvSpPr>
+          <p:nvPr>
+            <p:ph type="title"/>
+          </p:nvPr>
+        </p:nvSpPr>
+        <p:spPr>
+          <a:xfrm>
             <a:off x="226957" y="93605"/>
             <a:ext cx="11802295" cy="933115"/>
           </a:xfrm>
@@ -4896,7 +6600,7 @@
 </p:sld>
 </file>
 
-<file path=ppt/slides/slide11.xml><?xml version="1.0" encoding="utf-8"?>
+<file path=ppt/slides/slide13.xml><?xml version="1.0" encoding="utf-8"?>
 <p:sld xmlns:a="http://schemas.openxmlformats.org/drawingml/2006/main" xmlns:r="http://schemas.openxmlformats.org/officeDocument/2006/relationships" xmlns:p="http://schemas.openxmlformats.org/presentationml/2006/main">
   <p:cSld>
     <p:spTree>
@@ -5542,10 +7246,17 @@
   <p:clrMapOvr>
     <a:masterClrMapping/>
   </p:clrMapOvr>
+  <p:timing>
+    <p:tnLst>
+      <p:par>
+        <p:cTn id="1" dur="indefinite" restart="never" nodeType="tmRoot"/>
+      </p:par>
+    </p:tnLst>
+  </p:timing>
 </p:sld>
 </file>
 
-<file path=ppt/slides/slide12.xml><?xml version="1.0" encoding="utf-8"?>
+<file path=ppt/slides/slide14.xml><?xml version="1.0" encoding="utf-8"?>
 <p:sld xmlns:a="http://schemas.openxmlformats.org/drawingml/2006/main" xmlns:r="http://schemas.openxmlformats.org/officeDocument/2006/relationships" xmlns:p="http://schemas.openxmlformats.org/presentationml/2006/main">
   <p:cSld>
     <p:spTree>
@@ -5960,7 +7671,7 @@
 </p:sld>
 </file>
 
-<file path=ppt/slides/slide13.xml><?xml version="1.0" encoding="utf-8"?>
+<file path=ppt/slides/slide15.xml><?xml version="1.0" encoding="utf-8"?>
 <p:sld xmlns:a="http://schemas.openxmlformats.org/drawingml/2006/main" xmlns:r="http://schemas.openxmlformats.org/officeDocument/2006/relationships" xmlns:p="http://schemas.openxmlformats.org/presentationml/2006/main">
   <p:cSld>
     <p:spTree>
@@ -7162,7 +8873,7 @@
 </p:sld>
 </file>
 
-<file path=ppt/slides/slide14.xml><?xml version="1.0" encoding="utf-8"?>
+<file path=ppt/slides/slide16.xml><?xml version="1.0" encoding="utf-8"?>
 <p:sld xmlns:a="http://schemas.openxmlformats.org/drawingml/2006/main" xmlns:r="http://schemas.openxmlformats.org/officeDocument/2006/relationships" xmlns:p="http://schemas.openxmlformats.org/presentationml/2006/main">
   <p:cSld>
     <p:spTree>
@@ -7341,8 +9052,29 @@
           <a:p>
             <a:r>
               <a:rPr lang="ru-RU" sz="1400" dirty="0"/>
-              <a:t>https://medium.com/intive-developers/forecasting-time-series-with-multiple-seasonalities-using-tbats-in-python-398a00ac0e8a</a:t>
-            </a:r>
+              <a:t>https</a:t>
+            </a:r>
+            <a:r>
+              <a:rPr lang="ru-RU" sz="1400" dirty="0" smtClean="0"/>
+              <a:t>://</a:t>
+            </a:r>
+            <a:r>
+              <a:rPr lang="en-US" sz="1400" dirty="0" smtClean="0"/>
+              <a:t>read</a:t>
+            </a:r>
+            <a:r>
+              <a:rPr lang="ru-RU" sz="1400" dirty="0" smtClean="0"/>
+              <a:t>medium.com/</a:t>
+            </a:r>
+            <a:r>
+              <a:rPr lang="ru-RU" sz="1400" dirty="0" err="1" smtClean="0"/>
+              <a:t>intive-developers</a:t>
+            </a:r>
+            <a:r>
+              <a:rPr lang="ru-RU" sz="1400" dirty="0" smtClean="0"/>
+              <a:t>/forecasting-time-series-with-multiple-seasonalities-using-tbats-in-python-398a00ac0e8a</a:t>
+            </a:r>
+            <a:endParaRPr lang="ru-RU" sz="1400" dirty="0"/>
           </a:p>
         </p:txBody>
       </p:sp>
@@ -7366,7 +9098,7 @@
 </p:sld>
 </file>
 
-<file path=ppt/slides/slide15.xml><?xml version="1.0" encoding="utf-8"?>
+<file path=ppt/slides/slide17.xml><?xml version="1.0" encoding="utf-8"?>
 <p:sld xmlns:a="http://schemas.openxmlformats.org/drawingml/2006/main" xmlns:r="http://schemas.openxmlformats.org/officeDocument/2006/relationships" xmlns:p="http://schemas.openxmlformats.org/presentationml/2006/main">
   <p:cSld>
     <p:spTree>
@@ -8839,7 +10571,7 @@
 </p:sld>
 </file>
 
-<file path=ppt/slides/slide16.xml><?xml version="1.0" encoding="utf-8"?>
+<file path=ppt/slides/slide18.xml><?xml version="1.0" encoding="utf-8"?>
 <p:sld xmlns:a="http://schemas.openxmlformats.org/drawingml/2006/main" xmlns:r="http://schemas.openxmlformats.org/officeDocument/2006/relationships" xmlns:p="http://schemas.openxmlformats.org/presentationml/2006/main">
   <p:cSld>
     <p:spTree>
@@ -9692,10 +11424,17 @@
   <p:clrMapOvr>
     <a:masterClrMapping/>
   </p:clrMapOvr>
+  <p:timing>
+    <p:tnLst>
+      <p:par>
+        <p:cTn id="1" dur="indefinite" restart="never" nodeType="tmRoot"/>
+      </p:par>
+    </p:tnLst>
+  </p:timing>
 </p:sld>
 </file>
 
-<file path=ppt/slides/slide17.xml><?xml version="1.0" encoding="utf-8"?>
+<file path=ppt/slides/slide19.xml><?xml version="1.0" encoding="utf-8"?>
 <p:sld xmlns:a="http://schemas.openxmlformats.org/drawingml/2006/main" xmlns:r="http://schemas.openxmlformats.org/officeDocument/2006/relationships" xmlns:p="http://schemas.openxmlformats.org/presentationml/2006/main">
   <p:cSld>
     <p:spTree>
@@ -9921,7 +11660,84 @@
 </p:sld>
 </file>
 
-<file path=ppt/slides/slide18.xml><?xml version="1.0" encoding="utf-8"?>
+<file path=ppt/slides/slide2.xml><?xml version="1.0" encoding="utf-8"?>
+<p:sld xmlns:a="http://schemas.openxmlformats.org/drawingml/2006/main" xmlns:r="http://schemas.openxmlformats.org/officeDocument/2006/relationships" xmlns:p="http://schemas.openxmlformats.org/presentationml/2006/main">
+  <p:cSld>
+    <p:spTree>
+      <p:nvGrpSpPr>
+        <p:cNvPr id="1" name=""/>
+        <p:cNvGrpSpPr/>
+        <p:nvPr/>
+      </p:nvGrpSpPr>
+      <p:grpSpPr>
+        <a:xfrm>
+          <a:off x="0" y="0"/>
+          <a:ext cx="0" cy="0"/>
+          <a:chOff x="0" y="0"/>
+          <a:chExt cx="0" cy="0"/>
+        </a:xfrm>
+      </p:grpSpPr>
+      <p:sp>
+        <p:nvSpPr>
+          <p:cNvPr id="2" name="Заголовок 1">
+            <a:extLst>
+              <a:ext uri="{FF2B5EF4-FFF2-40B4-BE49-F238E27FC236}">
+                <a16:creationId xmlns:a16="http://schemas.microsoft.com/office/drawing/2014/main" id="{9AE3A209-E86B-43CF-A4CE-1917FCF9C1BD}"/>
+              </a:ext>
+            </a:extLst>
+          </p:cNvPr>
+          <p:cNvSpPr>
+            <a:spLocks noGrp="1"/>
+          </p:cNvSpPr>
+          <p:nvPr>
+            <p:ph type="ctrTitle"/>
+          </p:nvPr>
+        </p:nvSpPr>
+        <p:spPr>
+          <a:xfrm>
+            <a:off x="385343" y="728616"/>
+            <a:ext cx="10932920" cy="863964"/>
+          </a:xfrm>
+        </p:spPr>
+        <p:txBody>
+          <a:bodyPr>
+            <a:normAutofit fontScale="90000"/>
+          </a:bodyPr>
+          <a:lstStyle/>
+          <a:p>
+            <a:r>
+              <a:rPr lang="en-US" sz="8000" b="1" dirty="0" smtClean="0"/>
+              <a:t>TS </a:t>
+            </a:r>
+            <a:r>
+              <a:rPr lang="ru-RU" sz="8000" b="1" dirty="0" smtClean="0"/>
+              <a:t>модель</a:t>
+            </a:r>
+            <a:endParaRPr lang="en-US" sz="8000" b="1" dirty="0"/>
+          </a:p>
+        </p:txBody>
+      </p:sp>
+    </p:spTree>
+    <p:extLst>
+      <p:ext uri="{BB962C8B-B14F-4D97-AF65-F5344CB8AC3E}">
+        <p14:creationId xmlns:p14="http://schemas.microsoft.com/office/powerpoint/2010/main" val="2895557766"/>
+      </p:ext>
+    </p:extLst>
+  </p:cSld>
+  <p:clrMapOvr>
+    <a:masterClrMapping/>
+  </p:clrMapOvr>
+  <p:timing>
+    <p:tnLst>
+      <p:par>
+        <p:cTn id="1" dur="indefinite" restart="never" nodeType="tmRoot"/>
+      </p:par>
+    </p:tnLst>
+  </p:timing>
+</p:sld>
+</file>
+
+<file path=ppt/slides/slide20.xml><?xml version="1.0" encoding="utf-8"?>
 <p:sld xmlns:a="http://schemas.openxmlformats.org/drawingml/2006/main" xmlns:r="http://schemas.openxmlformats.org/officeDocument/2006/relationships" xmlns:p="http://schemas.openxmlformats.org/presentationml/2006/main">
   <p:cSld>
     <p:spTree>
@@ -11428,7 +13244,7 @@
 </p:sld>
 </file>
 
-<file path=ppt/slides/slide19.xml><?xml version="1.0" encoding="utf-8"?>
+<file path=ppt/slides/slide21.xml><?xml version="1.0" encoding="utf-8"?>
 <p:sld xmlns:a="http://schemas.openxmlformats.org/drawingml/2006/main" xmlns:r="http://schemas.openxmlformats.org/officeDocument/2006/relationships" xmlns:p="http://schemas.openxmlformats.org/presentationml/2006/main">
   <p:cSld>
     <p:spTree>
@@ -12610,1151 +14426,6 @@
   <p:clrMapOvr>
     <a:masterClrMapping/>
   </p:clrMapOvr>
-</p:sld>
-</file>
-
-<file path=ppt/slides/slide2.xml><?xml version="1.0" encoding="utf-8"?>
-<p:sld xmlns:a="http://schemas.openxmlformats.org/drawingml/2006/main" xmlns:r="http://schemas.openxmlformats.org/officeDocument/2006/relationships" xmlns:p="http://schemas.openxmlformats.org/presentationml/2006/main">
-  <p:cSld>
-    <p:spTree>
-      <p:nvGrpSpPr>
-        <p:cNvPr id="1" name=""/>
-        <p:cNvGrpSpPr/>
-        <p:nvPr/>
-      </p:nvGrpSpPr>
-      <p:grpSpPr>
-        <a:xfrm>
-          <a:off x="0" y="0"/>
-          <a:ext cx="0" cy="0"/>
-          <a:chOff x="0" y="0"/>
-          <a:chExt cx="0" cy="0"/>
-        </a:xfrm>
-      </p:grpSpPr>
-      <p:sp>
-        <p:nvSpPr>
-          <p:cNvPr id="2" name="Заголовок 1">
-            <a:extLst>
-              <a:ext uri="{FF2B5EF4-FFF2-40B4-BE49-F238E27FC236}">
-                <a16:creationId xmlns:a16="http://schemas.microsoft.com/office/drawing/2014/main" id="{3FB6B433-AB20-4BD4-8E77-84B856A5D608}"/>
-              </a:ext>
-            </a:extLst>
-          </p:cNvPr>
-          <p:cNvSpPr>
-            <a:spLocks noGrp="1"/>
-          </p:cNvSpPr>
-          <p:nvPr>
-            <p:ph type="title"/>
-          </p:nvPr>
-        </p:nvSpPr>
-        <p:spPr>
-          <a:xfrm>
-            <a:off x="504825" y="454025"/>
-            <a:ext cx="11277600" cy="806450"/>
-          </a:xfrm>
-        </p:spPr>
-        <p:txBody>
-          <a:bodyPr>
-            <a:normAutofit fontScale="90000"/>
-          </a:bodyPr>
-          <a:lstStyle/>
-          <a:p>
-            <a:pPr algn="ctr"/>
-            <a:r>
-              <a:rPr lang="ru-RU" sz="4000" b="1" dirty="0"/>
-              <a:t>Модель экспоненциального сглаживания </a:t>
-            </a:r>
-            <a:br>
-              <a:rPr lang="ru-RU" sz="4000" b="1" dirty="0"/>
-            </a:br>
-            <a:r>
-              <a:rPr lang="ru-RU" sz="4000" dirty="0"/>
-              <a:t>SES (</a:t>
-            </a:r>
-            <a:r>
-              <a:rPr lang="ru-RU" sz="4000" dirty="0" err="1"/>
-              <a:t>Single</a:t>
-            </a:r>
-            <a:r>
-              <a:rPr lang="ru-RU" sz="4000" dirty="0"/>
-              <a:t> </a:t>
-            </a:r>
-            <a:r>
-              <a:rPr lang="ru-RU" sz="4000" dirty="0" err="1"/>
-              <a:t>Exponential</a:t>
-            </a:r>
-            <a:r>
-              <a:rPr lang="ru-RU" sz="4000" dirty="0"/>
-              <a:t> </a:t>
-            </a:r>
-            <a:r>
-              <a:rPr lang="en-US" sz="4000" dirty="0"/>
-              <a:t>Smoothing</a:t>
-            </a:r>
-            <a:r>
-              <a:rPr lang="ru-RU" sz="4000" dirty="0"/>
-              <a:t>)</a:t>
-            </a:r>
-            <a:r>
-              <a:rPr lang="en-US" dirty="0"/>
-              <a:t/>
-            </a:r>
-            <a:br>
-              <a:rPr lang="en-US" dirty="0"/>
-            </a:br>
-            <a:endParaRPr lang="ru-RU" b="1" dirty="0"/>
-          </a:p>
-        </p:txBody>
-      </p:sp>
-      <mc:AlternateContent xmlns:mc="http://schemas.openxmlformats.org/markup-compatibility/2006" xmlns:a14="http://schemas.microsoft.com/office/drawing/2010/main">
-        <mc:Choice Requires="a14">
-          <p:sp>
-            <p:nvSpPr>
-              <p:cNvPr id="3" name="Объект 2">
-                <a:extLst>
-                  <a:ext uri="{FF2B5EF4-FFF2-40B4-BE49-F238E27FC236}">
-                    <a16:creationId xmlns:a16="http://schemas.microsoft.com/office/drawing/2014/main" id="{9CFDC76D-90F0-4FD7-8BA6-954D6D2E6FFD}"/>
-                  </a:ext>
-                </a:extLst>
-              </p:cNvPr>
-              <p:cNvSpPr>
-                <a:spLocks noGrp="1"/>
-              </p:cNvSpPr>
-              <p:nvPr>
-                <p:ph idx="1"/>
-              </p:nvPr>
-            </p:nvSpPr>
-            <p:spPr>
-              <a:xfrm>
-                <a:off x="247650" y="1113910"/>
-                <a:ext cx="11791949" cy="5502274"/>
-              </a:xfrm>
-            </p:spPr>
-            <p:txBody>
-              <a:bodyPr>
-                <a:normAutofit/>
-              </a:bodyPr>
-              <a:lstStyle/>
-              <a:p>
-                <a:pPr marL="0" indent="0">
-                  <a:lnSpc>
-                    <a:spcPct val="100000"/>
-                  </a:lnSpc>
-                  <a:spcBef>
-                    <a:spcPts val="300"/>
-                  </a:spcBef>
-                  <a:buNone/>
-                </a:pPr>
-                <a:r>
-                  <a:rPr lang="ru-RU" sz="2200" dirty="0"/>
-                  <a:t>Если временной ряд преимущественно представляет собой тренд, то его можно представить как</a:t>
-                </a:r>
-              </a:p>
-              <a:p>
-                <a:pPr marL="0" indent="0">
-                  <a:lnSpc>
-                    <a:spcPct val="100000"/>
-                  </a:lnSpc>
-                  <a:spcBef>
-                    <a:spcPts val="300"/>
-                  </a:spcBef>
-                  <a:buNone/>
-                </a:pPr>
-                <a14:m>
-                  <m:oMathPara xmlns:m="http://schemas.openxmlformats.org/officeDocument/2006/math">
-                    <m:oMathParaPr>
-                      <m:jc m:val="centerGroup"/>
-                    </m:oMathParaPr>
-                    <m:oMath xmlns:m="http://schemas.openxmlformats.org/officeDocument/2006/math">
-                      <m:sSub>
-                        <m:sSubPr>
-                          <m:ctrlPr>
-                            <a:rPr lang="en-US" sz="2200" i="1">
-                              <a:latin typeface="Cambria Math" panose="02040503050406030204" pitchFamily="18" charset="0"/>
-                            </a:rPr>
-                          </m:ctrlPr>
-                        </m:sSubPr>
-                        <m:e>
-                          <m:acc>
-                            <m:accPr>
-                              <m:chr m:val="̂"/>
-                              <m:ctrlPr>
-                                <a:rPr lang="en-US" sz="2200" i="1">
-                                  <a:latin typeface="Cambria Math" panose="02040503050406030204" pitchFamily="18" charset="0"/>
-                                </a:rPr>
-                              </m:ctrlPr>
-                            </m:accPr>
-                            <m:e>
-                              <m:r>
-                                <a:rPr lang="en-US" sz="2200" i="1">
-                                  <a:latin typeface="Cambria Math" panose="02040503050406030204" pitchFamily="18" charset="0"/>
-                                </a:rPr>
-                                <m:t>𝑦</m:t>
-                              </m:r>
-                            </m:e>
-                          </m:acc>
-                        </m:e>
-                        <m:sub>
-                          <m:r>
-                            <a:rPr lang="en-US" sz="2200" i="1">
-                              <a:latin typeface="Cambria Math" panose="02040503050406030204" pitchFamily="18" charset="0"/>
-                            </a:rPr>
-                            <m:t>𝑛</m:t>
-                          </m:r>
-                          <m:r>
-                            <a:rPr lang="ru-RU" sz="2200" b="0" i="1" smtClean="0">
-                              <a:latin typeface="Cambria Math" panose="02040503050406030204" pitchFamily="18" charset="0"/>
-                            </a:rPr>
-                            <m:t>+1</m:t>
-                          </m:r>
-                        </m:sub>
-                      </m:sSub>
-                      <m:r>
-                        <a:rPr lang="en-US" sz="2200" i="1">
-                          <a:latin typeface="Cambria Math" panose="02040503050406030204" pitchFamily="18" charset="0"/>
-                        </a:rPr>
-                        <m:t>=</m:t>
-                      </m:r>
-                      <m:r>
-                        <a:rPr lang="en-US" sz="2200" i="1">
-                          <a:latin typeface="Cambria Math" panose="02040503050406030204" pitchFamily="18" charset="0"/>
-                        </a:rPr>
-                        <m:t>𝛼</m:t>
-                      </m:r>
-                      <m:sSub>
-                        <m:sSubPr>
-                          <m:ctrlPr>
-                            <a:rPr lang="en-US" sz="2200" i="1">
-                              <a:latin typeface="Cambria Math" panose="02040503050406030204" pitchFamily="18" charset="0"/>
-                            </a:rPr>
-                          </m:ctrlPr>
-                        </m:sSubPr>
-                        <m:e>
-                          <m:r>
-                            <a:rPr lang="en-US" sz="2200" i="1">
-                              <a:latin typeface="Cambria Math" panose="02040503050406030204" pitchFamily="18" charset="0"/>
-                            </a:rPr>
-                            <m:t>𝑦</m:t>
-                          </m:r>
-                        </m:e>
-                        <m:sub>
-                          <m:r>
-                            <a:rPr lang="en-US" sz="2200" i="1">
-                              <a:latin typeface="Cambria Math" panose="02040503050406030204" pitchFamily="18" charset="0"/>
-                            </a:rPr>
-                            <m:t>𝑛</m:t>
-                          </m:r>
-                        </m:sub>
-                      </m:sSub>
-                      <m:r>
-                        <a:rPr lang="en-US" sz="2200" i="1">
-                          <a:latin typeface="Cambria Math" panose="02040503050406030204" pitchFamily="18" charset="0"/>
-                        </a:rPr>
-                        <m:t>+</m:t>
-                      </m:r>
-                      <m:d>
-                        <m:dPr>
-                          <m:ctrlPr>
-                            <a:rPr lang="en-US" sz="2200" i="1">
-                              <a:latin typeface="Cambria Math" panose="02040503050406030204" pitchFamily="18" charset="0"/>
-                            </a:rPr>
-                          </m:ctrlPr>
-                        </m:dPr>
-                        <m:e>
-                          <m:r>
-                            <a:rPr lang="en-US" sz="2200" i="1">
-                              <a:latin typeface="Cambria Math" panose="02040503050406030204" pitchFamily="18" charset="0"/>
-                            </a:rPr>
-                            <m:t>1−</m:t>
-                          </m:r>
-                          <m:r>
-                            <a:rPr lang="en-US" sz="2200" i="1">
-                              <a:latin typeface="Cambria Math" panose="02040503050406030204" pitchFamily="18" charset="0"/>
-                            </a:rPr>
-                            <m:t>𝛼</m:t>
-                          </m:r>
-                        </m:e>
-                      </m:d>
-                      <m:sSub>
-                        <m:sSubPr>
-                          <m:ctrlPr>
-                            <a:rPr lang="en-US" sz="2200" i="1">
-                              <a:latin typeface="Cambria Math" panose="02040503050406030204" pitchFamily="18" charset="0"/>
-                            </a:rPr>
-                          </m:ctrlPr>
-                        </m:sSubPr>
-                        <m:e>
-                          <m:acc>
-                            <m:accPr>
-                              <m:chr m:val="̂"/>
-                              <m:ctrlPr>
-                                <a:rPr lang="en-US" sz="2200" i="1">
-                                  <a:latin typeface="Cambria Math" panose="02040503050406030204" pitchFamily="18" charset="0"/>
-                                </a:rPr>
-                              </m:ctrlPr>
-                            </m:accPr>
-                            <m:e>
-                              <m:r>
-                                <a:rPr lang="en-US" sz="2200" i="1">
-                                  <a:latin typeface="Cambria Math" panose="02040503050406030204" pitchFamily="18" charset="0"/>
-                                </a:rPr>
-                                <m:t>𝑦</m:t>
-                              </m:r>
-                            </m:e>
-                          </m:acc>
-                        </m:e>
-                        <m:sub>
-                          <m:r>
-                            <a:rPr lang="en-US" sz="2200" i="1">
-                              <a:latin typeface="Cambria Math" panose="02040503050406030204" pitchFamily="18" charset="0"/>
-                            </a:rPr>
-                            <m:t>𝑛</m:t>
-                          </m:r>
-                          <m:r>
-                            <a:rPr lang="en-US" sz="2200" i="1">
-                              <a:latin typeface="Cambria Math" panose="02040503050406030204" pitchFamily="18" charset="0"/>
-                            </a:rPr>
-                            <m:t>−1</m:t>
-                          </m:r>
-                        </m:sub>
-                      </m:sSub>
-                      <m:r>
-                        <a:rPr lang="en-US" sz="2200" i="1">
-                          <a:latin typeface="Cambria Math" panose="02040503050406030204" pitchFamily="18" charset="0"/>
-                        </a:rPr>
-                        <m:t>,</m:t>
-                      </m:r>
-                      <m:r>
-                        <a:rPr lang="en-US" sz="2200" b="0" i="1" smtClean="0">
-                          <a:latin typeface="Cambria Math" panose="02040503050406030204" pitchFamily="18" charset="0"/>
-                        </a:rPr>
-                        <m:t>   </m:t>
-                      </m:r>
-                    </m:oMath>
-                  </m:oMathPara>
-                </a14:m>
-                <a:endParaRPr lang="en-US" sz="2200" dirty="0"/>
-              </a:p>
-              <a:p>
-                <a:pPr marL="0" indent="0">
-                  <a:lnSpc>
-                    <a:spcPct val="100000"/>
-                  </a:lnSpc>
-                  <a:spcBef>
-                    <a:spcPts val="300"/>
-                  </a:spcBef>
-                  <a:buNone/>
-                </a:pPr>
-                <a:r>
-                  <a:rPr lang="ru-RU" sz="2200" dirty="0"/>
-                  <a:t>	где</a:t>
-                </a:r>
-                <a:r>
-                  <a:rPr lang="en-US" sz="2200" dirty="0"/>
-                  <a:t> </a:t>
-                </a:r>
-                <a14:m>
-                  <m:oMath xmlns:m="http://schemas.openxmlformats.org/officeDocument/2006/math">
-                    <m:r>
-                      <a:rPr lang="en-US" sz="2200" i="1">
-                        <a:latin typeface="Cambria Math" panose="02040503050406030204" pitchFamily="18" charset="0"/>
-                      </a:rPr>
-                      <m:t>𝛼</m:t>
-                    </m:r>
-                  </m:oMath>
-                </a14:m>
-                <a:r>
-                  <a:rPr lang="en-US" sz="2200" dirty="0"/>
-                  <a:t> </a:t>
-                </a:r>
-                <a:r>
-                  <a:rPr lang="ru-RU" sz="2200" dirty="0"/>
-                  <a:t>– это параметр сглаживания</a:t>
-                </a:r>
-                <a:r>
-                  <a:rPr lang="en-US" sz="2200" dirty="0"/>
-                  <a:t>; </a:t>
-                </a:r>
-                <a14:m>
-                  <m:oMath xmlns:m="http://schemas.openxmlformats.org/officeDocument/2006/math">
-                    <m:acc>
-                      <m:accPr>
-                        <m:chr m:val="̂"/>
-                        <m:ctrlPr>
-                          <a:rPr lang="en-US" sz="2200" i="1">
-                            <a:latin typeface="Cambria Math" panose="02040503050406030204" pitchFamily="18" charset="0"/>
-                          </a:rPr>
-                        </m:ctrlPr>
-                      </m:accPr>
-                      <m:e>
-                        <m:r>
-                          <a:rPr lang="en-US" sz="2200" i="1">
-                            <a:latin typeface="Cambria Math" panose="02040503050406030204" pitchFamily="18" charset="0"/>
-                          </a:rPr>
-                          <m:t>𝑦</m:t>
-                        </m:r>
-                      </m:e>
-                    </m:acc>
-                  </m:oMath>
-                </a14:m>
-                <a:r>
-                  <a:rPr lang="en-US" sz="2200" dirty="0"/>
-                  <a:t> </a:t>
-                </a:r>
-                <a:r>
-                  <a:rPr lang="ru-RU" sz="2200" dirty="0"/>
-                  <a:t>– предсказанное значение</a:t>
-                </a:r>
-                <a:r>
-                  <a:rPr lang="en-US" sz="2200" dirty="0"/>
-                  <a:t>, </a:t>
-                </a:r>
-                <a14:m>
-                  <m:oMath xmlns:m="http://schemas.openxmlformats.org/officeDocument/2006/math">
-                    <m:sSub>
-                      <m:sSubPr>
-                        <m:ctrlPr>
-                          <a:rPr lang="en-US" sz="2200" i="1">
-                            <a:latin typeface="Cambria Math" panose="02040503050406030204" pitchFamily="18" charset="0"/>
-                          </a:rPr>
-                        </m:ctrlPr>
-                      </m:sSubPr>
-                      <m:e>
-                        <m:acc>
-                          <m:accPr>
-                            <m:chr m:val="̂"/>
-                            <m:ctrlPr>
-                              <a:rPr lang="en-US" sz="2200" i="1">
-                                <a:latin typeface="Cambria Math" panose="02040503050406030204" pitchFamily="18" charset="0"/>
-                              </a:rPr>
-                            </m:ctrlPr>
-                          </m:accPr>
-                          <m:e>
-                            <m:r>
-                              <a:rPr lang="en-US" sz="2200" i="1">
-                                <a:latin typeface="Cambria Math" panose="02040503050406030204" pitchFamily="18" charset="0"/>
-                              </a:rPr>
-                              <m:t>𝑦</m:t>
-                            </m:r>
-                          </m:e>
-                        </m:acc>
-                      </m:e>
-                      <m:sub>
-                        <m:r>
-                          <a:rPr lang="en-US" sz="2200" i="1">
-                            <a:latin typeface="Cambria Math" panose="02040503050406030204" pitchFamily="18" charset="0"/>
-                          </a:rPr>
-                          <m:t>0</m:t>
-                        </m:r>
-                      </m:sub>
-                    </m:sSub>
-                    <m:r>
-                      <a:rPr lang="en-US" sz="2200" i="1">
-                        <a:latin typeface="Cambria Math" panose="02040503050406030204" pitchFamily="18" charset="0"/>
-                      </a:rPr>
-                      <m:t>=</m:t>
-                    </m:r>
-                    <m:sSub>
-                      <m:sSubPr>
-                        <m:ctrlPr>
-                          <a:rPr lang="en-US" sz="2200" i="1">
-                            <a:latin typeface="Cambria Math" panose="02040503050406030204" pitchFamily="18" charset="0"/>
-                          </a:rPr>
-                        </m:ctrlPr>
-                      </m:sSubPr>
-                      <m:e>
-                        <m:r>
-                          <a:rPr lang="en-US" sz="2200" i="1">
-                            <a:latin typeface="Cambria Math" panose="02040503050406030204" pitchFamily="18" charset="0"/>
-                          </a:rPr>
-                          <m:t>𝑦</m:t>
-                        </m:r>
-                      </m:e>
-                      <m:sub>
-                        <m:r>
-                          <a:rPr lang="en-US" sz="2200" i="1">
-                            <a:latin typeface="Cambria Math" panose="02040503050406030204" pitchFamily="18" charset="0"/>
-                          </a:rPr>
-                          <m:t>0</m:t>
-                        </m:r>
-                      </m:sub>
-                    </m:sSub>
-                  </m:oMath>
-                </a14:m>
-                <a:endParaRPr lang="ru-RU" sz="2200" dirty="0"/>
-              </a:p>
-              <a:p>
-                <a:pPr marL="0" indent="0">
-                  <a:lnSpc>
-                    <a:spcPct val="100000"/>
-                  </a:lnSpc>
-                  <a:spcBef>
-                    <a:spcPts val="300"/>
-                  </a:spcBef>
-                  <a:buNone/>
-                </a:pPr>
-                <a14:m>
-                  <m:oMath xmlns:m="http://schemas.openxmlformats.org/officeDocument/2006/math">
-                    <m:sSub>
-                      <m:sSubPr>
-                        <m:ctrlPr>
-                          <a:rPr lang="en-US" sz="2200" i="1">
-                            <a:latin typeface="Cambria Math" panose="02040503050406030204" pitchFamily="18" charset="0"/>
-                          </a:rPr>
-                        </m:ctrlPr>
-                      </m:sSubPr>
-                      <m:e>
-                        <m:acc>
-                          <m:accPr>
-                            <m:chr m:val="̂"/>
-                            <m:ctrlPr>
-                              <a:rPr lang="en-US" sz="2200" i="1">
-                                <a:latin typeface="Cambria Math" panose="02040503050406030204" pitchFamily="18" charset="0"/>
-                              </a:rPr>
-                            </m:ctrlPr>
-                          </m:accPr>
-                          <m:e>
-                            <m:r>
-                              <a:rPr lang="en-US" sz="2200" i="1">
-                                <a:latin typeface="Cambria Math" panose="02040503050406030204" pitchFamily="18" charset="0"/>
-                              </a:rPr>
-                              <m:t>𝑦</m:t>
-                            </m:r>
-                          </m:e>
-                        </m:acc>
-                      </m:e>
-                      <m:sub>
-                        <m:r>
-                          <a:rPr lang="en-US" sz="2200" i="1">
-                            <a:latin typeface="Cambria Math" panose="02040503050406030204" pitchFamily="18" charset="0"/>
-                          </a:rPr>
-                          <m:t>𝑛</m:t>
-                        </m:r>
-                        <m:r>
-                          <a:rPr lang="ru-RU" sz="2200" i="1">
-                            <a:latin typeface="Cambria Math" panose="02040503050406030204" pitchFamily="18" charset="0"/>
-                          </a:rPr>
-                          <m:t>+1</m:t>
-                        </m:r>
-                      </m:sub>
-                    </m:sSub>
-                  </m:oMath>
-                </a14:m>
-                <a:r>
-                  <a:rPr lang="ru-RU" sz="2200" dirty="0"/>
-                  <a:t> </a:t>
-                </a:r>
-                <a14:m>
-                  <m:oMath xmlns:m="http://schemas.openxmlformats.org/officeDocument/2006/math">
-                    <m:r>
-                      <a:rPr lang="en-US" sz="2200" b="0" i="1" dirty="0" smtClean="0">
-                        <a:latin typeface="Cambria Math" panose="02040503050406030204" pitchFamily="18" charset="0"/>
-                      </a:rPr>
-                      <m:t>−</m:t>
-                    </m:r>
-                  </m:oMath>
-                </a14:m>
-                <a:r>
-                  <a:rPr lang="en-US" sz="2200" dirty="0"/>
-                  <a:t> </a:t>
-                </a:r>
-                <a:r>
-                  <a:rPr lang="ru-RU" sz="2200" dirty="0"/>
-                  <a:t>частично истинное значение </a:t>
-                </a:r>
-                <a14:m>
-                  <m:oMath xmlns:m="http://schemas.openxmlformats.org/officeDocument/2006/math">
-                    <m:sSub>
-                      <m:sSubPr>
-                        <m:ctrlPr>
-                          <a:rPr lang="en-US" sz="2200" i="1">
-                            <a:latin typeface="Cambria Math" panose="02040503050406030204" pitchFamily="18" charset="0"/>
-                          </a:rPr>
-                        </m:ctrlPr>
-                      </m:sSubPr>
-                      <m:e>
-                        <m:r>
-                          <a:rPr lang="en-US" sz="2200" i="1">
-                            <a:latin typeface="Cambria Math" panose="02040503050406030204" pitchFamily="18" charset="0"/>
-                          </a:rPr>
-                          <m:t>𝑦</m:t>
-                        </m:r>
-                      </m:e>
-                      <m:sub>
-                        <m:r>
-                          <a:rPr lang="en-US" sz="2200" i="1">
-                            <a:latin typeface="Cambria Math" panose="02040503050406030204" pitchFamily="18" charset="0"/>
-                          </a:rPr>
-                          <m:t>𝑛</m:t>
-                        </m:r>
-                      </m:sub>
-                    </m:sSub>
-                  </m:oMath>
-                </a14:m>
-                <a:r>
-                  <a:rPr lang="ru-RU" sz="2200" dirty="0"/>
-                  <a:t>, частично результат предсказания</a:t>
-                </a:r>
-                <a14:m>
-                  <m:oMath xmlns:m="http://schemas.openxmlformats.org/officeDocument/2006/math">
-                    <m:r>
-                      <a:rPr lang="ru-RU" sz="2200" b="0" i="0" smtClean="0">
-                        <a:latin typeface="Cambria Math" panose="02040503050406030204" pitchFamily="18" charset="0"/>
-                      </a:rPr>
-                      <m:t> </m:t>
-                    </m:r>
-                    <m:sSub>
-                      <m:sSubPr>
-                        <m:ctrlPr>
-                          <a:rPr lang="en-US" sz="2200" i="1">
-                            <a:latin typeface="Cambria Math" panose="02040503050406030204" pitchFamily="18" charset="0"/>
-                          </a:rPr>
-                        </m:ctrlPr>
-                      </m:sSubPr>
-                      <m:e>
-                        <m:acc>
-                          <m:accPr>
-                            <m:chr m:val="̂"/>
-                            <m:ctrlPr>
-                              <a:rPr lang="en-US" sz="2200" i="1">
-                                <a:latin typeface="Cambria Math" panose="02040503050406030204" pitchFamily="18" charset="0"/>
-                              </a:rPr>
-                            </m:ctrlPr>
-                          </m:accPr>
-                          <m:e>
-                            <m:r>
-                              <a:rPr lang="en-US" sz="2200" i="1">
-                                <a:latin typeface="Cambria Math" panose="02040503050406030204" pitchFamily="18" charset="0"/>
-                              </a:rPr>
-                              <m:t>𝑦</m:t>
-                            </m:r>
-                          </m:e>
-                        </m:acc>
-                      </m:e>
-                      <m:sub>
-                        <m:r>
-                          <a:rPr lang="en-US" sz="2200" i="1">
-                            <a:latin typeface="Cambria Math" panose="02040503050406030204" pitchFamily="18" charset="0"/>
-                          </a:rPr>
-                          <m:t>𝑛</m:t>
-                        </m:r>
-                        <m:r>
-                          <a:rPr lang="en-US" sz="2200" i="1">
-                            <a:latin typeface="Cambria Math" panose="02040503050406030204" pitchFamily="18" charset="0"/>
-                          </a:rPr>
-                          <m:t>−1</m:t>
-                        </m:r>
-                      </m:sub>
-                    </m:sSub>
-                    <m:r>
-                      <a:rPr lang="en-US" sz="2200" i="1">
-                        <a:latin typeface="Cambria Math" panose="02040503050406030204" pitchFamily="18" charset="0"/>
-                      </a:rPr>
-                      <m:t> </m:t>
-                    </m:r>
-                  </m:oMath>
-                </a14:m>
-                <a:endParaRPr lang="ru-RU" sz="2200" dirty="0"/>
-              </a:p>
-              <a:p>
-                <a:pPr marL="0" indent="0">
-                  <a:lnSpc>
-                    <a:spcPct val="100000"/>
-                  </a:lnSpc>
-                  <a:spcBef>
-                    <a:spcPts val="300"/>
-                  </a:spcBef>
-                  <a:buNone/>
-                </a:pPr>
-                <a:r>
-                  <a:rPr lang="ru-RU" sz="2200" dirty="0"/>
-                  <a:t>	(</a:t>
-                </a:r>
-                <a14:m>
-                  <m:oMath xmlns:m="http://schemas.openxmlformats.org/officeDocument/2006/math">
-                    <m:sSub>
-                      <m:sSubPr>
-                        <m:ctrlPr>
-                          <a:rPr lang="en-US" sz="2200" i="1">
-                            <a:latin typeface="Cambria Math" panose="02040503050406030204" pitchFamily="18" charset="0"/>
-                          </a:rPr>
-                        </m:ctrlPr>
-                      </m:sSubPr>
-                      <m:e>
-                        <m:acc>
-                          <m:accPr>
-                            <m:chr m:val="̂"/>
-                            <m:ctrlPr>
-                              <a:rPr lang="en-US" sz="2200" i="1">
-                                <a:latin typeface="Cambria Math" panose="02040503050406030204" pitchFamily="18" charset="0"/>
-                              </a:rPr>
-                            </m:ctrlPr>
-                          </m:accPr>
-                          <m:e>
-                            <m:r>
-                              <a:rPr lang="en-US" sz="2200" i="1">
-                                <a:latin typeface="Cambria Math" panose="02040503050406030204" pitchFamily="18" charset="0"/>
-                              </a:rPr>
-                              <m:t>𝑦</m:t>
-                            </m:r>
-                          </m:e>
-                        </m:acc>
-                      </m:e>
-                      <m:sub>
-                        <m:r>
-                          <a:rPr lang="en-US" sz="2200" i="1">
-                            <a:latin typeface="Cambria Math" panose="02040503050406030204" pitchFamily="18" charset="0"/>
-                          </a:rPr>
-                          <m:t>𝑛</m:t>
-                        </m:r>
-                      </m:sub>
-                    </m:sSub>
-                  </m:oMath>
-                </a14:m>
-                <a:r>
-                  <a:rPr lang="ru-RU" sz="2200" dirty="0"/>
-                  <a:t> зависит от</a:t>
-                </a:r>
-                <a14:m>
-                  <m:oMath xmlns:m="http://schemas.openxmlformats.org/officeDocument/2006/math">
-                    <m:sSub>
-                      <m:sSubPr>
-                        <m:ctrlPr>
-                          <a:rPr lang="en-US" sz="2200" i="1">
-                            <a:latin typeface="Cambria Math" panose="02040503050406030204" pitchFamily="18" charset="0"/>
-                          </a:rPr>
-                        </m:ctrlPr>
-                      </m:sSubPr>
-                      <m:e>
-                        <m:r>
-                          <a:rPr lang="en-US" sz="2200" b="0" i="1" smtClean="0">
-                            <a:latin typeface="Cambria Math" panose="02040503050406030204" pitchFamily="18" charset="0"/>
-                          </a:rPr>
-                          <m:t> </m:t>
-                        </m:r>
-                        <m:r>
-                          <a:rPr lang="en-US" sz="2200" i="1">
-                            <a:latin typeface="Cambria Math" panose="02040503050406030204" pitchFamily="18" charset="0"/>
-                          </a:rPr>
-                          <m:t>𝑦</m:t>
-                        </m:r>
-                      </m:e>
-                      <m:sub>
-                        <m:r>
-                          <a:rPr lang="en-US" sz="2200" i="1">
-                            <a:latin typeface="Cambria Math" panose="02040503050406030204" pitchFamily="18" charset="0"/>
-                          </a:rPr>
-                          <m:t>𝑛</m:t>
-                        </m:r>
-                        <m:r>
-                          <a:rPr lang="ru-RU" sz="2200" b="0" i="1" smtClean="0">
-                            <a:latin typeface="Cambria Math" panose="02040503050406030204" pitchFamily="18" charset="0"/>
-                          </a:rPr>
-                          <m:t>−1</m:t>
-                        </m:r>
-                      </m:sub>
-                    </m:sSub>
-                  </m:oMath>
-                </a14:m>
-                <a:r>
-                  <a:rPr lang="ru-RU" sz="2200" dirty="0"/>
-                  <a:t> и </a:t>
-                </a:r>
-                <a14:m>
-                  <m:oMath xmlns:m="http://schemas.openxmlformats.org/officeDocument/2006/math">
-                    <m:sSub>
-                      <m:sSubPr>
-                        <m:ctrlPr>
-                          <a:rPr lang="en-US" sz="2200" i="1">
-                            <a:latin typeface="Cambria Math" panose="02040503050406030204" pitchFamily="18" charset="0"/>
-                          </a:rPr>
-                        </m:ctrlPr>
-                      </m:sSubPr>
-                      <m:e>
-                        <m:acc>
-                          <m:accPr>
-                            <m:chr m:val="̂"/>
-                            <m:ctrlPr>
-                              <a:rPr lang="en-US" sz="2200" i="1">
-                                <a:latin typeface="Cambria Math" panose="02040503050406030204" pitchFamily="18" charset="0"/>
-                              </a:rPr>
-                            </m:ctrlPr>
-                          </m:accPr>
-                          <m:e>
-                            <m:r>
-                              <a:rPr lang="en-US" sz="2200" i="1">
-                                <a:latin typeface="Cambria Math" panose="02040503050406030204" pitchFamily="18" charset="0"/>
-                              </a:rPr>
-                              <m:t>𝑦</m:t>
-                            </m:r>
-                          </m:e>
-                        </m:acc>
-                      </m:e>
-                      <m:sub>
-                        <m:r>
-                          <a:rPr lang="en-US" sz="2200" i="1">
-                            <a:latin typeface="Cambria Math" panose="02040503050406030204" pitchFamily="18" charset="0"/>
-                          </a:rPr>
-                          <m:t>𝑛</m:t>
-                        </m:r>
-                        <m:r>
-                          <a:rPr lang="en-US" sz="2200" i="1">
-                            <a:latin typeface="Cambria Math" panose="02040503050406030204" pitchFamily="18" charset="0"/>
-                          </a:rPr>
-                          <m:t>−2 </m:t>
-                        </m:r>
-                      </m:sub>
-                    </m:sSub>
-                    <m:r>
-                      <a:rPr lang="ru-RU" sz="2200" b="0" i="1" smtClean="0">
-                        <a:latin typeface="Cambria Math" panose="02040503050406030204" pitchFamily="18" charset="0"/>
-                      </a:rPr>
-                      <m:t>=</m:t>
-                    </m:r>
-                    <m:r>
-                      <a:rPr lang="en-US" sz="2200" b="0" i="1" smtClean="0">
-                        <a:latin typeface="Cambria Math" panose="02040503050406030204" pitchFamily="18" charset="0"/>
-                      </a:rPr>
-                      <m:t>𝑓</m:t>
-                    </m:r>
-                    <m:r>
-                      <a:rPr lang="en-US" sz="2200" b="0" i="1" smtClean="0">
-                        <a:latin typeface="Cambria Math" panose="02040503050406030204" pitchFamily="18" charset="0"/>
-                      </a:rPr>
-                      <m:t>(</m:t>
-                    </m:r>
-                    <m:sSub>
-                      <m:sSubPr>
-                        <m:ctrlPr>
-                          <a:rPr lang="en-US" sz="2200" i="1">
-                            <a:latin typeface="Cambria Math" panose="02040503050406030204" pitchFamily="18" charset="0"/>
-                          </a:rPr>
-                        </m:ctrlPr>
-                      </m:sSubPr>
-                      <m:e>
-                        <m:r>
-                          <a:rPr lang="en-US" sz="2200" i="1">
-                            <a:latin typeface="Cambria Math" panose="02040503050406030204" pitchFamily="18" charset="0"/>
-                          </a:rPr>
-                          <m:t>𝑦</m:t>
-                        </m:r>
-                      </m:e>
-                      <m:sub>
-                        <m:r>
-                          <a:rPr lang="en-US" sz="2200" i="1">
-                            <a:latin typeface="Cambria Math" panose="02040503050406030204" pitchFamily="18" charset="0"/>
-                          </a:rPr>
-                          <m:t>𝑛</m:t>
-                        </m:r>
-                        <m:r>
-                          <a:rPr lang="en-US" sz="2200" b="0" i="1" smtClean="0">
-                            <a:latin typeface="Cambria Math" panose="02040503050406030204" pitchFamily="18" charset="0"/>
-                          </a:rPr>
-                          <m:t>−3</m:t>
-                        </m:r>
-                      </m:sub>
-                    </m:sSub>
-                    <m:r>
-                      <a:rPr lang="en-US" sz="2200" b="0" i="1" smtClean="0">
-                        <a:latin typeface="Cambria Math" panose="02040503050406030204" pitchFamily="18" charset="0"/>
-                      </a:rPr>
-                      <m:t>,</m:t>
-                    </m:r>
-                    <m:sSub>
-                      <m:sSubPr>
-                        <m:ctrlPr>
-                          <a:rPr lang="en-US" sz="2200" i="1">
-                            <a:latin typeface="Cambria Math" panose="02040503050406030204" pitchFamily="18" charset="0"/>
-                          </a:rPr>
-                        </m:ctrlPr>
-                      </m:sSubPr>
-                      <m:e>
-                        <m:acc>
-                          <m:accPr>
-                            <m:chr m:val="̂"/>
-                            <m:ctrlPr>
-                              <a:rPr lang="en-US" sz="2200" i="1">
-                                <a:latin typeface="Cambria Math" panose="02040503050406030204" pitchFamily="18" charset="0"/>
-                              </a:rPr>
-                            </m:ctrlPr>
-                          </m:accPr>
-                          <m:e>
-                            <m:r>
-                              <a:rPr lang="en-US" sz="2200" i="1">
-                                <a:latin typeface="Cambria Math" panose="02040503050406030204" pitchFamily="18" charset="0"/>
-                              </a:rPr>
-                              <m:t>𝑦</m:t>
-                            </m:r>
-                          </m:e>
-                        </m:acc>
-                      </m:e>
-                      <m:sub>
-                        <m:r>
-                          <a:rPr lang="en-US" sz="2200" i="1">
-                            <a:latin typeface="Cambria Math" panose="02040503050406030204" pitchFamily="18" charset="0"/>
-                          </a:rPr>
-                          <m:t>𝑛</m:t>
-                        </m:r>
-                        <m:r>
-                          <a:rPr lang="en-US" sz="2200" i="1">
-                            <a:latin typeface="Cambria Math" panose="02040503050406030204" pitchFamily="18" charset="0"/>
-                          </a:rPr>
-                          <m:t>−4 </m:t>
-                        </m:r>
-                      </m:sub>
-                    </m:sSub>
-                    <m:r>
-                      <a:rPr lang="en-US" sz="2200" b="0" i="1" smtClean="0">
-                        <a:latin typeface="Cambria Math" panose="02040503050406030204" pitchFamily="18" charset="0"/>
-                      </a:rPr>
-                      <m:t>)</m:t>
-                    </m:r>
-                  </m:oMath>
-                </a14:m>
-                <a:r>
-                  <a:rPr lang="en-US" sz="2200" dirty="0"/>
-                  <a:t> </a:t>
-                </a:r>
-                <a:r>
-                  <a:rPr lang="ru-RU" sz="2200" dirty="0"/>
-                  <a:t>и  т.д.)</a:t>
-                </a:r>
-              </a:p>
-              <a:p>
-                <a:pPr marL="0" indent="0">
-                  <a:lnSpc>
-                    <a:spcPct val="100000"/>
-                  </a:lnSpc>
-                  <a:spcBef>
-                    <a:spcPts val="300"/>
-                  </a:spcBef>
-                  <a:buNone/>
-                </a:pPr>
-                <a:r>
-                  <a:rPr lang="ru-RU" sz="2400" dirty="0"/>
-                  <a:t>Дополнительно можно предсказать разброс (СКО) модели </a:t>
-                </a:r>
-                <a:r>
-                  <a:rPr lang="en-US" sz="2400" dirty="0"/>
-                  <a:t>SES</a:t>
-                </a:r>
-                <a:endParaRPr lang="ru-RU" sz="2400" dirty="0"/>
-              </a:p>
-              <a:p>
-                <a:pPr marL="0" indent="0">
-                  <a:lnSpc>
-                    <a:spcPct val="100000"/>
-                  </a:lnSpc>
-                  <a:spcBef>
-                    <a:spcPts val="300"/>
-                  </a:spcBef>
-                  <a:buNone/>
-                </a:pPr>
-                <a:endParaRPr lang="en-US" sz="2200" dirty="0"/>
-              </a:p>
-            </p:txBody>
-          </p:sp>
-        </mc:Choice>
-        <mc:Fallback xmlns="">
-          <p:sp>
-            <p:nvSpPr>
-              <p:cNvPr id="3" name="Объект 2">
-                <a:extLst>
-                  <a:ext uri="{FF2B5EF4-FFF2-40B4-BE49-F238E27FC236}">
-                    <a16:creationId xmlns:a16="http://schemas.microsoft.com/office/drawing/2014/main" id="{9CFDC76D-90F0-4FD7-8BA6-954D6D2E6FFD}"/>
-                  </a:ext>
-                </a:extLst>
-              </p:cNvPr>
-              <p:cNvSpPr>
-                <a:spLocks noGrp="1" noRot="1" noChangeAspect="1" noMove="1" noResize="1" noEditPoints="1" noAdjustHandles="1" noChangeArrowheads="1" noChangeShapeType="1" noTextEdit="1"/>
-              </p:cNvSpPr>
-              <p:nvPr>
-                <p:ph idx="1"/>
-              </p:nvPr>
-            </p:nvSpPr>
-            <p:spPr>
-              <a:xfrm>
-                <a:off x="247650" y="1113910"/>
-                <a:ext cx="11791949" cy="5502274"/>
-              </a:xfrm>
-              <a:blipFill>
-                <a:blip r:embed="rId3"/>
-                <a:stretch>
-                  <a:fillRect l="-827" t="-776" r="-569"/>
-                </a:stretch>
-              </a:blipFill>
-            </p:spPr>
-            <p:txBody>
-              <a:bodyPr/>
-              <a:lstStyle/>
-              <a:p>
-                <a:r>
-                  <a:rPr lang="ru-RU">
-                    <a:noFill/>
-                  </a:rPr>
-                  <a:t> </a:t>
-                </a:r>
-              </a:p>
-            </p:txBody>
-          </p:sp>
-        </mc:Fallback>
-      </mc:AlternateContent>
-      <p:pic>
-        <p:nvPicPr>
-          <p:cNvPr id="28674" name="Picture 2" descr="image.png">
-            <a:extLst>
-              <a:ext uri="{FF2B5EF4-FFF2-40B4-BE49-F238E27FC236}">
-                <a16:creationId xmlns:a16="http://schemas.microsoft.com/office/drawing/2014/main" id="{C9C3A7CA-ABAE-4A48-93DC-A97D24BFCF4D}"/>
-              </a:ext>
-            </a:extLst>
-          </p:cNvPr>
-          <p:cNvPicPr>
-            <a:picLocks noChangeAspect="1" noChangeArrowheads="1"/>
-          </p:cNvPicPr>
-          <p:nvPr/>
-        </p:nvPicPr>
-        <p:blipFill rotWithShape="1">
-          <a:blip r:embed="rId4">
-            <a:extLst>
-              <a:ext uri="{28A0092B-C50C-407E-A947-70E740481C1C}">
-                <a14:useLocalDpi xmlns:a14="http://schemas.microsoft.com/office/drawing/2010/main" val="0"/>
-              </a:ext>
-            </a:extLst>
-          </a:blip>
-          <a:srcRect l="7397" t="7773" r="7937" b="2213"/>
-          <a:stretch/>
-        </p:blipFill>
-        <p:spPr bwMode="auto">
-          <a:xfrm>
-            <a:off x="5755840" y="3470739"/>
-            <a:ext cx="5731311" cy="3048707"/>
-          </a:xfrm>
-          <a:prstGeom prst="rect">
-            <a:avLst/>
-          </a:prstGeom>
-          <a:noFill/>
-          <a:extLst>
-            <a:ext uri="{909E8E84-426E-40DD-AFC4-6F175D3DCCD1}">
-              <a14:hiddenFill xmlns:a14="http://schemas.microsoft.com/office/drawing/2010/main">
-                <a:solidFill>
-                  <a:srgbClr val="FFFFFF"/>
-                </a:solidFill>
-              </a14:hiddenFill>
-            </a:ext>
-          </a:extLst>
-        </p:spPr>
-      </p:pic>
-      <p:sp>
-        <p:nvSpPr>
-          <p:cNvPr id="5" name="Прямоугольник 4"/>
-          <p:cNvSpPr/>
-          <p:nvPr/>
-        </p:nvSpPr>
-        <p:spPr>
-          <a:xfrm>
-            <a:off x="4792067" y="6462266"/>
-            <a:ext cx="6695084" cy="338554"/>
-          </a:xfrm>
-          <a:prstGeom prst="rect">
-            <a:avLst/>
-          </a:prstGeom>
-        </p:spPr>
-        <p:txBody>
-          <a:bodyPr wrap="square">
-            <a:spAutoFit/>
-          </a:bodyPr>
-          <a:lstStyle/>
-          <a:p>
-            <a:r>
-              <a:rPr lang="ru-RU" sz="1600" dirty="0"/>
-              <a:t>https://education.yandex.ru/handbook/ml/article/analitika-vremennyh-ryadov</a:t>
-            </a:r>
-          </a:p>
-        </p:txBody>
-      </p:sp>
-      <p:sp>
-        <p:nvSpPr>
-          <p:cNvPr id="6" name="Прямоугольник 5"/>
-          <p:cNvSpPr/>
-          <p:nvPr/>
-        </p:nvSpPr>
-        <p:spPr>
-          <a:xfrm>
-            <a:off x="1330377" y="6519446"/>
-            <a:ext cx="2974725" cy="338554"/>
-          </a:xfrm>
-          <a:prstGeom prst="rect">
-            <a:avLst/>
-          </a:prstGeom>
-        </p:spPr>
-        <p:txBody>
-          <a:bodyPr wrap="none">
-            <a:spAutoFit/>
-          </a:bodyPr>
-          <a:lstStyle/>
-          <a:p>
-            <a:r>
-              <a:rPr lang="en-US" sz="1600" dirty="0"/>
-              <a:t>https://otexts.com/fpp2/ses.html</a:t>
-            </a:r>
-            <a:endParaRPr lang="ru-RU" sz="1600" dirty="0"/>
-          </a:p>
-        </p:txBody>
-      </p:sp>
-      <p:pic>
-        <p:nvPicPr>
-          <p:cNvPr id="12" name="Picture 2" descr="image.png">
-            <a:extLst>
-              <a:ext uri="{FF2B5EF4-FFF2-40B4-BE49-F238E27FC236}">
-                <a16:creationId xmlns:a16="http://schemas.microsoft.com/office/drawing/2014/main" id="{C9C3A7CA-ABAE-4A48-93DC-A97D24BFCF4D}"/>
-              </a:ext>
-            </a:extLst>
-          </p:cNvPr>
-          <p:cNvPicPr>
-            <a:picLocks noChangeAspect="1" noChangeArrowheads="1"/>
-          </p:cNvPicPr>
-          <p:nvPr/>
-        </p:nvPicPr>
-        <p:blipFill rotWithShape="1">
-          <a:blip r:embed="rId4">
-            <a:extLst>
-              <a:ext uri="{28A0092B-C50C-407E-A947-70E740481C1C}">
-                <a14:useLocalDpi xmlns:a14="http://schemas.microsoft.com/office/drawing/2010/main" val="0"/>
-              </a:ext>
-            </a:extLst>
-          </a:blip>
-          <a:srcRect l="12213" t="11080" r="79045" b="70833"/>
-          <a:stretch/>
-        </p:blipFill>
-        <p:spPr bwMode="auto">
-          <a:xfrm>
-            <a:off x="5581650" y="3433327"/>
-            <a:ext cx="1581846" cy="1637349"/>
-          </a:xfrm>
-          <a:prstGeom prst="rect">
-            <a:avLst/>
-          </a:prstGeom>
-          <a:noFill/>
-          <a:extLst>
-            <a:ext uri="{909E8E84-426E-40DD-AFC4-6F175D3DCCD1}">
-              <a14:hiddenFill xmlns:a14="http://schemas.microsoft.com/office/drawing/2010/main">
-                <a:solidFill>
-                  <a:srgbClr val="FFFFFF"/>
-                </a:solidFill>
-              </a14:hiddenFill>
-            </a:ext>
-          </a:extLst>
-        </p:spPr>
-      </p:pic>
-    </p:spTree>
-    <p:extLst>
-      <p:ext uri="{BB962C8B-B14F-4D97-AF65-F5344CB8AC3E}">
-        <p14:creationId xmlns:p14="http://schemas.microsoft.com/office/powerpoint/2010/main" val="512548261"/>
-      </p:ext>
-    </p:extLst>
-  </p:cSld>
-  <p:clrMapOvr>
-    <a:masterClrMapping/>
-  </p:clrMapOvr>
   <p:timing>
     <p:tnLst>
       <p:par>
@@ -13765,7 +14436,7 @@
 </p:sld>
 </file>
 
-<file path=ppt/slides/slide20.xml><?xml version="1.0" encoding="utf-8"?>
+<file path=ppt/slides/slide22.xml><?xml version="1.0" encoding="utf-8"?>
 <p:sld xmlns:a="http://schemas.openxmlformats.org/drawingml/2006/main" xmlns:r="http://schemas.openxmlformats.org/officeDocument/2006/relationships" xmlns:p="http://schemas.openxmlformats.org/presentationml/2006/main">
   <p:cSld>
     <p:spTree>
@@ -14003,7 +14674,7 @@
 </p:sld>
 </file>
 
-<file path=ppt/slides/slide21.xml><?xml version="1.0" encoding="utf-8"?>
+<file path=ppt/slides/slide23.xml><?xml version="1.0" encoding="utf-8"?>
 <p:sld xmlns:a="http://schemas.openxmlformats.org/drawingml/2006/main" xmlns:r="http://schemas.openxmlformats.org/officeDocument/2006/relationships" xmlns:p="http://schemas.openxmlformats.org/presentationml/2006/main">
   <p:cSld>
     <p:spTree>
@@ -14166,10 +14837,17 @@
   <p:clrMapOvr>
     <a:masterClrMapping/>
   </p:clrMapOvr>
+  <p:timing>
+    <p:tnLst>
+      <p:par>
+        <p:cTn id="1" dur="indefinite" restart="never" nodeType="tmRoot"/>
+      </p:par>
+    </p:tnLst>
+  </p:timing>
 </p:sld>
 </file>
 
-<file path=ppt/slides/slide22.xml><?xml version="1.0" encoding="utf-8"?>
+<file path=ppt/slides/slide24.xml><?xml version="1.0" encoding="utf-8"?>
 <p:sld xmlns:a="http://schemas.openxmlformats.org/drawingml/2006/main" xmlns:r="http://schemas.openxmlformats.org/officeDocument/2006/relationships" xmlns:p="http://schemas.openxmlformats.org/presentationml/2006/main">
   <p:cSld>
     <p:spTree>
@@ -14571,7 +15249,7 @@
 </p:sld>
 </file>
 
-<file path=ppt/slides/slide23.xml><?xml version="1.0" encoding="utf-8"?>
+<file path=ppt/slides/slide25.xml><?xml version="1.0" encoding="utf-8"?>
 <p:sld xmlns:a="http://schemas.openxmlformats.org/drawingml/2006/main" xmlns:r="http://schemas.openxmlformats.org/officeDocument/2006/relationships" xmlns:p="http://schemas.openxmlformats.org/presentationml/2006/main">
   <p:cSld>
     <p:spTree>
@@ -15337,7 +16015,7 @@
                 <a:ext cx="11835925" cy="5031826"/>
               </a:xfrm>
               <a:blipFill>
-                <a:blip r:embed="rId2"/>
+                <a:blip r:embed="rId3"/>
                 <a:stretch>
                   <a:fillRect l="-463" t="-727"/>
                 </a:stretch>
@@ -15367,7 +16045,7 @@
           <p:nvPr/>
         </p:nvPicPr>
         <p:blipFill>
-          <a:blip r:embed="rId3">
+          <a:blip r:embed="rId4">
             <a:extLst>
               <a:ext uri="{28A0092B-C50C-407E-A947-70E740481C1C}">
                 <a14:useLocalDpi xmlns:a14="http://schemas.microsoft.com/office/drawing/2010/main" val="0"/>
@@ -15407,8 +16085,8 @@
         </p:nvSpPr>
         <p:spPr>
           <a:xfrm>
-            <a:off x="2813687" y="6419245"/>
-            <a:ext cx="3643626" cy="369332"/>
+            <a:off x="4310976" y="6375796"/>
+            <a:ext cx="2878609" cy="307777"/>
           </a:xfrm>
           <a:prstGeom prst="rect">
             <a:avLst/>
@@ -15421,7 +16099,7 @@
           <a:lstStyle/>
           <a:p>
             <a:r>
-              <a:rPr lang="ru-RU" dirty="0"/>
+              <a:rPr lang="ru-RU" sz="1400" dirty="0"/>
               <a:t>https://xang1234.github.io/prophet/</a:t>
             </a:r>
           </a:p>
@@ -15435,7 +16113,7 @@
         </p:nvSpPr>
         <p:spPr>
           <a:xfrm>
-            <a:off x="1073921" y="6212628"/>
+            <a:off x="120080" y="6296932"/>
             <a:ext cx="6096000" cy="276999"/>
           </a:xfrm>
           <a:prstGeom prst="rect">
@@ -15450,7 +16128,208 @@
           <a:p>
             <a:r>
               <a:rPr lang="ru-RU" sz="1200" dirty="0"/>
-              <a:t>https://mlcourse.ai/book/topic09/topic9_part2_facebook_prophet.html#topic09-part2</a:t>
+              <a:t>https://</a:t>
+            </a:r>
+            <a:r>
+              <a:rPr lang="ru-RU" sz="1200" dirty="0" smtClean="0"/>
+              <a:t>mlcourse.ai/book/topic09/</a:t>
+            </a:r>
+            <a:endParaRPr lang="ru-RU" sz="1200" dirty="0"/>
+          </a:p>
+        </p:txBody>
+      </p:sp>
+      <p:sp>
+        <p:nvSpPr>
+          <p:cNvPr id="6" name="Прямоугольник 5"/>
+          <p:cNvSpPr/>
+          <p:nvPr/>
+        </p:nvSpPr>
+        <p:spPr>
+          <a:xfrm>
+            <a:off x="120080" y="6072141"/>
+            <a:ext cx="2631041" cy="276999"/>
+          </a:xfrm>
+          <a:prstGeom prst="rect">
+            <a:avLst/>
+          </a:prstGeom>
+        </p:spPr>
+        <p:txBody>
+          <a:bodyPr wrap="none">
+            <a:spAutoFit/>
+          </a:bodyPr>
+          <a:lstStyle/>
+          <a:p>
+            <a:r>
+              <a:rPr lang="ru-RU" sz="1200" dirty="0"/>
+              <a:t>https://github.com/Anagatam/Chronos</a:t>
+            </a:r>
+          </a:p>
+        </p:txBody>
+      </p:sp>
+      <p:sp>
+        <p:nvSpPr>
+          <p:cNvPr id="7" name="Прямоугольник 6"/>
+          <p:cNvSpPr/>
+          <p:nvPr/>
+        </p:nvSpPr>
+        <p:spPr>
+          <a:xfrm>
+            <a:off x="120080" y="5876952"/>
+            <a:ext cx="3630738" cy="276999"/>
+          </a:xfrm>
+          <a:prstGeom prst="rect">
+            <a:avLst/>
+          </a:prstGeom>
+        </p:spPr>
+        <p:txBody>
+          <a:bodyPr wrap="none">
+            <a:spAutoFit/>
+          </a:bodyPr>
+          <a:lstStyle/>
+          <a:p>
+            <a:r>
+              <a:rPr lang="ru-RU" sz="1200" dirty="0"/>
+              <a:t>https://juanitorduz.github.io/short_time_series_pymc/</a:t>
+            </a:r>
+          </a:p>
+        </p:txBody>
+      </p:sp>
+      <p:sp>
+        <p:nvSpPr>
+          <p:cNvPr id="8" name="Прямоугольник 7"/>
+          <p:cNvSpPr/>
+          <p:nvPr/>
+        </p:nvSpPr>
+        <p:spPr>
+          <a:xfrm>
+            <a:off x="120080" y="6529684"/>
+            <a:ext cx="2904000" cy="276999"/>
+          </a:xfrm>
+          <a:prstGeom prst="rect">
+            <a:avLst/>
+          </a:prstGeom>
+        </p:spPr>
+        <p:txBody>
+          <a:bodyPr wrap="none">
+            <a:spAutoFit/>
+          </a:bodyPr>
+          <a:lstStyle/>
+          <a:p>
+            <a:r>
+              <a:rPr lang="ru-RU" sz="1200" dirty="0"/>
+              <a:t>https://github.com/luke14free/pm-prophet</a:t>
+            </a:r>
+          </a:p>
+        </p:txBody>
+      </p:sp>
+      <p:sp>
+        <p:nvSpPr>
+          <p:cNvPr id="9" name="Прямоугольник 8"/>
+          <p:cNvSpPr/>
+          <p:nvPr/>
+        </p:nvSpPr>
+        <p:spPr>
+          <a:xfrm>
+            <a:off x="3049893" y="6081488"/>
+            <a:ext cx="6096000" cy="430887"/>
+          </a:xfrm>
+          <a:prstGeom prst="rect">
+            <a:avLst/>
+          </a:prstGeom>
+        </p:spPr>
+        <p:txBody>
+          <a:bodyPr>
+            <a:spAutoFit/>
+          </a:bodyPr>
+          <a:lstStyle/>
+          <a:p>
+            <a:r>
+              <a:rPr lang="ru-RU" sz="1050" dirty="0"/>
+              <a:t>https://www.pymc.io/projects/examples/en/latest/time_series/Air_passengers-Prophet_with_Bayesian_workflow.html</a:t>
+            </a:r>
+          </a:p>
+        </p:txBody>
+      </p:sp>
+      <p:sp>
+        <p:nvSpPr>
+          <p:cNvPr id="10" name="Прямоугольник 9"/>
+          <p:cNvSpPr/>
+          <p:nvPr/>
+        </p:nvSpPr>
+        <p:spPr>
+          <a:xfrm>
+            <a:off x="2969597" y="6573931"/>
+            <a:ext cx="2383986" cy="261610"/>
+          </a:xfrm>
+          <a:prstGeom prst="rect">
+            <a:avLst/>
+          </a:prstGeom>
+        </p:spPr>
+        <p:txBody>
+          <a:bodyPr wrap="none">
+            <a:spAutoFit/>
+          </a:bodyPr>
+          <a:lstStyle/>
+          <a:p>
+            <a:r>
+              <a:rPr lang="ru-RU" sz="1100" dirty="0"/>
+              <a:t>https://github.com/wwrechard/pydlm</a:t>
+            </a:r>
+          </a:p>
+        </p:txBody>
+      </p:sp>
+      <p:sp>
+        <p:nvSpPr>
+          <p:cNvPr id="11" name="Прямоугольник 10"/>
+          <p:cNvSpPr/>
+          <p:nvPr/>
+        </p:nvSpPr>
+        <p:spPr>
+          <a:xfrm>
+            <a:off x="3750818" y="5876951"/>
+            <a:ext cx="2854756" cy="276999"/>
+          </a:xfrm>
+          <a:prstGeom prst="rect">
+            <a:avLst/>
+          </a:prstGeom>
+        </p:spPr>
+        <p:txBody>
+          <a:bodyPr wrap="none">
+            <a:spAutoFit/>
+          </a:bodyPr>
+          <a:lstStyle/>
+          <a:p>
+            <a:r>
+              <a:rPr lang="ru-RU" sz="1200" dirty="0"/>
+              <a:t>https://github.com/jmschrei/pomegranate</a:t>
+            </a:r>
+          </a:p>
+        </p:txBody>
+      </p:sp>
+      <p:sp>
+        <p:nvSpPr>
+          <p:cNvPr id="12" name="Прямоугольник 11"/>
+          <p:cNvSpPr/>
+          <p:nvPr/>
+        </p:nvSpPr>
+        <p:spPr>
+          <a:xfrm>
+            <a:off x="2702280" y="5666220"/>
+            <a:ext cx="6096000" cy="261610"/>
+          </a:xfrm>
+          <a:prstGeom prst="rect">
+            <a:avLst/>
+          </a:prstGeom>
+        </p:spPr>
+        <p:txBody>
+          <a:bodyPr>
+            <a:spAutoFit/>
+          </a:bodyPr>
+          <a:lstStyle/>
+          <a:p>
+            <a:r>
+              <a:rPr lang="ru-RU" sz="1100" dirty="0"/>
+              <a:t>https://neuralprophet.com/science-behind/model-overview.html</a:t>
             </a:r>
           </a:p>
         </p:txBody>
@@ -15475,7 +16354,7 @@
 </p:sld>
 </file>
 
-<file path=ppt/slides/slide24.xml><?xml version="1.0" encoding="utf-8"?>
+<file path=ppt/slides/slide26.xml><?xml version="1.0" encoding="utf-8"?>
 <p:sld xmlns:a="http://schemas.openxmlformats.org/drawingml/2006/main" xmlns:r="http://schemas.openxmlformats.org/officeDocument/2006/relationships" xmlns:p="http://schemas.openxmlformats.org/presentationml/2006/main">
   <p:cSld>
     <p:spTree>
@@ -16676,7 +17555,7 @@
 </p:sld>
 </file>
 
-<file path=ppt/slides/slide25.xml><?xml version="1.0" encoding="utf-8"?>
+<file path=ppt/slides/slide27.xml><?xml version="1.0" encoding="utf-8"?>
 <p:sld xmlns:a="http://schemas.openxmlformats.org/drawingml/2006/main" xmlns:r="http://schemas.openxmlformats.org/officeDocument/2006/relationships" xmlns:p="http://schemas.openxmlformats.org/presentationml/2006/main">
   <p:cSld>
     <p:spTree>
@@ -16886,7 +17765,7 @@
 </p:sld>
 </file>
 
-<file path=ppt/slides/slide26.xml><?xml version="1.0" encoding="utf-8"?>
+<file path=ppt/slides/slide28.xml><?xml version="1.0" encoding="utf-8"?>
 <p:sld xmlns:a="http://schemas.openxmlformats.org/drawingml/2006/main" xmlns:r="http://schemas.openxmlformats.org/officeDocument/2006/relationships" xmlns:p="http://schemas.openxmlformats.org/presentationml/2006/main">
   <p:cSld>
     <p:spTree>
@@ -17400,7 +18279,7 @@
 </p:sld>
 </file>
 
-<file path=ppt/slides/slide27.xml><?xml version="1.0" encoding="utf-8"?>
+<file path=ppt/slides/slide29.xml><?xml version="1.0" encoding="utf-8"?>
 <p:sld xmlns:a="http://schemas.openxmlformats.org/drawingml/2006/main" xmlns:r="http://schemas.openxmlformats.org/officeDocument/2006/relationships" xmlns:p="http://schemas.openxmlformats.org/presentationml/2006/main">
   <p:cSld>
     <p:spTree>
@@ -17582,10 +18461,2059 @@
   <p:clrMapOvr>
     <a:masterClrMapping/>
   </p:clrMapOvr>
+  <p:timing>
+    <p:tnLst>
+      <p:par>
+        <p:cTn id="1" dur="indefinite" restart="never" nodeType="tmRoot"/>
+      </p:par>
+    </p:tnLst>
+  </p:timing>
 </p:sld>
 </file>
 
 <file path=ppt/slides/slide3.xml><?xml version="1.0" encoding="utf-8"?>
+<p:sld xmlns:a="http://schemas.openxmlformats.org/drawingml/2006/main" xmlns:r="http://schemas.openxmlformats.org/officeDocument/2006/relationships" xmlns:p="http://schemas.openxmlformats.org/presentationml/2006/main">
+  <p:cSld>
+    <p:spTree>
+      <p:nvGrpSpPr>
+        <p:cNvPr id="1" name=""/>
+        <p:cNvGrpSpPr/>
+        <p:nvPr/>
+      </p:nvGrpSpPr>
+      <p:grpSpPr>
+        <a:xfrm>
+          <a:off x="0" y="0"/>
+          <a:ext cx="0" cy="0"/>
+          <a:chOff x="0" y="0"/>
+          <a:chExt cx="0" cy="0"/>
+        </a:xfrm>
+      </p:grpSpPr>
+      <p:sp>
+        <p:nvSpPr>
+          <p:cNvPr id="2" name="Заголовок 1">
+            <a:extLst>
+              <a:ext uri="{FF2B5EF4-FFF2-40B4-BE49-F238E27FC236}">
+                <a16:creationId xmlns:a16="http://schemas.microsoft.com/office/drawing/2014/main" id="{79B0BEDB-9774-4E17-9A6B-DBCF6A1F528F}"/>
+              </a:ext>
+            </a:extLst>
+          </p:cNvPr>
+          <p:cNvSpPr>
+            <a:spLocks noGrp="1"/>
+          </p:cNvSpPr>
+          <p:nvPr>
+            <p:ph type="title"/>
+          </p:nvPr>
+        </p:nvSpPr>
+        <p:spPr>
+          <a:xfrm>
+            <a:off x="1576070" y="197786"/>
+            <a:ext cx="9849485" cy="1325563"/>
+          </a:xfrm>
+        </p:spPr>
+        <p:txBody>
+          <a:bodyPr>
+            <a:normAutofit/>
+          </a:bodyPr>
+          <a:lstStyle/>
+          <a:p>
+            <a:r>
+              <a:rPr lang="en-US" b="1" dirty="0" smtClean="0"/>
+              <a:t>TS-</a:t>
+            </a:r>
+            <a:r>
+              <a:rPr lang="ru-RU" b="1" dirty="0" smtClean="0"/>
+              <a:t>Модели </a:t>
+            </a:r>
+            <a:r>
+              <a:rPr lang="ru-RU" b="1" dirty="0"/>
+              <a:t>временных рядов</a:t>
+            </a:r>
+            <a:endParaRPr lang="en-US" b="1" dirty="0"/>
+          </a:p>
+        </p:txBody>
+      </p:sp>
+      <mc:AlternateContent xmlns:mc="http://schemas.openxmlformats.org/markup-compatibility/2006">
+        <mc:Choice xmlns:a14="http://schemas.microsoft.com/office/drawing/2010/main" Requires="a14">
+          <p:sp>
+            <p:nvSpPr>
+              <p:cNvPr id="3" name="Объект 2">
+                <a:extLst>
+                  <a:ext uri="{FF2B5EF4-FFF2-40B4-BE49-F238E27FC236}">
+                    <a16:creationId xmlns:a16="http://schemas.microsoft.com/office/drawing/2014/main" id="{4CDB8E57-5CA8-497C-990E-C304F4FBE710}"/>
+                  </a:ext>
+                </a:extLst>
+              </p:cNvPr>
+              <p:cNvSpPr>
+                <a:spLocks noGrp="1"/>
+              </p:cNvSpPr>
+              <p:nvPr>
+                <p:ph idx="1"/>
+              </p:nvPr>
+            </p:nvSpPr>
+            <p:spPr>
+              <a:xfrm>
+                <a:off x="209550" y="1114427"/>
+                <a:ext cx="11525249" cy="5545789"/>
+              </a:xfrm>
+            </p:spPr>
+            <p:txBody>
+              <a:bodyPr>
+                <a:normAutofit/>
+              </a:bodyPr>
+              <a:lstStyle/>
+              <a:p>
+                <a:pPr marL="0" indent="0" eaLnBrk="0" fontAlgn="base" hangingPunct="0">
+                  <a:lnSpc>
+                    <a:spcPct val="100000"/>
+                  </a:lnSpc>
+                  <a:spcBef>
+                    <a:spcPct val="0"/>
+                  </a:spcBef>
+                  <a:spcAft>
+                    <a:spcPct val="0"/>
+                  </a:spcAft>
+                  <a:buNone/>
+                </a:pPr>
+                <a:endParaRPr lang="ru-RU" altLang="en-US" sz="2200" i="1" dirty="0" smtClean="0"/>
+              </a:p>
+              <a:p>
+                <a:pPr marL="0" indent="0" eaLnBrk="0" fontAlgn="base" hangingPunct="0">
+                  <a:lnSpc>
+                    <a:spcPct val="100000"/>
+                  </a:lnSpc>
+                  <a:spcBef>
+                    <a:spcPct val="0"/>
+                  </a:spcBef>
+                  <a:spcAft>
+                    <a:spcPct val="0"/>
+                  </a:spcAft>
+                  <a:buNone/>
+                </a:pPr>
+                <a:r>
+                  <a:rPr lang="ru-RU" altLang="en-US" sz="2200" i="1" dirty="0"/>
+                  <a:t>Модель </a:t>
+                </a:r>
+                <a:r>
+                  <a:rPr lang="ru-RU" altLang="en-US" sz="2200" i="1" dirty="0" smtClean="0"/>
+                  <a:t>для которых явно можно выделить тренд, но также и другие составляющие</a:t>
+                </a:r>
+                <a:endParaRPr lang="ru-RU" altLang="en-US" sz="2200" i="1" dirty="0"/>
+              </a:p>
+              <a:p>
+                <a:pPr marL="0" indent="0" algn="ctr" eaLnBrk="0" fontAlgn="base" hangingPunct="0">
+                  <a:lnSpc>
+                    <a:spcPct val="100000"/>
+                  </a:lnSpc>
+                  <a:spcBef>
+                    <a:spcPct val="0"/>
+                  </a:spcBef>
+                  <a:spcAft>
+                    <a:spcPct val="0"/>
+                  </a:spcAft>
+                  <a:buNone/>
+                </a:pPr>
+                <a14:m>
+                  <m:oMathPara xmlns:m="http://schemas.openxmlformats.org/officeDocument/2006/math">
+                    <m:oMathParaPr>
+                      <m:jc m:val="centerGroup"/>
+                    </m:oMathParaPr>
+                    <m:oMath xmlns:m="http://schemas.openxmlformats.org/officeDocument/2006/math">
+                      <m:sSub>
+                        <m:sSubPr>
+                          <m:ctrlPr>
+                            <a:rPr lang="ru-RU" altLang="en-US" sz="2400" b="0" i="1" dirty="0" smtClean="0">
+                              <a:latin typeface="Cambria Math" panose="02040503050406030204" pitchFamily="18" charset="0"/>
+                            </a:rPr>
+                          </m:ctrlPr>
+                        </m:sSubPr>
+                        <m:e>
+                          <m:r>
+                            <m:rPr>
+                              <m:sty m:val="p"/>
+                            </m:rPr>
+                            <a:rPr lang="en-US" altLang="en-US" sz="2400" i="1" dirty="0">
+                              <a:latin typeface="Cambria Math" panose="02040503050406030204" pitchFamily="18" charset="0"/>
+                            </a:rPr>
+                            <m:t>y</m:t>
+                          </m:r>
+                        </m:e>
+                        <m:sub>
+                          <m:r>
+                            <a:rPr lang="en-US" altLang="en-US" sz="2400" b="0" i="1" dirty="0" smtClean="0">
+                              <a:latin typeface="Cambria Math" panose="02040503050406030204" pitchFamily="18" charset="0"/>
+                            </a:rPr>
+                            <m:t>𝑇𝑆</m:t>
+                          </m:r>
+                        </m:sub>
+                      </m:sSub>
+                      <m:r>
+                        <a:rPr lang="en-US" altLang="en-US" sz="2400" i="1" dirty="0">
+                          <a:latin typeface="Cambria Math" panose="02040503050406030204" pitchFamily="18" charset="0"/>
+                        </a:rPr>
+                        <m:t>(</m:t>
+                      </m:r>
+                      <m:r>
+                        <a:rPr lang="en-US" altLang="en-US" sz="2400" i="1" dirty="0">
+                          <a:latin typeface="Cambria Math" panose="02040503050406030204" pitchFamily="18" charset="0"/>
+                        </a:rPr>
+                        <m:t>𝑡</m:t>
+                      </m:r>
+                      <m:r>
+                        <a:rPr lang="en-US" altLang="en-US" sz="2400" i="1" dirty="0">
+                          <a:latin typeface="Cambria Math" panose="02040503050406030204" pitchFamily="18" charset="0"/>
+                        </a:rPr>
+                        <m:t>) = </m:t>
+                      </m:r>
+                      <m:r>
+                        <a:rPr lang="en-US" altLang="en-US" sz="2400" i="1" dirty="0">
+                          <a:latin typeface="Cambria Math" panose="02040503050406030204" pitchFamily="18" charset="0"/>
+                        </a:rPr>
+                        <m:t>𝑡𝑟𝑒𝑛𝑑</m:t>
+                      </m:r>
+                      <m:r>
+                        <a:rPr lang="en-US" altLang="en-US" sz="2400" i="1" dirty="0">
+                          <a:latin typeface="Cambria Math" panose="02040503050406030204" pitchFamily="18" charset="0"/>
+                        </a:rPr>
+                        <m:t>(</m:t>
+                      </m:r>
+                      <m:r>
+                        <a:rPr lang="en-US" altLang="en-US" sz="2400" i="1" dirty="0">
+                          <a:latin typeface="Cambria Math" panose="02040503050406030204" pitchFamily="18" charset="0"/>
+                        </a:rPr>
+                        <m:t>𝑡</m:t>
+                      </m:r>
+                      <m:r>
+                        <a:rPr lang="en-US" altLang="en-US" sz="2400" i="1" dirty="0">
+                          <a:latin typeface="Cambria Math" panose="02040503050406030204" pitchFamily="18" charset="0"/>
+                        </a:rPr>
+                        <m:t>)+</m:t>
+                      </m:r>
+                      <m:nary>
+                        <m:naryPr>
+                          <m:chr m:val="∑"/>
+                          <m:ctrlPr>
+                            <a:rPr lang="en-US" altLang="en-US" sz="2400" i="1" dirty="0">
+                              <a:latin typeface="Cambria Math" panose="02040503050406030204" pitchFamily="18" charset="0"/>
+                            </a:rPr>
+                          </m:ctrlPr>
+                        </m:naryPr>
+                        <m:sub>
+                          <m:r>
+                            <a:rPr lang="en-US" altLang="en-US" sz="2400" i="1" dirty="0" err="1">
+                              <a:latin typeface="Cambria Math" panose="02040503050406030204" pitchFamily="18" charset="0"/>
+                            </a:rPr>
+                            <m:t>𝑖</m:t>
+                          </m:r>
+                          <m:r>
+                            <a:rPr lang="en-US" altLang="en-US" sz="2400" i="1" dirty="0">
+                              <a:latin typeface="Cambria Math" panose="02040503050406030204" pitchFamily="18" charset="0"/>
+                            </a:rPr>
+                            <m:t>=0</m:t>
+                          </m:r>
+                        </m:sub>
+                        <m:sup>
+                          <m:r>
+                            <a:rPr lang="en-US" altLang="en-US" sz="2400" i="1" dirty="0">
+                              <a:latin typeface="Cambria Math" panose="02040503050406030204" pitchFamily="18" charset="0"/>
+                            </a:rPr>
+                            <m:t>𝑀</m:t>
+                          </m:r>
+                        </m:sup>
+                        <m:e>
+                          <m:r>
+                            <a:rPr lang="en-US" altLang="en-US" sz="2400" i="1" dirty="0">
+                              <a:latin typeface="Cambria Math" panose="02040503050406030204" pitchFamily="18" charset="0"/>
+                            </a:rPr>
+                            <m:t>𝑠𝑒𝑎𝑠𝑜𝑛𝑎𝑙</m:t>
+                          </m:r>
+                          <m:r>
+                            <a:rPr lang="en-US" altLang="en-US" sz="2400" i="1" dirty="0">
+                              <a:latin typeface="Cambria Math" panose="02040503050406030204" pitchFamily="18" charset="0"/>
+                            </a:rPr>
+                            <m:t>(</m:t>
+                          </m:r>
+                          <m:r>
+                            <a:rPr lang="en-US" altLang="en-US" sz="2400" i="1" dirty="0">
+                              <a:latin typeface="Cambria Math" panose="02040503050406030204" pitchFamily="18" charset="0"/>
+                            </a:rPr>
+                            <m:t>𝑡</m:t>
+                          </m:r>
+                          <m:r>
+                            <a:rPr lang="en-US" altLang="en-US" sz="2400" i="1" dirty="0">
+                              <a:latin typeface="Cambria Math" panose="02040503050406030204" pitchFamily="18" charset="0"/>
+                            </a:rPr>
+                            <m:t>)</m:t>
+                          </m:r>
+                        </m:e>
+                      </m:nary>
+                      <m:r>
+                        <a:rPr lang="en-US" altLang="en-US" sz="2400" i="1" dirty="0">
+                          <a:latin typeface="Cambria Math" panose="02040503050406030204" pitchFamily="18" charset="0"/>
+                        </a:rPr>
+                        <m:t> +</m:t>
+                      </m:r>
+                      <m:r>
+                        <a:rPr lang="en-US" altLang="en-US" sz="2400" b="0" i="1" dirty="0" smtClean="0">
+                          <a:latin typeface="Cambria Math" panose="02040503050406030204" pitchFamily="18" charset="0"/>
+                        </a:rPr>
+                        <m:t>𝑟𝑒𝑠𝑖𝑑𝑢𝑎𝑙</m:t>
+                      </m:r>
+                      <m:r>
+                        <a:rPr lang="en-US" altLang="en-US" sz="2400" i="1" dirty="0">
+                          <a:latin typeface="Cambria Math" panose="02040503050406030204" pitchFamily="18" charset="0"/>
+                        </a:rPr>
+                        <m:t>(</m:t>
+                      </m:r>
+                      <m:r>
+                        <a:rPr lang="en-US" altLang="en-US" sz="2400" i="1" dirty="0">
+                          <a:latin typeface="Cambria Math" panose="02040503050406030204" pitchFamily="18" charset="0"/>
+                        </a:rPr>
+                        <m:t>𝑡</m:t>
+                      </m:r>
+                      <m:r>
+                        <a:rPr lang="en-US" altLang="en-US" sz="2400" i="1" dirty="0">
+                          <a:latin typeface="Cambria Math" panose="02040503050406030204" pitchFamily="18" charset="0"/>
+                        </a:rPr>
+                        <m:t>)</m:t>
+                      </m:r>
+                    </m:oMath>
+                  </m:oMathPara>
+                </a14:m>
+                <a:endParaRPr lang="ru-RU" altLang="en-US" sz="2000" dirty="0">
+                  <a:latin typeface="Open Sans"/>
+                </a:endParaRPr>
+              </a:p>
+              <a:p>
+                <a:pPr marL="0" indent="0" eaLnBrk="0" fontAlgn="base" hangingPunct="0">
+                  <a:lnSpc>
+                    <a:spcPct val="100000"/>
+                  </a:lnSpc>
+                  <a:spcBef>
+                    <a:spcPct val="0"/>
+                  </a:spcBef>
+                  <a:spcAft>
+                    <a:spcPct val="0"/>
+                  </a:spcAft>
+                  <a:buNone/>
+                </a:pPr>
+                <a:r>
+                  <a:rPr lang="ru-RU" altLang="en-US" sz="2000" dirty="0">
+                    <a:latin typeface="Open Sans"/>
+                  </a:rPr>
+                  <a:t>Или </a:t>
+                </a:r>
+                <a:r>
+                  <a:rPr lang="ru-RU" altLang="en-US" sz="2000" dirty="0" smtClean="0">
+                    <a:latin typeface="Open Sans"/>
+                  </a:rPr>
+                  <a:t>мультипликативная модель</a:t>
+                </a:r>
+                <a:endParaRPr lang="ru-RU" altLang="en-US" sz="2000" dirty="0">
+                  <a:latin typeface="Open Sans"/>
+                </a:endParaRPr>
+              </a:p>
+              <a:p>
+                <a:pPr marL="0" indent="0" algn="ctr" eaLnBrk="0" fontAlgn="base" hangingPunct="0">
+                  <a:lnSpc>
+                    <a:spcPct val="100000"/>
+                  </a:lnSpc>
+                  <a:spcBef>
+                    <a:spcPct val="0"/>
+                  </a:spcBef>
+                  <a:spcAft>
+                    <a:spcPct val="0"/>
+                  </a:spcAft>
+                  <a:buNone/>
+                </a:pPr>
+                <a14:m>
+                  <m:oMath xmlns:m="http://schemas.openxmlformats.org/officeDocument/2006/math">
+                    <m:r>
+                      <a:rPr lang="en-US" altLang="en-US" sz="2000" i="1" dirty="0">
+                        <a:latin typeface="Cambria Math" panose="02040503050406030204" pitchFamily="18" charset="0"/>
+                      </a:rPr>
+                      <m:t>𝑦</m:t>
+                    </m:r>
+                    <m:d>
+                      <m:dPr>
+                        <m:ctrlPr>
+                          <a:rPr lang="en-US" altLang="en-US" sz="2000" i="1" dirty="0">
+                            <a:latin typeface="Cambria Math" panose="02040503050406030204" pitchFamily="18" charset="0"/>
+                          </a:rPr>
+                        </m:ctrlPr>
+                      </m:dPr>
+                      <m:e>
+                        <m:r>
+                          <a:rPr lang="en-US" altLang="en-US" sz="2000" i="1" dirty="0">
+                            <a:latin typeface="Cambria Math" panose="02040503050406030204" pitchFamily="18" charset="0"/>
+                          </a:rPr>
+                          <m:t>𝑡</m:t>
+                        </m:r>
+                      </m:e>
+                    </m:d>
+                    <m:r>
+                      <a:rPr lang="en-US" altLang="en-US" sz="2000" i="1" dirty="0">
+                        <a:latin typeface="Cambria Math" panose="02040503050406030204" pitchFamily="18" charset="0"/>
+                      </a:rPr>
+                      <m:t>= </m:t>
+                    </m:r>
+                    <m:r>
+                      <a:rPr lang="en-US" altLang="en-US" sz="2000" i="1" dirty="0">
+                        <a:latin typeface="Cambria Math" panose="02040503050406030204" pitchFamily="18" charset="0"/>
+                      </a:rPr>
+                      <m:t>𝑡𝑟𝑒𝑛𝑑</m:t>
+                    </m:r>
+                    <m:d>
+                      <m:dPr>
+                        <m:ctrlPr>
+                          <a:rPr lang="en-US" altLang="en-US" sz="2000" i="1" dirty="0">
+                            <a:latin typeface="Cambria Math" panose="02040503050406030204" pitchFamily="18" charset="0"/>
+                          </a:rPr>
+                        </m:ctrlPr>
+                      </m:dPr>
+                      <m:e>
+                        <m:r>
+                          <a:rPr lang="en-US" altLang="en-US" sz="2000" i="1" dirty="0">
+                            <a:latin typeface="Cambria Math" panose="02040503050406030204" pitchFamily="18" charset="0"/>
+                          </a:rPr>
+                          <m:t>𝑡</m:t>
+                        </m:r>
+                      </m:e>
+                    </m:d>
+                    <m:r>
+                      <a:rPr lang="en-US" altLang="en-US" sz="2000" i="1" dirty="0">
+                        <a:latin typeface="Cambria Math" panose="02040503050406030204" pitchFamily="18" charset="0"/>
+                      </a:rPr>
+                      <m:t>⋅</m:t>
+                    </m:r>
+                    <m:d>
+                      <m:dPr>
+                        <m:ctrlPr>
+                          <a:rPr lang="ru-RU" altLang="en-US" sz="2000" b="0" i="1" dirty="0" smtClean="0">
+                            <a:latin typeface="Cambria Math" panose="02040503050406030204" pitchFamily="18" charset="0"/>
+                          </a:rPr>
+                        </m:ctrlPr>
+                      </m:dPr>
+                      <m:e>
+                        <m:nary>
+                          <m:naryPr>
+                            <m:chr m:val="∑"/>
+                            <m:ctrlPr>
+                              <a:rPr lang="en-US" altLang="en-US" sz="2000" i="1" dirty="0">
+                                <a:latin typeface="Cambria Math" panose="02040503050406030204" pitchFamily="18" charset="0"/>
+                              </a:rPr>
+                            </m:ctrlPr>
+                          </m:naryPr>
+                          <m:sub>
+                            <m:r>
+                              <a:rPr lang="en-US" altLang="en-US" sz="2000" i="1" dirty="0" err="1">
+                                <a:latin typeface="Cambria Math" panose="02040503050406030204" pitchFamily="18" charset="0"/>
+                              </a:rPr>
+                              <m:t>𝑖</m:t>
+                            </m:r>
+                            <m:r>
+                              <a:rPr lang="en-US" altLang="en-US" sz="2000" i="1" dirty="0">
+                                <a:latin typeface="Cambria Math" panose="02040503050406030204" pitchFamily="18" charset="0"/>
+                              </a:rPr>
+                              <m:t>=0</m:t>
+                            </m:r>
+                          </m:sub>
+                          <m:sup>
+                            <m:r>
+                              <a:rPr lang="en-US" altLang="en-US" sz="2000" i="1" dirty="0">
+                                <a:latin typeface="Cambria Math" panose="02040503050406030204" pitchFamily="18" charset="0"/>
+                              </a:rPr>
+                              <m:t>𝑀</m:t>
+                            </m:r>
+                          </m:sup>
+                          <m:e>
+                            <m:r>
+                              <a:rPr lang="en-US" altLang="en-US" sz="2000" i="1" dirty="0">
+                                <a:latin typeface="Cambria Math" panose="02040503050406030204" pitchFamily="18" charset="0"/>
+                              </a:rPr>
+                              <m:t>𝑠𝑒𝑎𝑠𝑜𝑛𝑎𝑙</m:t>
+                            </m:r>
+                            <m:d>
+                              <m:dPr>
+                                <m:ctrlPr>
+                                  <a:rPr lang="en-US" altLang="en-US" sz="2000" i="1" dirty="0">
+                                    <a:latin typeface="Cambria Math" panose="02040503050406030204" pitchFamily="18" charset="0"/>
+                                  </a:rPr>
+                                </m:ctrlPr>
+                              </m:dPr>
+                              <m:e>
+                                <m:r>
+                                  <a:rPr lang="en-US" altLang="en-US" sz="2000" i="1" dirty="0">
+                                    <a:latin typeface="Cambria Math" panose="02040503050406030204" pitchFamily="18" charset="0"/>
+                                  </a:rPr>
+                                  <m:t>𝑡</m:t>
+                                </m:r>
+                              </m:e>
+                            </m:d>
+                          </m:e>
+                        </m:nary>
+                      </m:e>
+                    </m:d>
+                    <m:r>
+                      <a:rPr lang="en-US" altLang="en-US" sz="2000" b="0" i="1" dirty="0" smtClean="0">
+                        <a:latin typeface="Cambria Math" panose="02040503050406030204" pitchFamily="18" charset="0"/>
+                      </a:rPr>
+                      <m:t>⋅</m:t>
+                    </m:r>
+                    <m:r>
+                      <a:rPr lang="en-US" altLang="en-US" sz="2000" b="0" i="1" dirty="0" smtClean="0">
+                        <a:latin typeface="Cambria Math" panose="02040503050406030204" pitchFamily="18" charset="0"/>
+                      </a:rPr>
+                      <m:t>𝑟𝑒𝑠𝑖𝑑𝑢𝑎𝑙</m:t>
+                    </m:r>
+                    <m:r>
+                      <a:rPr lang="en-US" altLang="en-US" sz="2000" i="1" dirty="0">
+                        <a:latin typeface="Cambria Math" panose="02040503050406030204" pitchFamily="18" charset="0"/>
+                      </a:rPr>
+                      <m:t>(</m:t>
+                    </m:r>
+                    <m:r>
+                      <a:rPr lang="en-US" altLang="en-US" sz="2000" i="1" dirty="0">
+                        <a:latin typeface="Cambria Math" panose="02040503050406030204" pitchFamily="18" charset="0"/>
+                      </a:rPr>
+                      <m:t>𝑡</m:t>
+                    </m:r>
+                  </m:oMath>
+                </a14:m>
+                <a:r>
+                  <a:rPr lang="en-US" altLang="en-US" sz="2000" i="1" dirty="0"/>
+                  <a:t>). </a:t>
+                </a:r>
+                <a:endParaRPr lang="en-US" altLang="en-US" sz="2000" i="1" dirty="0" smtClean="0"/>
+              </a:p>
+              <a:p>
+                <a:pPr marL="0" indent="0" algn="ctr" eaLnBrk="0" fontAlgn="base" hangingPunct="0">
+                  <a:lnSpc>
+                    <a:spcPct val="100000"/>
+                  </a:lnSpc>
+                  <a:spcBef>
+                    <a:spcPct val="0"/>
+                  </a:spcBef>
+                  <a:spcAft>
+                    <a:spcPct val="0"/>
+                  </a:spcAft>
+                  <a:buNone/>
+                </a:pPr>
+                <a:r>
+                  <a:rPr lang="ru-RU" altLang="en-US" sz="2000" i="1" dirty="0" smtClean="0"/>
+                  <a:t>Могут быть и более сложные модели</a:t>
+                </a:r>
+                <a:endParaRPr lang="en-US" altLang="en-US" sz="2000" i="1" dirty="0"/>
+              </a:p>
+              <a:p>
+                <a:pPr eaLnBrk="0" fontAlgn="base" hangingPunct="0">
+                  <a:lnSpc>
+                    <a:spcPct val="100000"/>
+                  </a:lnSpc>
+                  <a:spcBef>
+                    <a:spcPct val="0"/>
+                  </a:spcBef>
+                  <a:spcAft>
+                    <a:spcPct val="0"/>
+                  </a:spcAft>
+                </a:pPr>
+                <a:endParaRPr lang="en-US" altLang="en-US" sz="2000" dirty="0">
+                  <a:latin typeface="Open Sans"/>
+                </a:endParaRPr>
+              </a:p>
+            </p:txBody>
+          </p:sp>
+        </mc:Choice>
+        <mc:Fallback>
+          <p:sp>
+            <p:nvSpPr>
+              <p:cNvPr id="3" name="Объект 2">
+                <a:extLst>
+                  <a:ext uri="{FF2B5EF4-FFF2-40B4-BE49-F238E27FC236}">
+                    <a16:creationId xmlns:a16="http://schemas.microsoft.com/office/drawing/2014/main" id="{4CDB8E57-5CA8-497C-990E-C304F4FBE710}"/>
+                  </a:ext>
+                </a:extLst>
+              </p:cNvPr>
+              <p:cNvSpPr>
+                <a:spLocks noGrp="1" noRot="1" noChangeAspect="1" noMove="1" noResize="1" noEditPoints="1" noAdjustHandles="1" noChangeArrowheads="1" noChangeShapeType="1" noTextEdit="1"/>
+              </p:cNvSpPr>
+              <p:nvPr>
+                <p:ph idx="1"/>
+              </p:nvPr>
+            </p:nvSpPr>
+            <p:spPr>
+              <a:xfrm>
+                <a:off x="209550" y="1114427"/>
+                <a:ext cx="11525249" cy="5545789"/>
+              </a:xfrm>
+              <a:blipFill>
+                <a:blip r:embed="rId2"/>
+                <a:stretch>
+                  <a:fillRect l="-687"/>
+                </a:stretch>
+              </a:blipFill>
+            </p:spPr>
+            <p:txBody>
+              <a:bodyPr/>
+              <a:lstStyle/>
+              <a:p>
+                <a:r>
+                  <a:rPr lang="ru-RU">
+                    <a:noFill/>
+                  </a:rPr>
+                  <a:t> </a:t>
+                </a:r>
+              </a:p>
+            </p:txBody>
+          </p:sp>
+        </mc:Fallback>
+      </mc:AlternateContent>
+      <p:sp>
+        <p:nvSpPr>
+          <p:cNvPr id="7" name="Номер слайда 6">
+            <a:extLst>
+              <a:ext uri="{FF2B5EF4-FFF2-40B4-BE49-F238E27FC236}">
+                <a16:creationId xmlns:a16="http://schemas.microsoft.com/office/drawing/2014/main" id="{A07EF2B8-3D80-AB22-FA4B-F0655B9EAE6F}"/>
+              </a:ext>
+            </a:extLst>
+          </p:cNvPr>
+          <p:cNvSpPr>
+            <a:spLocks noGrp="1"/>
+          </p:cNvSpPr>
+          <p:nvPr>
+            <p:ph type="sldNum" sz="quarter" idx="12"/>
+          </p:nvPr>
+        </p:nvSpPr>
+        <p:spPr/>
+        <p:txBody>
+          <a:bodyPr/>
+          <a:lstStyle/>
+          <a:p>
+            <a:fld id="{45C3B737-A709-4ABC-AFE0-A6B067850C48}" type="slidenum">
+              <a:rPr lang="en-US" smtClean="0"/>
+              <a:t>3</a:t>
+            </a:fld>
+            <a:endParaRPr lang="en-US"/>
+          </a:p>
+        </p:txBody>
+      </p:sp>
+      <p:sp>
+        <p:nvSpPr>
+          <p:cNvPr id="5" name="Rectangle 231">
+            <a:extLst>
+              <a:ext uri="{FF2B5EF4-FFF2-40B4-BE49-F238E27FC236}">
+                <a16:creationId xmlns:a16="http://schemas.microsoft.com/office/drawing/2014/main" id="{57F50B8E-A23A-4154-9A0C-994DE115ACE6}"/>
+              </a:ext>
+            </a:extLst>
+          </p:cNvPr>
+          <p:cNvSpPr>
+            <a:spLocks noChangeArrowheads="1"/>
+          </p:cNvSpPr>
+          <p:nvPr/>
+        </p:nvSpPr>
+        <p:spPr bwMode="auto">
+          <a:xfrm>
+            <a:off x="6167756" y="4477386"/>
+            <a:ext cx="52071" cy="10795"/>
+          </a:xfrm>
+          <a:prstGeom prst="rect">
+            <a:avLst/>
+          </a:prstGeom>
+          <a:solidFill>
+            <a:srgbClr val="000000"/>
+          </a:solidFill>
+          <a:ln>
+            <a:noFill/>
+          </a:ln>
+          <a:extLst>
+            <a:ext uri="{91240B29-F687-4F45-9708-019B960494DF}">
+              <a14:hiddenLine xmlns:a14="http://schemas.microsoft.com/office/drawing/2010/main" w="9525">
+                <a:solidFill>
+                  <a:srgbClr val="000000"/>
+                </a:solidFill>
+                <a:miter lim="800000"/>
+                <a:headEnd/>
+                <a:tailEnd/>
+              </a14:hiddenLine>
+            </a:ext>
+          </a:extLst>
+        </p:spPr>
+        <p:txBody>
+          <a:bodyPr rot="0" vert="horz" wrap="square" lIns="91440" tIns="45720" rIns="91440" bIns="45720" anchor="t" anchorCtr="0" upright="1">
+            <a:noAutofit/>
+          </a:bodyPr>
+          <a:lstStyle/>
+          <a:p>
+            <a:endParaRPr lang="en-US" sz="1351"/>
+          </a:p>
+        </p:txBody>
+      </p:sp>
+      <p:sp>
+        <p:nvSpPr>
+          <p:cNvPr id="6" name="Rectangle 3">
+            <a:extLst>
+              <a:ext uri="{FF2B5EF4-FFF2-40B4-BE49-F238E27FC236}">
+                <a16:creationId xmlns:a16="http://schemas.microsoft.com/office/drawing/2014/main" id="{66C52228-8C94-4CF2-AD63-BA9617333BA2}"/>
+              </a:ext>
+            </a:extLst>
+          </p:cNvPr>
+          <p:cNvSpPr>
+            <a:spLocks noChangeArrowheads="1"/>
+          </p:cNvSpPr>
+          <p:nvPr/>
+        </p:nvSpPr>
+        <p:spPr bwMode="auto">
+          <a:xfrm>
+            <a:off x="-1523999" y="124999"/>
+            <a:ext cx="184731" cy="677108"/>
+          </a:xfrm>
+          <a:prstGeom prst="rect">
+            <a:avLst/>
+          </a:prstGeom>
+          <a:noFill/>
+          <a:ln>
+            <a:noFill/>
+          </a:ln>
+          <a:effectLst/>
+          <a:extLst>
+            <a:ext uri="{909E8E84-426E-40DD-AFC4-6F175D3DCCD1}">
+              <a14:hiddenFill xmlns:a14="http://schemas.microsoft.com/office/drawing/2010/main">
+                <a:solidFill>
+                  <a:schemeClr val="accent1"/>
+                </a:solidFill>
+              </a14:hiddenFill>
+            </a:ext>
+            <a:ext uri="{91240B29-F687-4F45-9708-019B960494DF}">
+              <a14:hiddenLine xmlns:a14="http://schemas.microsoft.com/office/drawing/2010/main" w="9525">
+                <a:solidFill>
+                  <a:schemeClr val="tx1"/>
+                </a:solidFill>
+                <a:miter lim="800000"/>
+                <a:headEnd/>
+                <a:tailEnd/>
+              </a14:hiddenLine>
+            </a:ext>
+            <a:ext uri="{AF507438-7753-43E0-B8FC-AC1667EBCBE1}">
+              <a14:hiddenEffects xmlns:a14="http://schemas.microsoft.com/office/drawing/2010/main">
+                <a:effectLst>
+                  <a:outerShdw dist="35921" dir="2700000" algn="ctr" rotWithShape="0">
+                    <a:schemeClr val="bg2"/>
+                  </a:outerShdw>
+                </a:effectLst>
+              </a14:hiddenEffects>
+            </a:ext>
+          </a:extLst>
+        </p:spPr>
+        <p:txBody>
+          <a:bodyPr vert="horz" wrap="none" lIns="91440" tIns="45720" rIns="91440" bIns="45720" numCol="1" anchor="ctr" anchorCtr="0" compatLnSpc="1">
+            <a:prstTxWarp prst="textNoShape">
+              <a:avLst/>
+            </a:prstTxWarp>
+            <a:spAutoFit/>
+          </a:bodyPr>
+          <a:lstStyle/>
+          <a:p>
+            <a:pPr eaLnBrk="0" fontAlgn="base" hangingPunct="0">
+              <a:spcBef>
+                <a:spcPct val="0"/>
+              </a:spcBef>
+              <a:spcAft>
+                <a:spcPct val="0"/>
+              </a:spcAft>
+            </a:pPr>
+            <a:r>
+              <a:rPr lang="en-US" altLang="en-US" sz="1400">
+                <a:latin typeface="Arial" panose="020B0604020202020204" pitchFamily="34" charset="0"/>
+                <a:ea typeface="Times New Roman" panose="02020603050405020304" pitchFamily="18" charset="0"/>
+              </a:rPr>
+              <a:t/>
+            </a:r>
+            <a:br>
+              <a:rPr lang="en-US" altLang="en-US" sz="1400">
+                <a:latin typeface="Arial" panose="020B0604020202020204" pitchFamily="34" charset="0"/>
+                <a:ea typeface="Times New Roman" panose="02020603050405020304" pitchFamily="18" charset="0"/>
+              </a:rPr>
+            </a:br>
+            <a:endParaRPr lang="en-US" altLang="en-US" sz="2400">
+              <a:latin typeface="Arial" panose="020B0604020202020204" pitchFamily="34" charset="0"/>
+            </a:endParaRPr>
+          </a:p>
+        </p:txBody>
+      </p:sp>
+      <p:sp>
+        <p:nvSpPr>
+          <p:cNvPr id="4" name="Rectangle 1">
+            <a:extLst>
+              <a:ext uri="{FF2B5EF4-FFF2-40B4-BE49-F238E27FC236}">
+                <a16:creationId xmlns:a16="http://schemas.microsoft.com/office/drawing/2014/main" id="{4ECA1DAD-475E-4D0B-A20A-17535DDD41A8}"/>
+              </a:ext>
+            </a:extLst>
+          </p:cNvPr>
+          <p:cNvSpPr>
+            <a:spLocks noChangeArrowheads="1"/>
+          </p:cNvSpPr>
+          <p:nvPr/>
+        </p:nvSpPr>
+        <p:spPr bwMode="auto">
+          <a:xfrm>
+            <a:off x="-1523999" y="43935"/>
+            <a:ext cx="65" cy="369332"/>
+          </a:xfrm>
+          <a:prstGeom prst="rect">
+            <a:avLst/>
+          </a:prstGeom>
+          <a:solidFill>
+            <a:srgbClr val="FFFFFF"/>
+          </a:solidFill>
+          <a:ln>
+            <a:noFill/>
+          </a:ln>
+          <a:effectLst/>
+          <a:extLst>
+            <a:ext uri="{91240B29-F687-4F45-9708-019B960494DF}">
+              <a14:hiddenLine xmlns:a14="http://schemas.microsoft.com/office/drawing/2010/main" w="9525">
+                <a:solidFill>
+                  <a:schemeClr val="tx1"/>
+                </a:solidFill>
+                <a:miter lim="800000"/>
+                <a:headEnd/>
+                <a:tailEnd/>
+              </a14:hiddenLine>
+            </a:ext>
+            <a:ext uri="{AF507438-7753-43E0-B8FC-AC1667EBCBE1}">
+              <a14:hiddenEffects xmlns:a14="http://schemas.microsoft.com/office/drawing/2010/main">
+                <a:effectLst>
+                  <a:outerShdw dist="35921" dir="2700000" algn="ctr" rotWithShape="0">
+                    <a:schemeClr val="bg2"/>
+                  </a:outerShdw>
+                </a:effectLst>
+              </a14:hiddenEffects>
+            </a:ext>
+          </a:extLst>
+        </p:spPr>
+        <p:txBody>
+          <a:bodyPr vert="horz" wrap="none" lIns="0" tIns="0" rIns="0" bIns="0" numCol="1" anchor="ctr" anchorCtr="0" compatLnSpc="1">
+            <a:prstTxWarp prst="textNoShape">
+              <a:avLst/>
+            </a:prstTxWarp>
+            <a:spAutoFit/>
+          </a:bodyPr>
+          <a:lstStyle/>
+          <a:p>
+            <a:pPr eaLnBrk="0" fontAlgn="base" hangingPunct="0">
+              <a:spcBef>
+                <a:spcPct val="0"/>
+              </a:spcBef>
+              <a:spcAft>
+                <a:spcPct val="0"/>
+              </a:spcAft>
+            </a:pPr>
+            <a:endParaRPr lang="en-US" altLang="en-US" sz="2400" dirty="0">
+              <a:latin typeface="Arial" panose="020B0604020202020204" pitchFamily="34" charset="0"/>
+            </a:endParaRPr>
+          </a:p>
+        </p:txBody>
+      </p:sp>
+      <p:sp>
+        <p:nvSpPr>
+          <p:cNvPr id="9" name="Прямоугольник 8"/>
+          <p:cNvSpPr/>
+          <p:nvPr/>
+        </p:nvSpPr>
+        <p:spPr>
+          <a:xfrm>
+            <a:off x="209550" y="6290884"/>
+            <a:ext cx="5065489" cy="369332"/>
+          </a:xfrm>
+          <a:prstGeom prst="rect">
+            <a:avLst/>
+          </a:prstGeom>
+        </p:spPr>
+        <p:txBody>
+          <a:bodyPr wrap="none">
+            <a:spAutoFit/>
+          </a:bodyPr>
+          <a:lstStyle/>
+          <a:p>
+            <a:r>
+              <a:rPr lang="ru-RU" dirty="0"/>
+              <a:t>https://openforecast.org/adam/tsComponents.html</a:t>
+            </a:r>
+          </a:p>
+        </p:txBody>
+      </p:sp>
+    </p:spTree>
+    <p:extLst>
+      <p:ext uri="{BB962C8B-B14F-4D97-AF65-F5344CB8AC3E}">
+        <p14:creationId xmlns:p14="http://schemas.microsoft.com/office/powerpoint/2010/main" val="2605955941"/>
+      </p:ext>
+    </p:extLst>
+  </p:cSld>
+  <p:clrMapOvr>
+    <a:masterClrMapping/>
+  </p:clrMapOvr>
+  <p:timing>
+    <p:tnLst>
+      <p:par>
+        <p:cTn id="1" dur="indefinite" restart="never" nodeType="tmRoot"/>
+      </p:par>
+    </p:tnLst>
+  </p:timing>
+</p:sld>
+</file>
+
+<file path=ppt/slides/slide4.xml><?xml version="1.0" encoding="utf-8"?>
+<p:sld xmlns:a="http://schemas.openxmlformats.org/drawingml/2006/main" xmlns:r="http://schemas.openxmlformats.org/officeDocument/2006/relationships" xmlns:p="http://schemas.openxmlformats.org/presentationml/2006/main">
+  <p:cSld>
+    <p:spTree>
+      <p:nvGrpSpPr>
+        <p:cNvPr id="1" name=""/>
+        <p:cNvGrpSpPr/>
+        <p:nvPr/>
+      </p:nvGrpSpPr>
+      <p:grpSpPr>
+        <a:xfrm>
+          <a:off x="0" y="0"/>
+          <a:ext cx="0" cy="0"/>
+          <a:chOff x="0" y="0"/>
+          <a:chExt cx="0" cy="0"/>
+        </a:xfrm>
+      </p:grpSpPr>
+      <p:sp>
+        <p:nvSpPr>
+          <p:cNvPr id="2" name="Заголовок 1">
+            <a:extLst>
+              <a:ext uri="{FF2B5EF4-FFF2-40B4-BE49-F238E27FC236}">
+                <a16:creationId xmlns:a16="http://schemas.microsoft.com/office/drawing/2014/main" id="{3FB6B433-AB20-4BD4-8E77-84B856A5D608}"/>
+              </a:ext>
+            </a:extLst>
+          </p:cNvPr>
+          <p:cNvSpPr>
+            <a:spLocks noGrp="1"/>
+          </p:cNvSpPr>
+          <p:nvPr>
+            <p:ph type="title"/>
+          </p:nvPr>
+        </p:nvSpPr>
+        <p:spPr>
+          <a:xfrm>
+            <a:off x="504825" y="454025"/>
+            <a:ext cx="11277600" cy="806450"/>
+          </a:xfrm>
+        </p:spPr>
+        <p:txBody>
+          <a:bodyPr>
+            <a:normAutofit fontScale="90000"/>
+          </a:bodyPr>
+          <a:lstStyle/>
+          <a:p>
+            <a:pPr algn="ctr"/>
+            <a:r>
+              <a:rPr lang="ru-RU" sz="4000" b="1" dirty="0"/>
+              <a:t>Модель экспоненциального сглаживания </a:t>
+            </a:r>
+            <a:br>
+              <a:rPr lang="ru-RU" sz="4000" b="1" dirty="0"/>
+            </a:br>
+            <a:r>
+              <a:rPr lang="ru-RU" sz="4000" dirty="0"/>
+              <a:t>SES (</a:t>
+            </a:r>
+            <a:r>
+              <a:rPr lang="ru-RU" sz="4000" dirty="0" err="1"/>
+              <a:t>Single</a:t>
+            </a:r>
+            <a:r>
+              <a:rPr lang="ru-RU" sz="4000" dirty="0"/>
+              <a:t> </a:t>
+            </a:r>
+            <a:r>
+              <a:rPr lang="ru-RU" sz="4000" dirty="0" err="1"/>
+              <a:t>Exponential</a:t>
+            </a:r>
+            <a:r>
+              <a:rPr lang="ru-RU" sz="4000" dirty="0"/>
+              <a:t> </a:t>
+            </a:r>
+            <a:r>
+              <a:rPr lang="en-US" sz="4000" dirty="0"/>
+              <a:t>Smoothing</a:t>
+            </a:r>
+            <a:r>
+              <a:rPr lang="ru-RU" sz="4000" dirty="0"/>
+              <a:t>)</a:t>
+            </a:r>
+            <a:r>
+              <a:rPr lang="en-US" dirty="0"/>
+              <a:t/>
+            </a:r>
+            <a:br>
+              <a:rPr lang="en-US" dirty="0"/>
+            </a:br>
+            <a:endParaRPr lang="ru-RU" b="1" dirty="0"/>
+          </a:p>
+        </p:txBody>
+      </p:sp>
+      <mc:AlternateContent xmlns:mc="http://schemas.openxmlformats.org/markup-compatibility/2006" xmlns:a14="http://schemas.microsoft.com/office/drawing/2010/main">
+        <mc:Choice Requires="a14">
+          <p:sp>
+            <p:nvSpPr>
+              <p:cNvPr id="3" name="Объект 2">
+                <a:extLst>
+                  <a:ext uri="{FF2B5EF4-FFF2-40B4-BE49-F238E27FC236}">
+                    <a16:creationId xmlns:a16="http://schemas.microsoft.com/office/drawing/2014/main" id="{9CFDC76D-90F0-4FD7-8BA6-954D6D2E6FFD}"/>
+                  </a:ext>
+                </a:extLst>
+              </p:cNvPr>
+              <p:cNvSpPr>
+                <a:spLocks noGrp="1"/>
+              </p:cNvSpPr>
+              <p:nvPr>
+                <p:ph idx="1"/>
+              </p:nvPr>
+            </p:nvSpPr>
+            <p:spPr>
+              <a:xfrm>
+                <a:off x="247650" y="1113910"/>
+                <a:ext cx="11791949" cy="5502274"/>
+              </a:xfrm>
+            </p:spPr>
+            <p:txBody>
+              <a:bodyPr>
+                <a:normAutofit/>
+              </a:bodyPr>
+              <a:lstStyle/>
+              <a:p>
+                <a:pPr marL="0" indent="0">
+                  <a:lnSpc>
+                    <a:spcPct val="100000"/>
+                  </a:lnSpc>
+                  <a:spcBef>
+                    <a:spcPts val="300"/>
+                  </a:spcBef>
+                  <a:buNone/>
+                </a:pPr>
+                <a:r>
+                  <a:rPr lang="ru-RU" sz="2200" dirty="0"/>
+                  <a:t>Если временной ряд преимущественно представляет собой тренд, то его можно представить как</a:t>
+                </a:r>
+              </a:p>
+              <a:p>
+                <a:pPr marL="0" indent="0">
+                  <a:lnSpc>
+                    <a:spcPct val="100000"/>
+                  </a:lnSpc>
+                  <a:spcBef>
+                    <a:spcPts val="300"/>
+                  </a:spcBef>
+                  <a:buNone/>
+                </a:pPr>
+                <a14:m>
+                  <m:oMathPara xmlns:m="http://schemas.openxmlformats.org/officeDocument/2006/math">
+                    <m:oMathParaPr>
+                      <m:jc m:val="centerGroup"/>
+                    </m:oMathParaPr>
+                    <m:oMath xmlns:m="http://schemas.openxmlformats.org/officeDocument/2006/math">
+                      <m:sSub>
+                        <m:sSubPr>
+                          <m:ctrlPr>
+                            <a:rPr lang="en-US" sz="2200" i="1">
+                              <a:latin typeface="Cambria Math" panose="02040503050406030204" pitchFamily="18" charset="0"/>
+                            </a:rPr>
+                          </m:ctrlPr>
+                        </m:sSubPr>
+                        <m:e>
+                          <m:acc>
+                            <m:accPr>
+                              <m:chr m:val="̂"/>
+                              <m:ctrlPr>
+                                <a:rPr lang="en-US" sz="2200" i="1">
+                                  <a:latin typeface="Cambria Math" panose="02040503050406030204" pitchFamily="18" charset="0"/>
+                                </a:rPr>
+                              </m:ctrlPr>
+                            </m:accPr>
+                            <m:e>
+                              <m:r>
+                                <a:rPr lang="en-US" sz="2200" i="1">
+                                  <a:latin typeface="Cambria Math" panose="02040503050406030204" pitchFamily="18" charset="0"/>
+                                </a:rPr>
+                                <m:t>𝑦</m:t>
+                              </m:r>
+                            </m:e>
+                          </m:acc>
+                        </m:e>
+                        <m:sub>
+                          <m:r>
+                            <a:rPr lang="en-US" sz="2200" i="1">
+                              <a:latin typeface="Cambria Math" panose="02040503050406030204" pitchFamily="18" charset="0"/>
+                            </a:rPr>
+                            <m:t>𝑛</m:t>
+                          </m:r>
+                          <m:r>
+                            <a:rPr lang="ru-RU" sz="2200" b="0" i="1" smtClean="0">
+                              <a:latin typeface="Cambria Math" panose="02040503050406030204" pitchFamily="18" charset="0"/>
+                            </a:rPr>
+                            <m:t>+1</m:t>
+                          </m:r>
+                        </m:sub>
+                      </m:sSub>
+                      <m:r>
+                        <a:rPr lang="en-US" sz="2200" i="1">
+                          <a:latin typeface="Cambria Math" panose="02040503050406030204" pitchFamily="18" charset="0"/>
+                        </a:rPr>
+                        <m:t>=</m:t>
+                      </m:r>
+                      <m:r>
+                        <a:rPr lang="en-US" sz="2200" i="1">
+                          <a:latin typeface="Cambria Math" panose="02040503050406030204" pitchFamily="18" charset="0"/>
+                        </a:rPr>
+                        <m:t>𝛼</m:t>
+                      </m:r>
+                      <m:sSub>
+                        <m:sSubPr>
+                          <m:ctrlPr>
+                            <a:rPr lang="en-US" sz="2200" i="1">
+                              <a:latin typeface="Cambria Math" panose="02040503050406030204" pitchFamily="18" charset="0"/>
+                            </a:rPr>
+                          </m:ctrlPr>
+                        </m:sSubPr>
+                        <m:e>
+                          <m:r>
+                            <a:rPr lang="en-US" sz="2200" i="1">
+                              <a:latin typeface="Cambria Math" panose="02040503050406030204" pitchFamily="18" charset="0"/>
+                            </a:rPr>
+                            <m:t>𝑦</m:t>
+                          </m:r>
+                        </m:e>
+                        <m:sub>
+                          <m:r>
+                            <a:rPr lang="en-US" sz="2200" i="1">
+                              <a:latin typeface="Cambria Math" panose="02040503050406030204" pitchFamily="18" charset="0"/>
+                            </a:rPr>
+                            <m:t>𝑛</m:t>
+                          </m:r>
+                        </m:sub>
+                      </m:sSub>
+                      <m:r>
+                        <a:rPr lang="en-US" sz="2200" i="1">
+                          <a:latin typeface="Cambria Math" panose="02040503050406030204" pitchFamily="18" charset="0"/>
+                        </a:rPr>
+                        <m:t>+</m:t>
+                      </m:r>
+                      <m:d>
+                        <m:dPr>
+                          <m:ctrlPr>
+                            <a:rPr lang="en-US" sz="2200" i="1">
+                              <a:latin typeface="Cambria Math" panose="02040503050406030204" pitchFamily="18" charset="0"/>
+                            </a:rPr>
+                          </m:ctrlPr>
+                        </m:dPr>
+                        <m:e>
+                          <m:r>
+                            <a:rPr lang="en-US" sz="2200" i="1">
+                              <a:latin typeface="Cambria Math" panose="02040503050406030204" pitchFamily="18" charset="0"/>
+                            </a:rPr>
+                            <m:t>1−</m:t>
+                          </m:r>
+                          <m:r>
+                            <a:rPr lang="en-US" sz="2200" i="1">
+                              <a:latin typeface="Cambria Math" panose="02040503050406030204" pitchFamily="18" charset="0"/>
+                            </a:rPr>
+                            <m:t>𝛼</m:t>
+                          </m:r>
+                        </m:e>
+                      </m:d>
+                      <m:sSub>
+                        <m:sSubPr>
+                          <m:ctrlPr>
+                            <a:rPr lang="en-US" sz="2200" i="1">
+                              <a:latin typeface="Cambria Math" panose="02040503050406030204" pitchFamily="18" charset="0"/>
+                            </a:rPr>
+                          </m:ctrlPr>
+                        </m:sSubPr>
+                        <m:e>
+                          <m:acc>
+                            <m:accPr>
+                              <m:chr m:val="̂"/>
+                              <m:ctrlPr>
+                                <a:rPr lang="en-US" sz="2200" i="1">
+                                  <a:latin typeface="Cambria Math" panose="02040503050406030204" pitchFamily="18" charset="0"/>
+                                </a:rPr>
+                              </m:ctrlPr>
+                            </m:accPr>
+                            <m:e>
+                              <m:r>
+                                <a:rPr lang="en-US" sz="2200" i="1">
+                                  <a:latin typeface="Cambria Math" panose="02040503050406030204" pitchFamily="18" charset="0"/>
+                                </a:rPr>
+                                <m:t>𝑦</m:t>
+                              </m:r>
+                            </m:e>
+                          </m:acc>
+                        </m:e>
+                        <m:sub>
+                          <m:r>
+                            <a:rPr lang="en-US" sz="2200" i="1">
+                              <a:latin typeface="Cambria Math" panose="02040503050406030204" pitchFamily="18" charset="0"/>
+                            </a:rPr>
+                            <m:t>𝑛</m:t>
+                          </m:r>
+                          <m:r>
+                            <a:rPr lang="en-US" sz="2200" i="1">
+                              <a:latin typeface="Cambria Math" panose="02040503050406030204" pitchFamily="18" charset="0"/>
+                            </a:rPr>
+                            <m:t>−1</m:t>
+                          </m:r>
+                        </m:sub>
+                      </m:sSub>
+                      <m:r>
+                        <a:rPr lang="en-US" sz="2200" i="1">
+                          <a:latin typeface="Cambria Math" panose="02040503050406030204" pitchFamily="18" charset="0"/>
+                        </a:rPr>
+                        <m:t>,</m:t>
+                      </m:r>
+                      <m:r>
+                        <a:rPr lang="en-US" sz="2200" b="0" i="1" smtClean="0">
+                          <a:latin typeface="Cambria Math" panose="02040503050406030204" pitchFamily="18" charset="0"/>
+                        </a:rPr>
+                        <m:t>   </m:t>
+                      </m:r>
+                    </m:oMath>
+                  </m:oMathPara>
+                </a14:m>
+                <a:endParaRPr lang="en-US" sz="2200" dirty="0"/>
+              </a:p>
+              <a:p>
+                <a:pPr marL="0" indent="0">
+                  <a:lnSpc>
+                    <a:spcPct val="100000"/>
+                  </a:lnSpc>
+                  <a:spcBef>
+                    <a:spcPts val="300"/>
+                  </a:spcBef>
+                  <a:buNone/>
+                </a:pPr>
+                <a:r>
+                  <a:rPr lang="ru-RU" sz="2200" dirty="0"/>
+                  <a:t>	где</a:t>
+                </a:r>
+                <a:r>
+                  <a:rPr lang="en-US" sz="2200" dirty="0"/>
+                  <a:t> </a:t>
+                </a:r>
+                <a14:m>
+                  <m:oMath xmlns:m="http://schemas.openxmlformats.org/officeDocument/2006/math">
+                    <m:r>
+                      <a:rPr lang="en-US" sz="2200" i="1">
+                        <a:latin typeface="Cambria Math" panose="02040503050406030204" pitchFamily="18" charset="0"/>
+                      </a:rPr>
+                      <m:t>𝛼</m:t>
+                    </m:r>
+                  </m:oMath>
+                </a14:m>
+                <a:r>
+                  <a:rPr lang="en-US" sz="2200" dirty="0"/>
+                  <a:t> </a:t>
+                </a:r>
+                <a:r>
+                  <a:rPr lang="ru-RU" sz="2200" dirty="0"/>
+                  <a:t>– это параметр сглаживания</a:t>
+                </a:r>
+                <a:r>
+                  <a:rPr lang="en-US" sz="2200" dirty="0"/>
+                  <a:t>; </a:t>
+                </a:r>
+                <a14:m>
+                  <m:oMath xmlns:m="http://schemas.openxmlformats.org/officeDocument/2006/math">
+                    <m:acc>
+                      <m:accPr>
+                        <m:chr m:val="̂"/>
+                        <m:ctrlPr>
+                          <a:rPr lang="en-US" sz="2200" i="1">
+                            <a:latin typeface="Cambria Math" panose="02040503050406030204" pitchFamily="18" charset="0"/>
+                          </a:rPr>
+                        </m:ctrlPr>
+                      </m:accPr>
+                      <m:e>
+                        <m:r>
+                          <a:rPr lang="en-US" sz="2200" i="1">
+                            <a:latin typeface="Cambria Math" panose="02040503050406030204" pitchFamily="18" charset="0"/>
+                          </a:rPr>
+                          <m:t>𝑦</m:t>
+                        </m:r>
+                      </m:e>
+                    </m:acc>
+                  </m:oMath>
+                </a14:m>
+                <a:r>
+                  <a:rPr lang="en-US" sz="2200" dirty="0"/>
+                  <a:t> </a:t>
+                </a:r>
+                <a:r>
+                  <a:rPr lang="ru-RU" sz="2200" dirty="0"/>
+                  <a:t>– предсказанное значение</a:t>
+                </a:r>
+                <a:r>
+                  <a:rPr lang="en-US" sz="2200" dirty="0"/>
+                  <a:t>, </a:t>
+                </a:r>
+                <a14:m>
+                  <m:oMath xmlns:m="http://schemas.openxmlformats.org/officeDocument/2006/math">
+                    <m:sSub>
+                      <m:sSubPr>
+                        <m:ctrlPr>
+                          <a:rPr lang="en-US" sz="2200" i="1">
+                            <a:latin typeface="Cambria Math" panose="02040503050406030204" pitchFamily="18" charset="0"/>
+                          </a:rPr>
+                        </m:ctrlPr>
+                      </m:sSubPr>
+                      <m:e>
+                        <m:acc>
+                          <m:accPr>
+                            <m:chr m:val="̂"/>
+                            <m:ctrlPr>
+                              <a:rPr lang="en-US" sz="2200" i="1">
+                                <a:latin typeface="Cambria Math" panose="02040503050406030204" pitchFamily="18" charset="0"/>
+                              </a:rPr>
+                            </m:ctrlPr>
+                          </m:accPr>
+                          <m:e>
+                            <m:r>
+                              <a:rPr lang="en-US" sz="2200" i="1">
+                                <a:latin typeface="Cambria Math" panose="02040503050406030204" pitchFamily="18" charset="0"/>
+                              </a:rPr>
+                              <m:t>𝑦</m:t>
+                            </m:r>
+                          </m:e>
+                        </m:acc>
+                      </m:e>
+                      <m:sub>
+                        <m:r>
+                          <a:rPr lang="en-US" sz="2200" i="1">
+                            <a:latin typeface="Cambria Math" panose="02040503050406030204" pitchFamily="18" charset="0"/>
+                          </a:rPr>
+                          <m:t>0</m:t>
+                        </m:r>
+                      </m:sub>
+                    </m:sSub>
+                    <m:r>
+                      <a:rPr lang="en-US" sz="2200" i="1">
+                        <a:latin typeface="Cambria Math" panose="02040503050406030204" pitchFamily="18" charset="0"/>
+                      </a:rPr>
+                      <m:t>=</m:t>
+                    </m:r>
+                    <m:sSub>
+                      <m:sSubPr>
+                        <m:ctrlPr>
+                          <a:rPr lang="en-US" sz="2200" i="1">
+                            <a:latin typeface="Cambria Math" panose="02040503050406030204" pitchFamily="18" charset="0"/>
+                          </a:rPr>
+                        </m:ctrlPr>
+                      </m:sSubPr>
+                      <m:e>
+                        <m:r>
+                          <a:rPr lang="en-US" sz="2200" i="1">
+                            <a:latin typeface="Cambria Math" panose="02040503050406030204" pitchFamily="18" charset="0"/>
+                          </a:rPr>
+                          <m:t>𝑦</m:t>
+                        </m:r>
+                      </m:e>
+                      <m:sub>
+                        <m:r>
+                          <a:rPr lang="en-US" sz="2200" i="1">
+                            <a:latin typeface="Cambria Math" panose="02040503050406030204" pitchFamily="18" charset="0"/>
+                          </a:rPr>
+                          <m:t>0</m:t>
+                        </m:r>
+                      </m:sub>
+                    </m:sSub>
+                  </m:oMath>
+                </a14:m>
+                <a:endParaRPr lang="ru-RU" sz="2200" dirty="0"/>
+              </a:p>
+              <a:p>
+                <a:pPr marL="0" indent="0">
+                  <a:lnSpc>
+                    <a:spcPct val="100000"/>
+                  </a:lnSpc>
+                  <a:spcBef>
+                    <a:spcPts val="300"/>
+                  </a:spcBef>
+                  <a:buNone/>
+                </a:pPr>
+                <a14:m>
+                  <m:oMath xmlns:m="http://schemas.openxmlformats.org/officeDocument/2006/math">
+                    <m:sSub>
+                      <m:sSubPr>
+                        <m:ctrlPr>
+                          <a:rPr lang="en-US" sz="2200" i="1">
+                            <a:latin typeface="Cambria Math" panose="02040503050406030204" pitchFamily="18" charset="0"/>
+                          </a:rPr>
+                        </m:ctrlPr>
+                      </m:sSubPr>
+                      <m:e>
+                        <m:acc>
+                          <m:accPr>
+                            <m:chr m:val="̂"/>
+                            <m:ctrlPr>
+                              <a:rPr lang="en-US" sz="2200" i="1">
+                                <a:latin typeface="Cambria Math" panose="02040503050406030204" pitchFamily="18" charset="0"/>
+                              </a:rPr>
+                            </m:ctrlPr>
+                          </m:accPr>
+                          <m:e>
+                            <m:r>
+                              <a:rPr lang="en-US" sz="2200" i="1">
+                                <a:latin typeface="Cambria Math" panose="02040503050406030204" pitchFamily="18" charset="0"/>
+                              </a:rPr>
+                              <m:t>𝑦</m:t>
+                            </m:r>
+                          </m:e>
+                        </m:acc>
+                      </m:e>
+                      <m:sub>
+                        <m:r>
+                          <a:rPr lang="en-US" sz="2200" i="1">
+                            <a:latin typeface="Cambria Math" panose="02040503050406030204" pitchFamily="18" charset="0"/>
+                          </a:rPr>
+                          <m:t>𝑛</m:t>
+                        </m:r>
+                        <m:r>
+                          <a:rPr lang="ru-RU" sz="2200" i="1">
+                            <a:latin typeface="Cambria Math" panose="02040503050406030204" pitchFamily="18" charset="0"/>
+                          </a:rPr>
+                          <m:t>+1</m:t>
+                        </m:r>
+                      </m:sub>
+                    </m:sSub>
+                  </m:oMath>
+                </a14:m>
+                <a:r>
+                  <a:rPr lang="ru-RU" sz="2200" dirty="0"/>
+                  <a:t> </a:t>
+                </a:r>
+                <a14:m>
+                  <m:oMath xmlns:m="http://schemas.openxmlformats.org/officeDocument/2006/math">
+                    <m:r>
+                      <a:rPr lang="en-US" sz="2200" b="0" i="1" dirty="0" smtClean="0">
+                        <a:latin typeface="Cambria Math" panose="02040503050406030204" pitchFamily="18" charset="0"/>
+                      </a:rPr>
+                      <m:t>−</m:t>
+                    </m:r>
+                  </m:oMath>
+                </a14:m>
+                <a:r>
+                  <a:rPr lang="en-US" sz="2200" dirty="0"/>
+                  <a:t> </a:t>
+                </a:r>
+                <a:r>
+                  <a:rPr lang="ru-RU" sz="2200" dirty="0"/>
+                  <a:t>частично истинное значение </a:t>
+                </a:r>
+                <a14:m>
+                  <m:oMath xmlns:m="http://schemas.openxmlformats.org/officeDocument/2006/math">
+                    <m:sSub>
+                      <m:sSubPr>
+                        <m:ctrlPr>
+                          <a:rPr lang="en-US" sz="2200" i="1">
+                            <a:latin typeface="Cambria Math" panose="02040503050406030204" pitchFamily="18" charset="0"/>
+                          </a:rPr>
+                        </m:ctrlPr>
+                      </m:sSubPr>
+                      <m:e>
+                        <m:r>
+                          <a:rPr lang="en-US" sz="2200" i="1">
+                            <a:latin typeface="Cambria Math" panose="02040503050406030204" pitchFamily="18" charset="0"/>
+                          </a:rPr>
+                          <m:t>𝑦</m:t>
+                        </m:r>
+                      </m:e>
+                      <m:sub>
+                        <m:r>
+                          <a:rPr lang="en-US" sz="2200" i="1">
+                            <a:latin typeface="Cambria Math" panose="02040503050406030204" pitchFamily="18" charset="0"/>
+                          </a:rPr>
+                          <m:t>𝑛</m:t>
+                        </m:r>
+                      </m:sub>
+                    </m:sSub>
+                  </m:oMath>
+                </a14:m>
+                <a:r>
+                  <a:rPr lang="ru-RU" sz="2200" dirty="0"/>
+                  <a:t>, частично результат предсказания</a:t>
+                </a:r>
+                <a14:m>
+                  <m:oMath xmlns:m="http://schemas.openxmlformats.org/officeDocument/2006/math">
+                    <m:r>
+                      <a:rPr lang="ru-RU" sz="2200" b="0" i="0" smtClean="0">
+                        <a:latin typeface="Cambria Math" panose="02040503050406030204" pitchFamily="18" charset="0"/>
+                      </a:rPr>
+                      <m:t> </m:t>
+                    </m:r>
+                    <m:sSub>
+                      <m:sSubPr>
+                        <m:ctrlPr>
+                          <a:rPr lang="en-US" sz="2200" i="1">
+                            <a:latin typeface="Cambria Math" panose="02040503050406030204" pitchFamily="18" charset="0"/>
+                          </a:rPr>
+                        </m:ctrlPr>
+                      </m:sSubPr>
+                      <m:e>
+                        <m:acc>
+                          <m:accPr>
+                            <m:chr m:val="̂"/>
+                            <m:ctrlPr>
+                              <a:rPr lang="en-US" sz="2200" i="1">
+                                <a:latin typeface="Cambria Math" panose="02040503050406030204" pitchFamily="18" charset="0"/>
+                              </a:rPr>
+                            </m:ctrlPr>
+                          </m:accPr>
+                          <m:e>
+                            <m:r>
+                              <a:rPr lang="en-US" sz="2200" i="1">
+                                <a:latin typeface="Cambria Math" panose="02040503050406030204" pitchFamily="18" charset="0"/>
+                              </a:rPr>
+                              <m:t>𝑦</m:t>
+                            </m:r>
+                          </m:e>
+                        </m:acc>
+                      </m:e>
+                      <m:sub>
+                        <m:r>
+                          <a:rPr lang="en-US" sz="2200" i="1">
+                            <a:latin typeface="Cambria Math" panose="02040503050406030204" pitchFamily="18" charset="0"/>
+                          </a:rPr>
+                          <m:t>𝑛</m:t>
+                        </m:r>
+                        <m:r>
+                          <a:rPr lang="en-US" sz="2200" i="1">
+                            <a:latin typeface="Cambria Math" panose="02040503050406030204" pitchFamily="18" charset="0"/>
+                          </a:rPr>
+                          <m:t>−1</m:t>
+                        </m:r>
+                      </m:sub>
+                    </m:sSub>
+                    <m:r>
+                      <a:rPr lang="en-US" sz="2200" i="1">
+                        <a:latin typeface="Cambria Math" panose="02040503050406030204" pitchFamily="18" charset="0"/>
+                      </a:rPr>
+                      <m:t> </m:t>
+                    </m:r>
+                  </m:oMath>
+                </a14:m>
+                <a:endParaRPr lang="ru-RU" sz="2200" dirty="0"/>
+              </a:p>
+              <a:p>
+                <a:pPr marL="0" indent="0">
+                  <a:lnSpc>
+                    <a:spcPct val="100000"/>
+                  </a:lnSpc>
+                  <a:spcBef>
+                    <a:spcPts val="300"/>
+                  </a:spcBef>
+                  <a:buNone/>
+                </a:pPr>
+                <a:r>
+                  <a:rPr lang="ru-RU" sz="2200" dirty="0"/>
+                  <a:t>	(</a:t>
+                </a:r>
+                <a14:m>
+                  <m:oMath xmlns:m="http://schemas.openxmlformats.org/officeDocument/2006/math">
+                    <m:sSub>
+                      <m:sSubPr>
+                        <m:ctrlPr>
+                          <a:rPr lang="en-US" sz="2200" i="1">
+                            <a:latin typeface="Cambria Math" panose="02040503050406030204" pitchFamily="18" charset="0"/>
+                          </a:rPr>
+                        </m:ctrlPr>
+                      </m:sSubPr>
+                      <m:e>
+                        <m:acc>
+                          <m:accPr>
+                            <m:chr m:val="̂"/>
+                            <m:ctrlPr>
+                              <a:rPr lang="en-US" sz="2200" i="1">
+                                <a:latin typeface="Cambria Math" panose="02040503050406030204" pitchFamily="18" charset="0"/>
+                              </a:rPr>
+                            </m:ctrlPr>
+                          </m:accPr>
+                          <m:e>
+                            <m:r>
+                              <a:rPr lang="en-US" sz="2200" i="1">
+                                <a:latin typeface="Cambria Math" panose="02040503050406030204" pitchFamily="18" charset="0"/>
+                              </a:rPr>
+                              <m:t>𝑦</m:t>
+                            </m:r>
+                          </m:e>
+                        </m:acc>
+                      </m:e>
+                      <m:sub>
+                        <m:r>
+                          <a:rPr lang="en-US" sz="2200" i="1">
+                            <a:latin typeface="Cambria Math" panose="02040503050406030204" pitchFamily="18" charset="0"/>
+                          </a:rPr>
+                          <m:t>𝑛</m:t>
+                        </m:r>
+                      </m:sub>
+                    </m:sSub>
+                  </m:oMath>
+                </a14:m>
+                <a:r>
+                  <a:rPr lang="ru-RU" sz="2200" dirty="0"/>
+                  <a:t> зависит от</a:t>
+                </a:r>
+                <a14:m>
+                  <m:oMath xmlns:m="http://schemas.openxmlformats.org/officeDocument/2006/math">
+                    <m:sSub>
+                      <m:sSubPr>
+                        <m:ctrlPr>
+                          <a:rPr lang="en-US" sz="2200" i="1">
+                            <a:latin typeface="Cambria Math" panose="02040503050406030204" pitchFamily="18" charset="0"/>
+                          </a:rPr>
+                        </m:ctrlPr>
+                      </m:sSubPr>
+                      <m:e>
+                        <m:r>
+                          <a:rPr lang="en-US" sz="2200" b="0" i="1" smtClean="0">
+                            <a:latin typeface="Cambria Math" panose="02040503050406030204" pitchFamily="18" charset="0"/>
+                          </a:rPr>
+                          <m:t> </m:t>
+                        </m:r>
+                        <m:r>
+                          <a:rPr lang="en-US" sz="2200" i="1">
+                            <a:latin typeface="Cambria Math" panose="02040503050406030204" pitchFamily="18" charset="0"/>
+                          </a:rPr>
+                          <m:t>𝑦</m:t>
+                        </m:r>
+                      </m:e>
+                      <m:sub>
+                        <m:r>
+                          <a:rPr lang="en-US" sz="2200" i="1">
+                            <a:latin typeface="Cambria Math" panose="02040503050406030204" pitchFamily="18" charset="0"/>
+                          </a:rPr>
+                          <m:t>𝑛</m:t>
+                        </m:r>
+                        <m:r>
+                          <a:rPr lang="ru-RU" sz="2200" b="0" i="1" smtClean="0">
+                            <a:latin typeface="Cambria Math" panose="02040503050406030204" pitchFamily="18" charset="0"/>
+                          </a:rPr>
+                          <m:t>−1</m:t>
+                        </m:r>
+                      </m:sub>
+                    </m:sSub>
+                  </m:oMath>
+                </a14:m>
+                <a:r>
+                  <a:rPr lang="ru-RU" sz="2200" dirty="0"/>
+                  <a:t> и </a:t>
+                </a:r>
+                <a14:m>
+                  <m:oMath xmlns:m="http://schemas.openxmlformats.org/officeDocument/2006/math">
+                    <m:sSub>
+                      <m:sSubPr>
+                        <m:ctrlPr>
+                          <a:rPr lang="en-US" sz="2200" i="1">
+                            <a:latin typeface="Cambria Math" panose="02040503050406030204" pitchFamily="18" charset="0"/>
+                          </a:rPr>
+                        </m:ctrlPr>
+                      </m:sSubPr>
+                      <m:e>
+                        <m:acc>
+                          <m:accPr>
+                            <m:chr m:val="̂"/>
+                            <m:ctrlPr>
+                              <a:rPr lang="en-US" sz="2200" i="1">
+                                <a:latin typeface="Cambria Math" panose="02040503050406030204" pitchFamily="18" charset="0"/>
+                              </a:rPr>
+                            </m:ctrlPr>
+                          </m:accPr>
+                          <m:e>
+                            <m:r>
+                              <a:rPr lang="en-US" sz="2200" i="1">
+                                <a:latin typeface="Cambria Math" panose="02040503050406030204" pitchFamily="18" charset="0"/>
+                              </a:rPr>
+                              <m:t>𝑦</m:t>
+                            </m:r>
+                          </m:e>
+                        </m:acc>
+                      </m:e>
+                      <m:sub>
+                        <m:r>
+                          <a:rPr lang="en-US" sz="2200" i="1">
+                            <a:latin typeface="Cambria Math" panose="02040503050406030204" pitchFamily="18" charset="0"/>
+                          </a:rPr>
+                          <m:t>𝑛</m:t>
+                        </m:r>
+                        <m:r>
+                          <a:rPr lang="en-US" sz="2200" i="1">
+                            <a:latin typeface="Cambria Math" panose="02040503050406030204" pitchFamily="18" charset="0"/>
+                          </a:rPr>
+                          <m:t>−2 </m:t>
+                        </m:r>
+                      </m:sub>
+                    </m:sSub>
+                    <m:r>
+                      <a:rPr lang="ru-RU" sz="2200" b="0" i="1" smtClean="0">
+                        <a:latin typeface="Cambria Math" panose="02040503050406030204" pitchFamily="18" charset="0"/>
+                      </a:rPr>
+                      <m:t>=</m:t>
+                    </m:r>
+                    <m:r>
+                      <a:rPr lang="en-US" sz="2200" b="0" i="1" smtClean="0">
+                        <a:latin typeface="Cambria Math" panose="02040503050406030204" pitchFamily="18" charset="0"/>
+                      </a:rPr>
+                      <m:t>𝑓</m:t>
+                    </m:r>
+                    <m:r>
+                      <a:rPr lang="en-US" sz="2200" b="0" i="1" smtClean="0">
+                        <a:latin typeface="Cambria Math" panose="02040503050406030204" pitchFamily="18" charset="0"/>
+                      </a:rPr>
+                      <m:t>(</m:t>
+                    </m:r>
+                    <m:sSub>
+                      <m:sSubPr>
+                        <m:ctrlPr>
+                          <a:rPr lang="en-US" sz="2200" i="1">
+                            <a:latin typeface="Cambria Math" panose="02040503050406030204" pitchFamily="18" charset="0"/>
+                          </a:rPr>
+                        </m:ctrlPr>
+                      </m:sSubPr>
+                      <m:e>
+                        <m:r>
+                          <a:rPr lang="en-US" sz="2200" i="1">
+                            <a:latin typeface="Cambria Math" panose="02040503050406030204" pitchFamily="18" charset="0"/>
+                          </a:rPr>
+                          <m:t>𝑦</m:t>
+                        </m:r>
+                      </m:e>
+                      <m:sub>
+                        <m:r>
+                          <a:rPr lang="en-US" sz="2200" i="1">
+                            <a:latin typeface="Cambria Math" panose="02040503050406030204" pitchFamily="18" charset="0"/>
+                          </a:rPr>
+                          <m:t>𝑛</m:t>
+                        </m:r>
+                        <m:r>
+                          <a:rPr lang="en-US" sz="2200" b="0" i="1" smtClean="0">
+                            <a:latin typeface="Cambria Math" panose="02040503050406030204" pitchFamily="18" charset="0"/>
+                          </a:rPr>
+                          <m:t>−3</m:t>
+                        </m:r>
+                      </m:sub>
+                    </m:sSub>
+                    <m:r>
+                      <a:rPr lang="en-US" sz="2200" b="0" i="1" smtClean="0">
+                        <a:latin typeface="Cambria Math" panose="02040503050406030204" pitchFamily="18" charset="0"/>
+                      </a:rPr>
+                      <m:t>,</m:t>
+                    </m:r>
+                    <m:sSub>
+                      <m:sSubPr>
+                        <m:ctrlPr>
+                          <a:rPr lang="en-US" sz="2200" i="1">
+                            <a:latin typeface="Cambria Math" panose="02040503050406030204" pitchFamily="18" charset="0"/>
+                          </a:rPr>
+                        </m:ctrlPr>
+                      </m:sSubPr>
+                      <m:e>
+                        <m:acc>
+                          <m:accPr>
+                            <m:chr m:val="̂"/>
+                            <m:ctrlPr>
+                              <a:rPr lang="en-US" sz="2200" i="1">
+                                <a:latin typeface="Cambria Math" panose="02040503050406030204" pitchFamily="18" charset="0"/>
+                              </a:rPr>
+                            </m:ctrlPr>
+                          </m:accPr>
+                          <m:e>
+                            <m:r>
+                              <a:rPr lang="en-US" sz="2200" i="1">
+                                <a:latin typeface="Cambria Math" panose="02040503050406030204" pitchFamily="18" charset="0"/>
+                              </a:rPr>
+                              <m:t>𝑦</m:t>
+                            </m:r>
+                          </m:e>
+                        </m:acc>
+                      </m:e>
+                      <m:sub>
+                        <m:r>
+                          <a:rPr lang="en-US" sz="2200" i="1">
+                            <a:latin typeface="Cambria Math" panose="02040503050406030204" pitchFamily="18" charset="0"/>
+                          </a:rPr>
+                          <m:t>𝑛</m:t>
+                        </m:r>
+                        <m:r>
+                          <a:rPr lang="en-US" sz="2200" i="1">
+                            <a:latin typeface="Cambria Math" panose="02040503050406030204" pitchFamily="18" charset="0"/>
+                          </a:rPr>
+                          <m:t>−4 </m:t>
+                        </m:r>
+                      </m:sub>
+                    </m:sSub>
+                    <m:r>
+                      <a:rPr lang="en-US" sz="2200" b="0" i="1" smtClean="0">
+                        <a:latin typeface="Cambria Math" panose="02040503050406030204" pitchFamily="18" charset="0"/>
+                      </a:rPr>
+                      <m:t>)</m:t>
+                    </m:r>
+                  </m:oMath>
+                </a14:m>
+                <a:r>
+                  <a:rPr lang="en-US" sz="2200" dirty="0"/>
+                  <a:t> </a:t>
+                </a:r>
+                <a:r>
+                  <a:rPr lang="ru-RU" sz="2200" dirty="0"/>
+                  <a:t>и  т.д.)</a:t>
+                </a:r>
+              </a:p>
+              <a:p>
+                <a:pPr marL="0" indent="0">
+                  <a:lnSpc>
+                    <a:spcPct val="100000"/>
+                  </a:lnSpc>
+                  <a:spcBef>
+                    <a:spcPts val="300"/>
+                  </a:spcBef>
+                  <a:buNone/>
+                </a:pPr>
+                <a:r>
+                  <a:rPr lang="ru-RU" sz="2400" dirty="0"/>
+                  <a:t>Дополнительно можно предсказать разброс (СКО) модели </a:t>
+                </a:r>
+                <a:r>
+                  <a:rPr lang="en-US" sz="2400" dirty="0"/>
+                  <a:t>SES</a:t>
+                </a:r>
+                <a:endParaRPr lang="ru-RU" sz="2400" dirty="0"/>
+              </a:p>
+              <a:p>
+                <a:pPr marL="0" indent="0">
+                  <a:lnSpc>
+                    <a:spcPct val="100000"/>
+                  </a:lnSpc>
+                  <a:spcBef>
+                    <a:spcPts val="300"/>
+                  </a:spcBef>
+                  <a:buNone/>
+                </a:pPr>
+                <a:endParaRPr lang="en-US" sz="2200" dirty="0"/>
+              </a:p>
+            </p:txBody>
+          </p:sp>
+        </mc:Choice>
+        <mc:Fallback xmlns="">
+          <p:sp>
+            <p:nvSpPr>
+              <p:cNvPr id="3" name="Объект 2">
+                <a:extLst>
+                  <a:ext uri="{FF2B5EF4-FFF2-40B4-BE49-F238E27FC236}">
+                    <a16:creationId xmlns:a16="http://schemas.microsoft.com/office/drawing/2014/main" id="{9CFDC76D-90F0-4FD7-8BA6-954D6D2E6FFD}"/>
+                  </a:ext>
+                </a:extLst>
+              </p:cNvPr>
+              <p:cNvSpPr>
+                <a:spLocks noGrp="1" noRot="1" noChangeAspect="1" noMove="1" noResize="1" noEditPoints="1" noAdjustHandles="1" noChangeArrowheads="1" noChangeShapeType="1" noTextEdit="1"/>
+              </p:cNvSpPr>
+              <p:nvPr>
+                <p:ph idx="1"/>
+              </p:nvPr>
+            </p:nvSpPr>
+            <p:spPr>
+              <a:xfrm>
+                <a:off x="247650" y="1113910"/>
+                <a:ext cx="11791949" cy="5502274"/>
+              </a:xfrm>
+              <a:blipFill>
+                <a:blip r:embed="rId3"/>
+                <a:stretch>
+                  <a:fillRect l="-827" t="-776" r="-569"/>
+                </a:stretch>
+              </a:blipFill>
+            </p:spPr>
+            <p:txBody>
+              <a:bodyPr/>
+              <a:lstStyle/>
+              <a:p>
+                <a:r>
+                  <a:rPr lang="ru-RU">
+                    <a:noFill/>
+                  </a:rPr>
+                  <a:t> </a:t>
+                </a:r>
+              </a:p>
+            </p:txBody>
+          </p:sp>
+        </mc:Fallback>
+      </mc:AlternateContent>
+      <p:pic>
+        <p:nvPicPr>
+          <p:cNvPr id="28674" name="Picture 2" descr="image.png">
+            <a:extLst>
+              <a:ext uri="{FF2B5EF4-FFF2-40B4-BE49-F238E27FC236}">
+                <a16:creationId xmlns:a16="http://schemas.microsoft.com/office/drawing/2014/main" id="{C9C3A7CA-ABAE-4A48-93DC-A97D24BFCF4D}"/>
+              </a:ext>
+            </a:extLst>
+          </p:cNvPr>
+          <p:cNvPicPr>
+            <a:picLocks noChangeAspect="1" noChangeArrowheads="1"/>
+          </p:cNvPicPr>
+          <p:nvPr/>
+        </p:nvPicPr>
+        <p:blipFill rotWithShape="1">
+          <a:blip r:embed="rId4">
+            <a:extLst>
+              <a:ext uri="{28A0092B-C50C-407E-A947-70E740481C1C}">
+                <a14:useLocalDpi xmlns:a14="http://schemas.microsoft.com/office/drawing/2010/main" val="0"/>
+              </a:ext>
+            </a:extLst>
+          </a:blip>
+          <a:srcRect l="7397" t="7773" r="7937" b="2213"/>
+          <a:stretch/>
+        </p:blipFill>
+        <p:spPr bwMode="auto">
+          <a:xfrm>
+            <a:off x="5755840" y="3470739"/>
+            <a:ext cx="5731311" cy="3048707"/>
+          </a:xfrm>
+          <a:prstGeom prst="rect">
+            <a:avLst/>
+          </a:prstGeom>
+          <a:noFill/>
+          <a:extLst>
+            <a:ext uri="{909E8E84-426E-40DD-AFC4-6F175D3DCCD1}">
+              <a14:hiddenFill xmlns:a14="http://schemas.microsoft.com/office/drawing/2010/main">
+                <a:solidFill>
+                  <a:srgbClr val="FFFFFF"/>
+                </a:solidFill>
+              </a14:hiddenFill>
+            </a:ext>
+          </a:extLst>
+        </p:spPr>
+      </p:pic>
+      <p:sp>
+        <p:nvSpPr>
+          <p:cNvPr id="5" name="Прямоугольник 4"/>
+          <p:cNvSpPr/>
+          <p:nvPr/>
+        </p:nvSpPr>
+        <p:spPr>
+          <a:xfrm>
+            <a:off x="4792067" y="6462266"/>
+            <a:ext cx="6695084" cy="338554"/>
+          </a:xfrm>
+          <a:prstGeom prst="rect">
+            <a:avLst/>
+          </a:prstGeom>
+        </p:spPr>
+        <p:txBody>
+          <a:bodyPr wrap="square">
+            <a:spAutoFit/>
+          </a:bodyPr>
+          <a:lstStyle/>
+          <a:p>
+            <a:r>
+              <a:rPr lang="ru-RU" sz="1600" dirty="0"/>
+              <a:t>https://education.yandex.ru/handbook/ml/article/analitika-vremennyh-ryadov</a:t>
+            </a:r>
+          </a:p>
+        </p:txBody>
+      </p:sp>
+      <p:sp>
+        <p:nvSpPr>
+          <p:cNvPr id="6" name="Прямоугольник 5"/>
+          <p:cNvSpPr/>
+          <p:nvPr/>
+        </p:nvSpPr>
+        <p:spPr>
+          <a:xfrm>
+            <a:off x="1330377" y="6519446"/>
+            <a:ext cx="2974725" cy="338554"/>
+          </a:xfrm>
+          <a:prstGeom prst="rect">
+            <a:avLst/>
+          </a:prstGeom>
+        </p:spPr>
+        <p:txBody>
+          <a:bodyPr wrap="none">
+            <a:spAutoFit/>
+          </a:bodyPr>
+          <a:lstStyle/>
+          <a:p>
+            <a:r>
+              <a:rPr lang="en-US" sz="1600" dirty="0"/>
+              <a:t>https://otexts.com/fpp2/ses.html</a:t>
+            </a:r>
+            <a:endParaRPr lang="ru-RU" sz="1600" dirty="0"/>
+          </a:p>
+        </p:txBody>
+      </p:sp>
+      <p:pic>
+        <p:nvPicPr>
+          <p:cNvPr id="12" name="Picture 2" descr="image.png">
+            <a:extLst>
+              <a:ext uri="{FF2B5EF4-FFF2-40B4-BE49-F238E27FC236}">
+                <a16:creationId xmlns:a16="http://schemas.microsoft.com/office/drawing/2014/main" id="{C9C3A7CA-ABAE-4A48-93DC-A97D24BFCF4D}"/>
+              </a:ext>
+            </a:extLst>
+          </p:cNvPr>
+          <p:cNvPicPr>
+            <a:picLocks noChangeAspect="1" noChangeArrowheads="1"/>
+          </p:cNvPicPr>
+          <p:nvPr/>
+        </p:nvPicPr>
+        <p:blipFill rotWithShape="1">
+          <a:blip r:embed="rId4">
+            <a:extLst>
+              <a:ext uri="{28A0092B-C50C-407E-A947-70E740481C1C}">
+                <a14:useLocalDpi xmlns:a14="http://schemas.microsoft.com/office/drawing/2010/main" val="0"/>
+              </a:ext>
+            </a:extLst>
+          </a:blip>
+          <a:srcRect l="12213" t="11080" r="79045" b="70833"/>
+          <a:stretch/>
+        </p:blipFill>
+        <p:spPr bwMode="auto">
+          <a:xfrm>
+            <a:off x="5581650" y="3433327"/>
+            <a:ext cx="1581846" cy="1637349"/>
+          </a:xfrm>
+          <a:prstGeom prst="rect">
+            <a:avLst/>
+          </a:prstGeom>
+          <a:noFill/>
+          <a:extLst>
+            <a:ext uri="{909E8E84-426E-40DD-AFC4-6F175D3DCCD1}">
+              <a14:hiddenFill xmlns:a14="http://schemas.microsoft.com/office/drawing/2010/main">
+                <a:solidFill>
+                  <a:srgbClr val="FFFFFF"/>
+                </a:solidFill>
+              </a14:hiddenFill>
+            </a:ext>
+          </a:extLst>
+        </p:spPr>
+      </p:pic>
+    </p:spTree>
+    <p:extLst>
+      <p:ext uri="{BB962C8B-B14F-4D97-AF65-F5344CB8AC3E}">
+        <p14:creationId xmlns:p14="http://schemas.microsoft.com/office/powerpoint/2010/main" val="512548261"/>
+      </p:ext>
+    </p:extLst>
+  </p:cSld>
+  <p:clrMapOvr>
+    <a:masterClrMapping/>
+  </p:clrMapOvr>
+  <p:timing>
+    <p:tnLst>
+      <p:par>
+        <p:cTn id="1" dur="indefinite" restart="never" nodeType="tmRoot"/>
+      </p:par>
+    </p:tnLst>
+  </p:timing>
+</p:sld>
+</file>
+
+<file path=ppt/slides/slide5.xml><?xml version="1.0" encoding="utf-8"?>
 <p:sld xmlns:a="http://schemas.openxmlformats.org/drawingml/2006/main" xmlns:r="http://schemas.openxmlformats.org/officeDocument/2006/relationships" xmlns:p="http://schemas.openxmlformats.org/presentationml/2006/main">
   <p:cSld>
     <p:spTree>
@@ -18436,7 +21364,7 @@
 </p:sld>
 </file>
 
-<file path=ppt/slides/slide4.xml><?xml version="1.0" encoding="utf-8"?>
+<file path=ppt/slides/slide6.xml><?xml version="1.0" encoding="utf-8"?>
 <p:sld xmlns:a="http://schemas.openxmlformats.org/drawingml/2006/main" xmlns:r="http://schemas.openxmlformats.org/officeDocument/2006/relationships" xmlns:p="http://schemas.openxmlformats.org/presentationml/2006/main">
   <p:cSld>
     <p:spTree>
@@ -19151,7 +22079,7 @@
 </p:sld>
 </file>
 
-<file path=ppt/slides/slide5.xml><?xml version="1.0" encoding="utf-8"?>
+<file path=ppt/slides/slide7.xml><?xml version="1.0" encoding="utf-8"?>
 <p:sld xmlns:a="http://schemas.openxmlformats.org/drawingml/2006/main" xmlns:r="http://schemas.openxmlformats.org/officeDocument/2006/relationships" xmlns:p="http://schemas.openxmlformats.org/presentationml/2006/main">
   <p:cSld>
     <p:spTree>
@@ -20498,7 +23426,7 @@
 </p:sld>
 </file>
 
-<file path=ppt/slides/slide6.xml><?xml version="1.0" encoding="utf-8"?>
+<file path=ppt/slides/slide8.xml><?xml version="1.0" encoding="utf-8"?>
 <p:sld xmlns:a="http://schemas.openxmlformats.org/drawingml/2006/main" xmlns:r="http://schemas.openxmlformats.org/officeDocument/2006/relationships" xmlns:p="http://schemas.openxmlformats.org/presentationml/2006/main">
   <p:cSld>
     <p:spTree>
@@ -21388,7 +24316,7 @@
 </p:sld>
 </file>
 
-<file path=ppt/slides/slide7.xml><?xml version="1.0" encoding="utf-8"?>
+<file path=ppt/slides/slide9.xml><?xml version="1.0" encoding="utf-8"?>
 <p:sld xmlns:a="http://schemas.openxmlformats.org/drawingml/2006/main" xmlns:r="http://schemas.openxmlformats.org/officeDocument/2006/relationships" xmlns:p="http://schemas.openxmlformats.org/presentationml/2006/main">
   <p:cSld>
     <p:spTree>
@@ -22713,1604 +25641,6 @@
 </p:sld>
 </file>
 
-<file path=ppt/slides/slide8.xml><?xml version="1.0" encoding="utf-8"?>
-<p:sld xmlns:a="http://schemas.openxmlformats.org/drawingml/2006/main" xmlns:r="http://schemas.openxmlformats.org/officeDocument/2006/relationships" xmlns:p="http://schemas.openxmlformats.org/presentationml/2006/main">
-  <p:cSld>
-    <p:spTree>
-      <p:nvGrpSpPr>
-        <p:cNvPr id="1" name=""/>
-        <p:cNvGrpSpPr/>
-        <p:nvPr/>
-      </p:nvGrpSpPr>
-      <p:grpSpPr>
-        <a:xfrm>
-          <a:off x="0" y="0"/>
-          <a:ext cx="0" cy="0"/>
-          <a:chOff x="0" y="0"/>
-          <a:chExt cx="0" cy="0"/>
-        </a:xfrm>
-      </p:grpSpPr>
-      <p:sp>
-        <p:nvSpPr>
-          <p:cNvPr id="2" name="Заголовок 1">
-            <a:extLst>
-              <a:ext uri="{FF2B5EF4-FFF2-40B4-BE49-F238E27FC236}">
-                <a16:creationId xmlns:a16="http://schemas.microsoft.com/office/drawing/2014/main" id="{3FB6B433-AB20-4BD4-8E77-84B856A5D608}"/>
-              </a:ext>
-            </a:extLst>
-          </p:cNvPr>
-          <p:cNvSpPr>
-            <a:spLocks noGrp="1"/>
-          </p:cNvSpPr>
-          <p:nvPr>
-            <p:ph type="title"/>
-          </p:nvPr>
-        </p:nvSpPr>
-        <p:spPr>
-          <a:xfrm>
-            <a:off x="226957" y="93606"/>
-            <a:ext cx="11802295" cy="757854"/>
-          </a:xfrm>
-        </p:spPr>
-        <p:txBody>
-          <a:bodyPr>
-            <a:normAutofit/>
-          </a:bodyPr>
-          <a:lstStyle/>
-          <a:p>
-            <a:pPr algn="ctr"/>
-            <a:r>
-              <a:rPr lang="ru-RU" sz="3200" b="1" dirty="0"/>
-              <a:t>Модель </a:t>
-            </a:r>
-            <a:r>
-              <a:rPr lang="en-US" sz="3200" b="1" dirty="0"/>
-              <a:t>Holt</a:t>
-            </a:r>
-            <a:r>
-              <a:rPr lang="ru-RU" sz="3200" b="1" dirty="0"/>
-              <a:t>-</a:t>
-            </a:r>
-            <a:r>
-              <a:rPr lang="en-US" sz="3200" b="1" dirty="0"/>
-              <a:t>Winters </a:t>
-            </a:r>
-            <a:r>
-              <a:rPr lang="ru-RU" sz="3200" b="1" dirty="0"/>
-              <a:t> - тройное экспоненциальное сглаживание</a:t>
-            </a:r>
-            <a:endParaRPr lang="ru-RU" sz="3600" b="1" dirty="0"/>
-          </a:p>
-        </p:txBody>
-      </p:sp>
-      <p:sp>
-        <p:nvSpPr>
-          <p:cNvPr id="4" name="Объект 3"/>
-          <p:cNvSpPr>
-            <a:spLocks noGrp="1"/>
-          </p:cNvSpPr>
-          <p:nvPr>
-            <p:ph idx="1"/>
-          </p:nvPr>
-        </p:nvSpPr>
-        <p:spPr>
-          <a:xfrm>
-            <a:off x="226956" y="739410"/>
-            <a:ext cx="6775824" cy="5595061"/>
-          </a:xfrm>
-        </p:spPr>
-        <p:txBody>
-          <a:bodyPr>
-            <a:noAutofit/>
-          </a:bodyPr>
-          <a:lstStyle/>
-          <a:p>
-            <a:r>
-              <a:rPr lang="en-US" sz="2100" dirty="0"/>
-              <a:t>SES - </a:t>
-            </a:r>
-            <a:r>
-              <a:rPr lang="ru-RU" sz="2100" dirty="0"/>
-              <a:t>Для небольшого периода и одношагового прогноза.</a:t>
-            </a:r>
-          </a:p>
-          <a:p>
-            <a:pPr lvl="1"/>
-            <a:r>
-              <a:rPr lang="ru-RU" sz="2100" dirty="0"/>
-              <a:t>Желательно, чтобы  данные были стационарны или очень медленно меняющиеся</a:t>
-            </a:r>
-          </a:p>
-          <a:p>
-            <a:pPr lvl="1"/>
-            <a:r>
-              <a:rPr lang="ru-RU" sz="2100" dirty="0"/>
-              <a:t>Напр. 2 месяца, горизонт 1-2 дня.</a:t>
-            </a:r>
-          </a:p>
-          <a:p>
-            <a:r>
-              <a:rPr lang="en-US" sz="2100" dirty="0"/>
-              <a:t>Holt (DES) – </a:t>
-            </a:r>
-            <a:r>
-              <a:rPr lang="ru-RU" sz="2100" dirty="0"/>
-              <a:t>если преимущественно в данных тренд (медленные монотонные изменения).</a:t>
-            </a:r>
-          </a:p>
-          <a:p>
-            <a:pPr lvl="1"/>
-            <a:r>
-              <a:rPr lang="ru-RU" sz="2100" dirty="0"/>
-              <a:t>Возможен многошаговый прогноз если поведение ВР монотонно. </a:t>
-            </a:r>
-          </a:p>
-          <a:p>
-            <a:pPr lvl="1"/>
-            <a:r>
-              <a:rPr lang="ru-RU" sz="2100" dirty="0"/>
-              <a:t>Напр. 1 год, горизонт 1-4 недели</a:t>
-            </a:r>
-          </a:p>
-          <a:p>
-            <a:r>
-              <a:rPr lang="en-US" sz="2100" dirty="0"/>
-              <a:t>HW (TES) – </a:t>
-            </a:r>
-            <a:r>
-              <a:rPr lang="ru-RU" sz="2100" dirty="0"/>
-              <a:t>если данные имеют одну сезонность регулярного вида.</a:t>
-            </a:r>
-          </a:p>
-          <a:p>
-            <a:pPr lvl="1"/>
-            <a:r>
-              <a:rPr lang="ru-RU" sz="1700" dirty="0"/>
-              <a:t>Возможен сложный</a:t>
-            </a:r>
-            <a:r>
-              <a:rPr lang="en-US" sz="1700" dirty="0"/>
-              <a:t> </a:t>
-            </a:r>
-            <a:r>
-              <a:rPr lang="ru-RU" sz="1700" dirty="0"/>
-              <a:t>(не </a:t>
-            </a:r>
-            <a:r>
-              <a:rPr lang="ru-RU" sz="1700" dirty="0" err="1"/>
-              <a:t>гаронический</a:t>
-            </a:r>
-            <a:r>
-              <a:rPr lang="ru-RU" sz="1700" dirty="0"/>
-              <a:t>) паттерн но с одним известным периодом</a:t>
-            </a:r>
-            <a:r>
-              <a:rPr lang="en-US" sz="1700" dirty="0"/>
-              <a:t> </a:t>
-            </a:r>
-            <a:r>
-              <a:rPr lang="ru-RU" sz="1700" dirty="0"/>
-              <a:t>(регулярная сезонность)</a:t>
-            </a:r>
-          </a:p>
-          <a:p>
-            <a:pPr lvl="1"/>
-            <a:r>
-              <a:rPr lang="ru-RU" sz="2100" dirty="0"/>
-              <a:t> напр. 10 лет, горизонт 1-2 месяца</a:t>
-            </a:r>
-          </a:p>
-        </p:txBody>
-      </p:sp>
-      <p:pic>
-        <p:nvPicPr>
-          <p:cNvPr id="8194" name="Picture 2" descr="Visualize how the Exponential Smoothing (ETS) algorithm works, Image by Author"/>
-          <p:cNvPicPr>
-            <a:picLocks noChangeAspect="1" noChangeArrowheads="1"/>
-          </p:cNvPicPr>
-          <p:nvPr/>
-        </p:nvPicPr>
-        <p:blipFill rotWithShape="1">
-          <a:blip r:embed="rId3" cstate="hqprint">
-            <a:extLst>
-              <a:ext uri="{28A0092B-C50C-407E-A947-70E740481C1C}">
-                <a14:useLocalDpi xmlns:a14="http://schemas.microsoft.com/office/drawing/2010/main" val="0"/>
-              </a:ext>
-            </a:extLst>
-          </a:blip>
-          <a:srcRect l="49074"/>
-          <a:stretch/>
-        </p:blipFill>
-        <p:spPr bwMode="auto">
-          <a:xfrm>
-            <a:off x="7002780" y="722190"/>
-            <a:ext cx="4912297" cy="5425887"/>
-          </a:xfrm>
-          <a:prstGeom prst="rect">
-            <a:avLst/>
-          </a:prstGeom>
-          <a:noFill/>
-          <a:extLst>
-            <a:ext uri="{909E8E84-426E-40DD-AFC4-6F175D3DCCD1}">
-              <a14:hiddenFill xmlns:a14="http://schemas.microsoft.com/office/drawing/2010/main">
-                <a:solidFill>
-                  <a:srgbClr val="FFFFFF"/>
-                </a:solidFill>
-              </a14:hiddenFill>
-            </a:ext>
-          </a:extLst>
-        </p:spPr>
-      </p:pic>
-      <p:sp>
-        <p:nvSpPr>
-          <p:cNvPr id="7" name="Прямоугольник 6"/>
-          <p:cNvSpPr/>
-          <p:nvPr/>
-        </p:nvSpPr>
-        <p:spPr>
-          <a:xfrm>
-            <a:off x="838200" y="6351691"/>
-            <a:ext cx="8875383" cy="369332"/>
-          </a:xfrm>
-          <a:prstGeom prst="rect">
-            <a:avLst/>
-          </a:prstGeom>
-        </p:spPr>
-        <p:txBody>
-          <a:bodyPr wrap="square">
-            <a:spAutoFit/>
-          </a:bodyPr>
-          <a:lstStyle/>
-          <a:p>
-            <a:r>
-              <a:rPr lang="ru-RU" dirty="0"/>
-              <a:t>https://towardsdatascience.com/forecast-multiple-time-series-like-a-master-1579a2b6f18d/</a:t>
-            </a:r>
-          </a:p>
-        </p:txBody>
-      </p:sp>
-    </p:spTree>
-    <p:extLst>
-      <p:ext uri="{BB962C8B-B14F-4D97-AF65-F5344CB8AC3E}">
-        <p14:creationId xmlns:p14="http://schemas.microsoft.com/office/powerpoint/2010/main" val="4171603156"/>
-      </p:ext>
-    </p:extLst>
-  </p:cSld>
-  <p:clrMapOvr>
-    <a:masterClrMapping/>
-  </p:clrMapOvr>
-</p:sld>
-</file>
-
-<file path=ppt/slides/slide9.xml><?xml version="1.0" encoding="utf-8"?>
-<p:sld xmlns:a="http://schemas.openxmlformats.org/drawingml/2006/main" xmlns:r="http://schemas.openxmlformats.org/officeDocument/2006/relationships" xmlns:p="http://schemas.openxmlformats.org/presentationml/2006/main">
-  <p:cSld>
-    <p:spTree>
-      <p:nvGrpSpPr>
-        <p:cNvPr id="1" name=""/>
-        <p:cNvGrpSpPr/>
-        <p:nvPr/>
-      </p:nvGrpSpPr>
-      <p:grpSpPr>
-        <a:xfrm>
-          <a:off x="0" y="0"/>
-          <a:ext cx="0" cy="0"/>
-          <a:chOff x="0" y="0"/>
-          <a:chExt cx="0" cy="0"/>
-        </a:xfrm>
-      </p:grpSpPr>
-      <p:sp>
-        <p:nvSpPr>
-          <p:cNvPr id="2" name="Заголовок 1">
-            <a:extLst>
-              <a:ext uri="{FF2B5EF4-FFF2-40B4-BE49-F238E27FC236}">
-                <a16:creationId xmlns:a16="http://schemas.microsoft.com/office/drawing/2014/main" id="{3FB6B433-AB20-4BD4-8E77-84B856A5D608}"/>
-              </a:ext>
-            </a:extLst>
-          </p:cNvPr>
-          <p:cNvSpPr>
-            <a:spLocks noGrp="1"/>
-          </p:cNvSpPr>
-          <p:nvPr>
-            <p:ph type="title"/>
-          </p:nvPr>
-        </p:nvSpPr>
-        <p:spPr>
-          <a:xfrm>
-            <a:off x="226957" y="93605"/>
-            <a:ext cx="11802295" cy="933115"/>
-          </a:xfrm>
-        </p:spPr>
-        <p:txBody>
-          <a:bodyPr>
-            <a:normAutofit fontScale="90000"/>
-          </a:bodyPr>
-          <a:lstStyle/>
-          <a:p>
-            <a:pPr algn="ctr"/>
-            <a:r>
-              <a:rPr lang="ru-RU" sz="3200" b="1" dirty="0"/>
-              <a:t>Модели </a:t>
-            </a:r>
-            <a:r>
-              <a:rPr lang="en-US" sz="3200" b="1" dirty="0"/>
-              <a:t>Error-Trend-Seasonality</a:t>
-            </a:r>
-            <a:r>
-              <a:rPr lang="ru-RU" sz="3200" b="1" dirty="0"/>
-              <a:t> (</a:t>
-            </a:r>
-            <a:r>
-              <a:rPr lang="ru-RU" sz="3600" b="1" dirty="0"/>
-              <a:t>экспоненциальное сглаживание)</a:t>
-            </a:r>
-          </a:p>
-        </p:txBody>
-      </p:sp>
-      <mc:AlternateContent xmlns:mc="http://schemas.openxmlformats.org/markup-compatibility/2006" xmlns:a14="http://schemas.microsoft.com/office/drawing/2010/main">
-        <mc:Choice Requires="a14">
-          <p:sp>
-            <p:nvSpPr>
-              <p:cNvPr id="3" name="Объект 2">
-                <a:extLst>
-                  <a:ext uri="{FF2B5EF4-FFF2-40B4-BE49-F238E27FC236}">
-                    <a16:creationId xmlns:a16="http://schemas.microsoft.com/office/drawing/2014/main" id="{9CFDC76D-90F0-4FD7-8BA6-954D6D2E6FFD}"/>
-                  </a:ext>
-                </a:extLst>
-              </p:cNvPr>
-              <p:cNvSpPr>
-                <a:spLocks noGrp="1"/>
-              </p:cNvSpPr>
-              <p:nvPr>
-                <p:ph idx="1"/>
-              </p:nvPr>
-            </p:nvSpPr>
-            <p:spPr>
-              <a:xfrm>
-                <a:off x="206264" y="769492"/>
-                <a:ext cx="11985736" cy="5509656"/>
-              </a:xfrm>
-            </p:spPr>
-            <p:txBody>
-              <a:bodyPr>
-                <a:normAutofit/>
-              </a:bodyPr>
-              <a:lstStyle/>
-              <a:p>
-                <a:pPr marL="0" indent="0">
-                  <a:lnSpc>
-                    <a:spcPct val="110000"/>
-                  </a:lnSpc>
-                  <a:buNone/>
-                </a:pPr>
-                <a:r>
-                  <a:rPr lang="en-US" sz="2200" dirty="0"/>
-                  <a:t> </a:t>
-                </a:r>
-                <a:r>
-                  <a:rPr lang="ru-RU" sz="2200" dirty="0"/>
-                  <a:t>Рассмотрим </a:t>
-                </a:r>
-                <a:r>
-                  <a:rPr lang="en-US" sz="2200" dirty="0"/>
-                  <a:t>SES </a:t>
-                </a:r>
-                <a:r>
-                  <a:rPr lang="ru-RU" sz="2200" dirty="0"/>
-                  <a:t>в виде части модели </a:t>
-                </a:r>
-                <a:r>
-                  <a:rPr lang="en-US" sz="2200" dirty="0"/>
-                  <a:t>Holt-Winters</a:t>
-                </a:r>
-              </a:p>
-              <a:p>
-                <a:pPr marL="0" indent="0" algn="ctr">
-                  <a:lnSpc>
-                    <a:spcPct val="110000"/>
-                  </a:lnSpc>
-                  <a:buNone/>
-                </a:pPr>
-                <a14:m>
-                  <m:oMathPara xmlns:m="http://schemas.openxmlformats.org/officeDocument/2006/math">
-                    <m:oMathParaPr>
-                      <m:jc m:val="centerGroup"/>
-                    </m:oMathParaPr>
-                    <m:oMath xmlns:m="http://schemas.openxmlformats.org/officeDocument/2006/math">
-                      <m:sSub>
-                        <m:sSubPr>
-                          <m:ctrlPr>
-                            <a:rPr lang="en-US" sz="2200" i="1">
-                              <a:latin typeface="Cambria Math" panose="02040503050406030204" pitchFamily="18" charset="0"/>
-                            </a:rPr>
-                          </m:ctrlPr>
-                        </m:sSubPr>
-                        <m:e>
-                          <m:acc>
-                            <m:accPr>
-                              <m:chr m:val="̂"/>
-                              <m:ctrlPr>
-                                <a:rPr lang="en-US" sz="2200" i="1">
-                                  <a:latin typeface="Cambria Math" panose="02040503050406030204" pitchFamily="18" charset="0"/>
-                                </a:rPr>
-                              </m:ctrlPr>
-                            </m:accPr>
-                            <m:e>
-                              <m:r>
-                                <a:rPr lang="en-US" sz="2200" i="1">
-                                  <a:latin typeface="Cambria Math" panose="02040503050406030204" pitchFamily="18" charset="0"/>
-                                </a:rPr>
-                                <m:t>𝑦</m:t>
-                              </m:r>
-                            </m:e>
-                          </m:acc>
-                        </m:e>
-                        <m:sub>
-                          <m:r>
-                            <a:rPr lang="en-US" sz="2200" i="1">
-                              <a:latin typeface="Cambria Math" panose="02040503050406030204" pitchFamily="18" charset="0"/>
-                            </a:rPr>
-                            <m:t>𝑛</m:t>
-                          </m:r>
-                          <m:r>
-                            <a:rPr lang="ru-RU" sz="2200" i="1">
-                              <a:latin typeface="Cambria Math" panose="02040503050406030204" pitchFamily="18" charset="0"/>
-                            </a:rPr>
-                            <m:t>+1</m:t>
-                          </m:r>
-                        </m:sub>
-                      </m:sSub>
-                      <m:r>
-                        <a:rPr lang="en-US" sz="2200" i="1">
-                          <a:latin typeface="Cambria Math" panose="02040503050406030204" pitchFamily="18" charset="0"/>
-                        </a:rPr>
-                        <m:t>=</m:t>
-                      </m:r>
-                      <m:sSub>
-                        <m:sSubPr>
-                          <m:ctrlPr>
-                            <a:rPr lang="en-US" sz="2200" b="0" i="1" smtClean="0">
-                              <a:latin typeface="Cambria Math" panose="02040503050406030204" pitchFamily="18" charset="0"/>
-                            </a:rPr>
-                          </m:ctrlPr>
-                        </m:sSubPr>
-                        <m:e>
-                          <m:r>
-                            <a:rPr lang="en-US" sz="2200" b="0" i="1" smtClean="0">
-                              <a:latin typeface="Cambria Math" panose="02040503050406030204" pitchFamily="18" charset="0"/>
-                            </a:rPr>
-                            <m:t>𝑙</m:t>
-                          </m:r>
-                        </m:e>
-                        <m:sub>
-                          <m:r>
-                            <a:rPr lang="en-US" sz="2200" b="0" i="1" smtClean="0">
-                              <a:latin typeface="Cambria Math" panose="02040503050406030204" pitchFamily="18" charset="0"/>
-                            </a:rPr>
-                            <m:t>𝑛</m:t>
-                          </m:r>
-                        </m:sub>
-                      </m:sSub>
-                    </m:oMath>
-                  </m:oMathPara>
-                </a14:m>
-                <a:endParaRPr lang="en-US" sz="2200" i="1" dirty="0">
-                  <a:latin typeface="Cambria Math" panose="02040503050406030204" pitchFamily="18" charset="0"/>
-                </a:endParaRPr>
-              </a:p>
-              <a:p>
-                <a:pPr marL="0" indent="0" algn="ctr">
-                  <a:lnSpc>
-                    <a:spcPct val="110000"/>
-                  </a:lnSpc>
-                  <a:buNone/>
-                </a:pPr>
-                <a14:m>
-                  <m:oMath xmlns:m="http://schemas.openxmlformats.org/officeDocument/2006/math">
-                    <m:sSub>
-                      <m:sSubPr>
-                        <m:ctrlPr>
-                          <a:rPr lang="en-US" sz="2200" b="0" i="1" smtClean="0">
-                            <a:latin typeface="Cambria Math" panose="02040503050406030204" pitchFamily="18" charset="0"/>
-                          </a:rPr>
-                        </m:ctrlPr>
-                      </m:sSubPr>
-                      <m:e>
-                        <m:r>
-                          <a:rPr lang="en-US" sz="2200" b="0" i="1" smtClean="0">
-                            <a:latin typeface="Cambria Math" panose="02040503050406030204" pitchFamily="18" charset="0"/>
-                          </a:rPr>
-                          <m:t>𝑙</m:t>
-                        </m:r>
-                      </m:e>
-                      <m:sub>
-                        <m:r>
-                          <a:rPr lang="en-US" sz="2200" b="0" i="1" smtClean="0">
-                            <a:latin typeface="Cambria Math" panose="02040503050406030204" pitchFamily="18" charset="0"/>
-                          </a:rPr>
-                          <m:t>𝑛</m:t>
-                        </m:r>
-                      </m:sub>
-                    </m:sSub>
-                    <m:r>
-                      <a:rPr lang="en-US" sz="2200" b="0" i="1" smtClean="0">
-                        <a:latin typeface="Cambria Math" panose="02040503050406030204" pitchFamily="18" charset="0"/>
-                      </a:rPr>
-                      <m:t>=</m:t>
-                    </m:r>
-                    <m:r>
-                      <a:rPr lang="en-US" sz="2200" i="1">
-                        <a:latin typeface="Cambria Math" panose="02040503050406030204" pitchFamily="18" charset="0"/>
-                      </a:rPr>
-                      <m:t>𝛼</m:t>
-                    </m:r>
-                    <m:sSub>
-                      <m:sSubPr>
-                        <m:ctrlPr>
-                          <a:rPr lang="en-US" sz="2200" i="1">
-                            <a:latin typeface="Cambria Math" panose="02040503050406030204" pitchFamily="18" charset="0"/>
-                          </a:rPr>
-                        </m:ctrlPr>
-                      </m:sSubPr>
-                      <m:e>
-                        <m:r>
-                          <a:rPr lang="en-US" sz="2200" i="1">
-                            <a:latin typeface="Cambria Math" panose="02040503050406030204" pitchFamily="18" charset="0"/>
-                          </a:rPr>
-                          <m:t>𝑦</m:t>
-                        </m:r>
-                      </m:e>
-                      <m:sub>
-                        <m:r>
-                          <a:rPr lang="en-US" sz="2200" i="1">
-                            <a:latin typeface="Cambria Math" panose="02040503050406030204" pitchFamily="18" charset="0"/>
-                          </a:rPr>
-                          <m:t>𝑛</m:t>
-                        </m:r>
-                      </m:sub>
-                    </m:sSub>
-                    <m:r>
-                      <a:rPr lang="en-US" sz="2200" i="1">
-                        <a:latin typeface="Cambria Math" panose="02040503050406030204" pitchFamily="18" charset="0"/>
-                      </a:rPr>
-                      <m:t>+</m:t>
-                    </m:r>
-                    <m:d>
-                      <m:dPr>
-                        <m:ctrlPr>
-                          <a:rPr lang="en-US" sz="2200" i="1">
-                            <a:latin typeface="Cambria Math" panose="02040503050406030204" pitchFamily="18" charset="0"/>
-                          </a:rPr>
-                        </m:ctrlPr>
-                      </m:dPr>
-                      <m:e>
-                        <m:r>
-                          <a:rPr lang="en-US" sz="2200" i="1">
-                            <a:latin typeface="Cambria Math" panose="02040503050406030204" pitchFamily="18" charset="0"/>
-                          </a:rPr>
-                          <m:t>1−</m:t>
-                        </m:r>
-                        <m:r>
-                          <a:rPr lang="en-US" sz="2200" i="1">
-                            <a:latin typeface="Cambria Math" panose="02040503050406030204" pitchFamily="18" charset="0"/>
-                          </a:rPr>
-                          <m:t>𝛼</m:t>
-                        </m:r>
-                      </m:e>
-                    </m:d>
-                    <m:sSub>
-                      <m:sSubPr>
-                        <m:ctrlPr>
-                          <a:rPr lang="en-US" sz="2200" i="1">
-                            <a:latin typeface="Cambria Math" panose="02040503050406030204" pitchFamily="18" charset="0"/>
-                          </a:rPr>
-                        </m:ctrlPr>
-                      </m:sSubPr>
-                      <m:e>
-                        <m:r>
-                          <a:rPr lang="en-US" sz="2200" b="0" i="1" smtClean="0">
-                            <a:latin typeface="Cambria Math" panose="02040503050406030204" pitchFamily="18" charset="0"/>
-                          </a:rPr>
-                          <m:t>𝑙</m:t>
-                        </m:r>
-                      </m:e>
-                      <m:sub>
-                        <m:r>
-                          <a:rPr lang="en-US" sz="2200" i="1">
-                            <a:latin typeface="Cambria Math" panose="02040503050406030204" pitchFamily="18" charset="0"/>
-                          </a:rPr>
-                          <m:t>𝑛</m:t>
-                        </m:r>
-                        <m:r>
-                          <a:rPr lang="en-US" sz="2200" i="1">
-                            <a:latin typeface="Cambria Math" panose="02040503050406030204" pitchFamily="18" charset="0"/>
-                          </a:rPr>
-                          <m:t>−1</m:t>
-                        </m:r>
-                      </m:sub>
-                    </m:sSub>
-                  </m:oMath>
-                </a14:m>
-                <a:r>
-                  <a:rPr lang="ru-RU" sz="2200" dirty="0"/>
-                  <a:t> </a:t>
-                </a:r>
-                <a:endParaRPr lang="en-US" sz="2200" dirty="0"/>
-              </a:p>
-              <a:p>
-                <a:pPr marL="0" indent="0">
-                  <a:lnSpc>
-                    <a:spcPct val="110000"/>
-                  </a:lnSpc>
-                  <a:buNone/>
-                </a:pPr>
-                <a:r>
-                  <a:rPr lang="ru-RU" sz="2200" dirty="0"/>
-                  <a:t>	тогда </a:t>
-                </a:r>
-                <a14:m>
-                  <m:oMath xmlns:m="http://schemas.openxmlformats.org/officeDocument/2006/math">
-                    <m:sSub>
-                      <m:sSubPr>
-                        <m:ctrlPr>
-                          <a:rPr lang="en-US" sz="2200" b="0" i="1" smtClean="0">
-                            <a:latin typeface="Cambria Math" panose="02040503050406030204" pitchFamily="18" charset="0"/>
-                          </a:rPr>
-                        </m:ctrlPr>
-                      </m:sSubPr>
-                      <m:e>
-                        <m:r>
-                          <a:rPr lang="en-US" sz="2200" b="0" i="1" smtClean="0">
-                            <a:latin typeface="Cambria Math" panose="02040503050406030204" pitchFamily="18" charset="0"/>
-                          </a:rPr>
-                          <m:t>𝑙</m:t>
-                        </m:r>
-                      </m:e>
-                      <m:sub>
-                        <m:r>
-                          <a:rPr lang="en-US" sz="2200" b="0" i="1" smtClean="0">
-                            <a:latin typeface="Cambria Math" panose="02040503050406030204" pitchFamily="18" charset="0"/>
-                          </a:rPr>
-                          <m:t>𝑛</m:t>
-                        </m:r>
-                      </m:sub>
-                    </m:sSub>
-                    <m:r>
-                      <a:rPr lang="en-US" sz="2200" b="0" i="1" smtClean="0">
-                        <a:latin typeface="Cambria Math" panose="02040503050406030204" pitchFamily="18" charset="0"/>
-                      </a:rPr>
-                      <m:t>=</m:t>
-                    </m:r>
-                    <m:sSub>
-                      <m:sSubPr>
-                        <m:ctrlPr>
-                          <a:rPr lang="en-US" sz="2200" b="0" i="1" smtClean="0">
-                            <a:latin typeface="Cambria Math" panose="02040503050406030204" pitchFamily="18" charset="0"/>
-                          </a:rPr>
-                        </m:ctrlPr>
-                      </m:sSubPr>
-                      <m:e>
-                        <m:r>
-                          <a:rPr lang="en-US" sz="2200" b="0" i="1" smtClean="0">
-                            <a:latin typeface="Cambria Math" panose="02040503050406030204" pitchFamily="18" charset="0"/>
-                          </a:rPr>
-                          <m:t>𝑙</m:t>
-                        </m:r>
-                      </m:e>
-                      <m:sub>
-                        <m:r>
-                          <a:rPr lang="en-US" sz="2200" b="0" i="1" smtClean="0">
-                            <a:latin typeface="Cambria Math" panose="02040503050406030204" pitchFamily="18" charset="0"/>
-                          </a:rPr>
-                          <m:t>𝑛</m:t>
-                        </m:r>
-                        <m:r>
-                          <a:rPr lang="en-US" sz="2200" b="0" i="1" smtClean="0">
-                            <a:latin typeface="Cambria Math" panose="02040503050406030204" pitchFamily="18" charset="0"/>
-                          </a:rPr>
-                          <m:t>−1</m:t>
-                        </m:r>
-                      </m:sub>
-                    </m:sSub>
-                    <m:r>
-                      <a:rPr lang="en-US" sz="2200" b="0" i="1" smtClean="0">
-                        <a:latin typeface="Cambria Math" panose="02040503050406030204" pitchFamily="18" charset="0"/>
-                      </a:rPr>
-                      <m:t>+</m:t>
-                    </m:r>
-                    <m:r>
-                      <a:rPr lang="en-US" sz="2200" b="0" i="1" smtClean="0">
-                        <a:latin typeface="Cambria Math" panose="02040503050406030204" pitchFamily="18" charset="0"/>
-                      </a:rPr>
-                      <m:t>𝛼</m:t>
-                    </m:r>
-                    <m:d>
-                      <m:dPr>
-                        <m:ctrlPr>
-                          <a:rPr lang="en-US" sz="2200" b="0" i="1" smtClean="0">
-                            <a:latin typeface="Cambria Math" panose="02040503050406030204" pitchFamily="18" charset="0"/>
-                          </a:rPr>
-                        </m:ctrlPr>
-                      </m:dPr>
-                      <m:e>
-                        <m:sSub>
-                          <m:sSubPr>
-                            <m:ctrlPr>
-                              <a:rPr lang="en-US" sz="2200" b="0" i="1" smtClean="0">
-                                <a:latin typeface="Cambria Math" panose="02040503050406030204" pitchFamily="18" charset="0"/>
-                              </a:rPr>
-                            </m:ctrlPr>
-                          </m:sSubPr>
-                          <m:e>
-                            <m:r>
-                              <a:rPr lang="en-US" sz="2200" b="0" i="1" smtClean="0">
-                                <a:latin typeface="Cambria Math" panose="02040503050406030204" pitchFamily="18" charset="0"/>
-                              </a:rPr>
-                              <m:t>𝑦</m:t>
-                            </m:r>
-                          </m:e>
-                          <m:sub>
-                            <m:r>
-                              <a:rPr lang="en-US" sz="2200" b="0" i="1" smtClean="0">
-                                <a:latin typeface="Cambria Math" panose="02040503050406030204" pitchFamily="18" charset="0"/>
-                              </a:rPr>
-                              <m:t>𝑛</m:t>
-                            </m:r>
-                          </m:sub>
-                        </m:sSub>
-                        <m:r>
-                          <a:rPr lang="en-US" sz="2200" b="0" i="1" smtClean="0">
-                            <a:latin typeface="Cambria Math" panose="02040503050406030204" pitchFamily="18" charset="0"/>
-                          </a:rPr>
-                          <m:t>−</m:t>
-                        </m:r>
-                        <m:sSub>
-                          <m:sSubPr>
-                            <m:ctrlPr>
-                              <a:rPr lang="en-US" sz="2200" b="0" i="1" smtClean="0">
-                                <a:latin typeface="Cambria Math" panose="02040503050406030204" pitchFamily="18" charset="0"/>
-                              </a:rPr>
-                            </m:ctrlPr>
-                          </m:sSubPr>
-                          <m:e>
-                            <m:r>
-                              <a:rPr lang="en-US" sz="2200" b="0" i="1" smtClean="0">
-                                <a:latin typeface="Cambria Math" panose="02040503050406030204" pitchFamily="18" charset="0"/>
-                              </a:rPr>
-                              <m:t>𝑙</m:t>
-                            </m:r>
-                          </m:e>
-                          <m:sub>
-                            <m:r>
-                              <a:rPr lang="en-US" sz="2200" b="0" i="1" smtClean="0">
-                                <a:latin typeface="Cambria Math" panose="02040503050406030204" pitchFamily="18" charset="0"/>
-                              </a:rPr>
-                              <m:t>𝑛</m:t>
-                            </m:r>
-                            <m:r>
-                              <a:rPr lang="en-US" sz="2200" b="0" i="1" smtClean="0">
-                                <a:latin typeface="Cambria Math" panose="02040503050406030204" pitchFamily="18" charset="0"/>
-                              </a:rPr>
-                              <m:t>−1</m:t>
-                            </m:r>
-                          </m:sub>
-                        </m:sSub>
-                      </m:e>
-                    </m:d>
-                    <m:r>
-                      <a:rPr lang="en-US" sz="2200" b="0" i="1" smtClean="0">
-                        <a:latin typeface="Cambria Math" panose="02040503050406030204" pitchFamily="18" charset="0"/>
-                      </a:rPr>
-                      <m:t>=</m:t>
-                    </m:r>
-                    <m:sSub>
-                      <m:sSubPr>
-                        <m:ctrlPr>
-                          <a:rPr lang="en-US" sz="2200" i="1">
-                            <a:latin typeface="Cambria Math" panose="02040503050406030204" pitchFamily="18" charset="0"/>
-                          </a:rPr>
-                        </m:ctrlPr>
-                      </m:sSubPr>
-                      <m:e>
-                        <m:r>
-                          <a:rPr lang="en-US" sz="2200" i="1">
-                            <a:latin typeface="Cambria Math" panose="02040503050406030204" pitchFamily="18" charset="0"/>
-                          </a:rPr>
-                          <m:t>𝑙</m:t>
-                        </m:r>
-                      </m:e>
-                      <m:sub>
-                        <m:r>
-                          <a:rPr lang="en-US" sz="2200" i="1">
-                            <a:latin typeface="Cambria Math" panose="02040503050406030204" pitchFamily="18" charset="0"/>
-                          </a:rPr>
-                          <m:t>𝑛</m:t>
-                        </m:r>
-                        <m:r>
-                          <a:rPr lang="en-US" sz="2200" i="1">
-                            <a:latin typeface="Cambria Math" panose="02040503050406030204" pitchFamily="18" charset="0"/>
-                          </a:rPr>
-                          <m:t>−1</m:t>
-                        </m:r>
-                      </m:sub>
-                    </m:sSub>
-                    <m:r>
-                      <a:rPr lang="en-US" sz="2200" i="1">
-                        <a:latin typeface="Cambria Math" panose="02040503050406030204" pitchFamily="18" charset="0"/>
-                      </a:rPr>
-                      <m:t>+</m:t>
-                    </m:r>
-                    <m:r>
-                      <a:rPr lang="en-US" sz="2200" i="1">
-                        <a:latin typeface="Cambria Math" panose="02040503050406030204" pitchFamily="18" charset="0"/>
-                      </a:rPr>
-                      <m:t>𝛼</m:t>
-                    </m:r>
-                    <m:d>
-                      <m:dPr>
-                        <m:ctrlPr>
-                          <a:rPr lang="en-US" sz="2200" i="1">
-                            <a:latin typeface="Cambria Math" panose="02040503050406030204" pitchFamily="18" charset="0"/>
-                          </a:rPr>
-                        </m:ctrlPr>
-                      </m:dPr>
-                      <m:e>
-                        <m:sSub>
-                          <m:sSubPr>
-                            <m:ctrlPr>
-                              <a:rPr lang="en-US" sz="2200" i="1">
-                                <a:latin typeface="Cambria Math" panose="02040503050406030204" pitchFamily="18" charset="0"/>
-                              </a:rPr>
-                            </m:ctrlPr>
-                          </m:sSubPr>
-                          <m:e>
-                            <m:r>
-                              <a:rPr lang="en-US" sz="2200" i="1">
-                                <a:latin typeface="Cambria Math" panose="02040503050406030204" pitchFamily="18" charset="0"/>
-                              </a:rPr>
-                              <m:t>𝑦</m:t>
-                            </m:r>
-                          </m:e>
-                          <m:sub>
-                            <m:r>
-                              <a:rPr lang="en-US" sz="2200" i="1">
-                                <a:latin typeface="Cambria Math" panose="02040503050406030204" pitchFamily="18" charset="0"/>
-                              </a:rPr>
-                              <m:t>𝑛</m:t>
-                            </m:r>
-                          </m:sub>
-                        </m:sSub>
-                        <m:r>
-                          <a:rPr lang="en-US" sz="2200" i="1">
-                            <a:latin typeface="Cambria Math" panose="02040503050406030204" pitchFamily="18" charset="0"/>
-                          </a:rPr>
-                          <m:t>−</m:t>
-                        </m:r>
-                        <m:sSub>
-                          <m:sSubPr>
-                            <m:ctrlPr>
-                              <a:rPr lang="en-US" sz="2200" i="1">
-                                <a:latin typeface="Cambria Math" panose="02040503050406030204" pitchFamily="18" charset="0"/>
-                              </a:rPr>
-                            </m:ctrlPr>
-                          </m:sSubPr>
-                          <m:e>
-                            <m:acc>
-                              <m:accPr>
-                                <m:chr m:val="̂"/>
-                                <m:ctrlPr>
-                                  <a:rPr lang="en-US" sz="2200" i="1">
-                                    <a:latin typeface="Cambria Math" panose="02040503050406030204" pitchFamily="18" charset="0"/>
-                                  </a:rPr>
-                                </m:ctrlPr>
-                              </m:accPr>
-                              <m:e>
-                                <m:r>
-                                  <a:rPr lang="en-US" sz="2200" i="1">
-                                    <a:latin typeface="Cambria Math" panose="02040503050406030204" pitchFamily="18" charset="0"/>
-                                  </a:rPr>
-                                  <m:t>𝑦</m:t>
-                                </m:r>
-                              </m:e>
-                            </m:acc>
-                          </m:e>
-                          <m:sub>
-                            <m:r>
-                              <a:rPr lang="en-US" sz="2200" i="1">
-                                <a:latin typeface="Cambria Math" panose="02040503050406030204" pitchFamily="18" charset="0"/>
-                              </a:rPr>
-                              <m:t>𝑛</m:t>
-                            </m:r>
-                          </m:sub>
-                        </m:sSub>
-                      </m:e>
-                    </m:d>
-                    <m:r>
-                      <a:rPr lang="en-US" sz="2200" b="0" i="1" smtClean="0">
-                        <a:latin typeface="Cambria Math" panose="02040503050406030204" pitchFamily="18" charset="0"/>
-                      </a:rPr>
-                      <m:t>=</m:t>
-                    </m:r>
-                    <m:sSub>
-                      <m:sSubPr>
-                        <m:ctrlPr>
-                          <a:rPr lang="en-US" sz="2200" i="1">
-                            <a:latin typeface="Cambria Math" panose="02040503050406030204" pitchFamily="18" charset="0"/>
-                          </a:rPr>
-                        </m:ctrlPr>
-                      </m:sSubPr>
-                      <m:e>
-                        <m:r>
-                          <a:rPr lang="en-US" sz="2200" i="1">
-                            <a:latin typeface="Cambria Math" panose="02040503050406030204" pitchFamily="18" charset="0"/>
-                          </a:rPr>
-                          <m:t>𝑙</m:t>
-                        </m:r>
-                      </m:e>
-                      <m:sub>
-                        <m:r>
-                          <a:rPr lang="en-US" sz="2200" i="1">
-                            <a:latin typeface="Cambria Math" panose="02040503050406030204" pitchFamily="18" charset="0"/>
-                          </a:rPr>
-                          <m:t>𝑛</m:t>
-                        </m:r>
-                        <m:r>
-                          <a:rPr lang="en-US" sz="2200" i="1">
-                            <a:latin typeface="Cambria Math" panose="02040503050406030204" pitchFamily="18" charset="0"/>
-                          </a:rPr>
-                          <m:t>−1</m:t>
-                        </m:r>
-                      </m:sub>
-                    </m:sSub>
-                    <m:r>
-                      <a:rPr lang="en-US" sz="2200" i="1">
-                        <a:latin typeface="Cambria Math" panose="02040503050406030204" pitchFamily="18" charset="0"/>
-                      </a:rPr>
-                      <m:t>+</m:t>
-                    </m:r>
-                    <m:r>
-                      <a:rPr lang="en-US" sz="2200" i="1">
-                        <a:latin typeface="Cambria Math" panose="02040503050406030204" pitchFamily="18" charset="0"/>
-                      </a:rPr>
-                      <m:t>𝛼</m:t>
-                    </m:r>
-                    <m:sSub>
-                      <m:sSubPr>
-                        <m:ctrlPr>
-                          <a:rPr lang="en-US" sz="2200" b="0" i="1" smtClean="0">
-                            <a:latin typeface="Cambria Math" panose="02040503050406030204" pitchFamily="18" charset="0"/>
-                          </a:rPr>
-                        </m:ctrlPr>
-                      </m:sSubPr>
-                      <m:e>
-                        <m:r>
-                          <a:rPr lang="en-US" sz="2200" b="0" i="1" smtClean="0">
-                            <a:latin typeface="Cambria Math" panose="02040503050406030204" pitchFamily="18" charset="0"/>
-                          </a:rPr>
-                          <m:t>𝑒</m:t>
-                        </m:r>
-                      </m:e>
-                      <m:sub>
-                        <m:r>
-                          <a:rPr lang="en-US" sz="2200" b="0" i="1" smtClean="0">
-                            <a:latin typeface="Cambria Math" panose="02040503050406030204" pitchFamily="18" charset="0"/>
-                          </a:rPr>
-                          <m:t>𝑛</m:t>
-                        </m:r>
-                      </m:sub>
-                    </m:sSub>
-                    <m:r>
-                      <a:rPr lang="en-US" sz="2200" b="0" i="0" smtClean="0">
-                        <a:latin typeface="Cambria Math" panose="02040503050406030204" pitchFamily="18" charset="0"/>
-                      </a:rPr>
-                      <m:t>,  </m:t>
-                    </m:r>
-                  </m:oMath>
-                </a14:m>
-                <a:endParaRPr lang="ru-RU" sz="2200" b="0" i="0" dirty="0">
-                  <a:latin typeface="Cambria Math" panose="02040503050406030204" pitchFamily="18" charset="0"/>
-                </a:endParaRPr>
-              </a:p>
-              <a:p>
-                <a:pPr marL="0" indent="0">
-                  <a:lnSpc>
-                    <a:spcPct val="110000"/>
-                  </a:lnSpc>
-                  <a:buNone/>
-                </a:pPr>
-                <a14:m>
-                  <m:oMath xmlns:m="http://schemas.openxmlformats.org/officeDocument/2006/math">
-                    <m:r>
-                      <a:rPr lang="ru-RU" sz="2200" b="0" i="0" smtClean="0">
-                        <a:latin typeface="Cambria Math" panose="02040503050406030204" pitchFamily="18" charset="0"/>
-                      </a:rPr>
-                      <m:t>где </m:t>
-                    </m:r>
-                    <m:sSub>
-                      <m:sSubPr>
-                        <m:ctrlPr>
-                          <a:rPr lang="en-US" sz="2200" i="1">
-                            <a:latin typeface="Cambria Math" panose="02040503050406030204" pitchFamily="18" charset="0"/>
-                          </a:rPr>
-                        </m:ctrlPr>
-                      </m:sSubPr>
-                      <m:e>
-                        <m:r>
-                          <a:rPr lang="en-US" sz="2200" i="1">
-                            <a:latin typeface="Cambria Math" panose="02040503050406030204" pitchFamily="18" charset="0"/>
-                          </a:rPr>
-                          <m:t>𝑒</m:t>
-                        </m:r>
-                      </m:e>
-                      <m:sub>
-                        <m:r>
-                          <a:rPr lang="en-US" sz="2200" i="1">
-                            <a:latin typeface="Cambria Math" panose="02040503050406030204" pitchFamily="18" charset="0"/>
-                          </a:rPr>
-                          <m:t>𝑛</m:t>
-                        </m:r>
-                      </m:sub>
-                    </m:sSub>
-                  </m:oMath>
-                </a14:m>
-                <a:r>
-                  <a:rPr lang="ru-RU" sz="2200" dirty="0"/>
-                  <a:t> - остаток в модели (инновация) в модели. </a:t>
-                </a:r>
-              </a:p>
-              <a:p>
-                <a:pPr marL="0" indent="0">
-                  <a:lnSpc>
-                    <a:spcPct val="110000"/>
-                  </a:lnSpc>
-                  <a:buNone/>
-                </a:pPr>
-                <a:r>
-                  <a:rPr lang="ru-RU" sz="2200" dirty="0"/>
-                  <a:t>Тогда можно ввести модель </a:t>
-                </a:r>
-                <a:r>
-                  <a:rPr lang="en-US" sz="2200" dirty="0"/>
-                  <a:t>Error-Trend-Seasonality</a:t>
-                </a:r>
-                <a:r>
-                  <a:rPr lang="ru-RU" sz="2200" b="1" dirty="0"/>
-                  <a:t> </a:t>
-                </a:r>
-                <a:r>
-                  <a:rPr lang="en-US" sz="2200" dirty="0"/>
-                  <a:t>ETS(T, S, E)</a:t>
-                </a:r>
-                <a:r>
-                  <a:rPr lang="ru-RU" sz="2200" dirty="0"/>
-                  <a:t>:Тренд </a:t>
-                </a:r>
-                <a:r>
-                  <a:rPr lang="en-US" sz="2200" dirty="0"/>
-                  <a:t>(T)</a:t>
-                </a:r>
-                <a:r>
-                  <a:rPr lang="ru-RU" sz="2200" dirty="0"/>
-                  <a:t> , сезонность</a:t>
-                </a:r>
-                <a:r>
-                  <a:rPr lang="en-US" sz="2200" dirty="0"/>
-                  <a:t> (S)</a:t>
-                </a:r>
-                <a:r>
-                  <a:rPr lang="ru-RU" sz="2200" dirty="0"/>
-                  <a:t> , ошибка модели</a:t>
-                </a:r>
-                <a:r>
-                  <a:rPr lang="en-US" sz="2200" dirty="0"/>
-                  <a:t> (E)</a:t>
-                </a:r>
-                <a:r>
-                  <a:rPr lang="ru-RU" sz="2200" dirty="0"/>
-                  <a:t>.</a:t>
-                </a:r>
-              </a:p>
-              <a:p>
-                <a:pPr marL="0" indent="0">
-                  <a:lnSpc>
-                    <a:spcPct val="110000"/>
-                  </a:lnSpc>
-                  <a:buNone/>
-                </a:pPr>
-                <a:r>
-                  <a:rPr lang="ru-RU" sz="2200" dirty="0"/>
-                  <a:t>Модели могут быть в разных соотношениях </a:t>
-                </a:r>
-                <a:endParaRPr lang="en-US" sz="2200" dirty="0"/>
-              </a:p>
-              <a:p>
-                <a:pPr>
-                  <a:lnSpc>
-                    <a:spcPct val="110000"/>
-                  </a:lnSpc>
-                  <a:spcBef>
-                    <a:spcPts val="0"/>
-                  </a:spcBef>
-                </a:pPr>
-                <a:r>
-                  <a:rPr lang="en-US" sz="2000" dirty="0"/>
-                  <a:t>A – </a:t>
-                </a:r>
-                <a:r>
-                  <a:rPr lang="ru-RU" sz="2000" dirty="0"/>
-                  <a:t>аддитивная модель, </a:t>
-                </a:r>
-                <a:endParaRPr lang="en-US" sz="2000" dirty="0"/>
-              </a:p>
-              <a:p>
-                <a:pPr>
-                  <a:lnSpc>
-                    <a:spcPct val="110000"/>
-                  </a:lnSpc>
-                  <a:spcBef>
-                    <a:spcPts val="0"/>
-                  </a:spcBef>
-                </a:pPr>
-                <a:r>
-                  <a:rPr lang="en-US" sz="2000" dirty="0"/>
-                  <a:t>Ad – </a:t>
-                </a:r>
-                <a:r>
-                  <a:rPr lang="ru-RU" sz="2000" dirty="0"/>
-                  <a:t>затухающая аддитивная модель, </a:t>
-                </a:r>
-                <a:endParaRPr lang="en-US" sz="2000" dirty="0"/>
-              </a:p>
-              <a:p>
-                <a:pPr>
-                  <a:lnSpc>
-                    <a:spcPct val="110000"/>
-                  </a:lnSpc>
-                  <a:spcBef>
-                    <a:spcPts val="0"/>
-                  </a:spcBef>
-                </a:pPr>
-                <a:r>
-                  <a:rPr lang="en-US" sz="2000" dirty="0"/>
-                  <a:t>M – </a:t>
-                </a:r>
-                <a:r>
-                  <a:rPr lang="ru-RU" sz="2000" dirty="0"/>
-                  <a:t>мультипликативная модель, </a:t>
-                </a:r>
-                <a:endParaRPr lang="en-US" sz="2000" dirty="0"/>
-              </a:p>
-              <a:p>
-                <a:pPr>
-                  <a:lnSpc>
-                    <a:spcPct val="110000"/>
-                  </a:lnSpc>
-                  <a:spcBef>
-                    <a:spcPts val="0"/>
-                  </a:spcBef>
-                </a:pPr>
-                <a:r>
-                  <a:rPr lang="en-US" sz="2000" dirty="0"/>
-                  <a:t>N – </a:t>
-                </a:r>
-                <a:r>
-                  <a:rPr lang="ru-RU" sz="2000" dirty="0"/>
-                  <a:t>компонента не</a:t>
-                </a:r>
-                <a:r>
-                  <a:rPr lang="en-US" sz="2000" dirty="0"/>
-                  <a:t> </a:t>
-                </a:r>
-                <a:r>
-                  <a:rPr lang="ru-RU" sz="2000" dirty="0"/>
-                  <a:t>сглаживается</a:t>
-                </a:r>
-              </a:p>
-              <a:p>
-                <a:pPr marL="0" indent="0">
-                  <a:lnSpc>
-                    <a:spcPct val="110000"/>
-                  </a:lnSpc>
-                  <a:spcBef>
-                    <a:spcPts val="0"/>
-                  </a:spcBef>
-                  <a:buNone/>
-                </a:pPr>
-                <a:r>
-                  <a:rPr lang="ru-RU" sz="2000" dirty="0"/>
-                  <a:t>Напр. </a:t>
-                </a:r>
-                <a:r>
-                  <a:rPr lang="en-US" sz="2000" dirty="0"/>
-                  <a:t>ETS (A, A, A) – </a:t>
-                </a:r>
-                <a:r>
-                  <a:rPr lang="ru-RU" sz="2000" dirty="0"/>
-                  <a:t>модель </a:t>
-                </a:r>
-                <a:r>
-                  <a:rPr lang="ru-RU" sz="2000" dirty="0" err="1"/>
-                  <a:t>Холта-Винтерса</a:t>
-                </a:r>
-                <a:r>
-                  <a:rPr lang="ru-RU" sz="2000" dirty="0"/>
-                  <a:t>.</a:t>
-                </a:r>
-              </a:p>
-            </p:txBody>
-          </p:sp>
-        </mc:Choice>
-        <mc:Fallback xmlns="">
-          <p:sp>
-            <p:nvSpPr>
-              <p:cNvPr id="3" name="Объект 2">
-                <a:extLst>
-                  <a:ext uri="{FF2B5EF4-FFF2-40B4-BE49-F238E27FC236}">
-                    <a16:creationId xmlns:a16="http://schemas.microsoft.com/office/drawing/2014/main" id="{9CFDC76D-90F0-4FD7-8BA6-954D6D2E6FFD}"/>
-                  </a:ext>
-                </a:extLst>
-              </p:cNvPr>
-              <p:cNvSpPr>
-                <a:spLocks noGrp="1" noRot="1" noChangeAspect="1" noMove="1" noResize="1" noEditPoints="1" noAdjustHandles="1" noChangeArrowheads="1" noChangeShapeType="1" noTextEdit="1"/>
-              </p:cNvSpPr>
-              <p:nvPr>
-                <p:ph idx="1"/>
-              </p:nvPr>
-            </p:nvSpPr>
-            <p:spPr>
-              <a:xfrm>
-                <a:off x="206264" y="769492"/>
-                <a:ext cx="11985736" cy="5509656"/>
-              </a:xfrm>
-              <a:blipFill>
-                <a:blip r:embed="rId3"/>
-                <a:stretch>
-                  <a:fillRect l="-661" t="-553"/>
-                </a:stretch>
-              </a:blipFill>
-            </p:spPr>
-            <p:txBody>
-              <a:bodyPr/>
-              <a:lstStyle/>
-              <a:p>
-                <a:r>
-                  <a:rPr lang="ru-RU">
-                    <a:noFill/>
-                  </a:rPr>
-                  <a:t> </a:t>
-                </a:r>
-              </a:p>
-            </p:txBody>
-          </p:sp>
-        </mc:Fallback>
-      </mc:AlternateContent>
-      <p:sp>
-        <p:nvSpPr>
-          <p:cNvPr id="5" name="Прямоугольник 4"/>
-          <p:cNvSpPr/>
-          <p:nvPr/>
-        </p:nvSpPr>
-        <p:spPr>
-          <a:xfrm>
-            <a:off x="504825" y="6488668"/>
-            <a:ext cx="9077325" cy="338554"/>
-          </a:xfrm>
-          <a:prstGeom prst="rect">
-            <a:avLst/>
-          </a:prstGeom>
-        </p:spPr>
-        <p:txBody>
-          <a:bodyPr wrap="square">
-            <a:spAutoFit/>
-          </a:bodyPr>
-          <a:lstStyle/>
-          <a:p>
-            <a:r>
-              <a:rPr lang="en-US" sz="1600" dirty="0"/>
-              <a:t>https://openforecast.org/adam/ETSTaxonomy.html</a:t>
-            </a:r>
-            <a:endParaRPr lang="ru-RU" sz="1600" dirty="0"/>
-          </a:p>
-        </p:txBody>
-      </p:sp>
-      <p:sp>
-        <p:nvSpPr>
-          <p:cNvPr id="15" name="Прямоугольник 14"/>
-          <p:cNvSpPr/>
-          <p:nvPr/>
-        </p:nvSpPr>
-        <p:spPr>
-          <a:xfrm>
-            <a:off x="4914900" y="6490811"/>
-            <a:ext cx="5324475" cy="338554"/>
-          </a:xfrm>
-          <a:prstGeom prst="rect">
-            <a:avLst/>
-          </a:prstGeom>
-        </p:spPr>
-        <p:txBody>
-          <a:bodyPr wrap="square">
-            <a:spAutoFit/>
-          </a:bodyPr>
-          <a:lstStyle/>
-          <a:p>
-            <a:r>
-              <a:rPr lang="en-US" sz="1600" dirty="0"/>
-              <a:t>https://otexts.com/fpp2/ets.html</a:t>
-            </a:r>
-            <a:endParaRPr lang="ru-RU" sz="1600" dirty="0"/>
-          </a:p>
-        </p:txBody>
-      </p:sp>
-      <p:sp>
-        <p:nvSpPr>
-          <p:cNvPr id="16" name="Объект 2">
-            <a:extLst>
-              <a:ext uri="{FF2B5EF4-FFF2-40B4-BE49-F238E27FC236}">
-                <a16:creationId xmlns:a16="http://schemas.microsoft.com/office/drawing/2014/main" id="{9CFDC76D-90F0-4FD7-8BA6-954D6D2E6FFD}"/>
-              </a:ext>
-            </a:extLst>
-          </p:cNvPr>
-          <p:cNvSpPr txBox="1">
-            <a:spLocks/>
-          </p:cNvSpPr>
-          <p:nvPr/>
-        </p:nvSpPr>
-        <p:spPr>
-          <a:xfrm>
-            <a:off x="504825" y="979012"/>
-            <a:ext cx="9907643" cy="5502274"/>
-          </a:xfrm>
-          <a:prstGeom prst="rect">
-            <a:avLst/>
-          </a:prstGeom>
-        </p:spPr>
-        <p:txBody>
-          <a:bodyPr vert="horz" lIns="91440" tIns="45720" rIns="91440" bIns="45720" rtlCol="0">
-            <a:normAutofit/>
-          </a:bodyPr>
-          <a:lstStyle>
-            <a:lvl1pPr marL="228600" indent="-228600" algn="l" defTabSz="914400" rtl="0" eaLnBrk="1" latinLnBrk="0" hangingPunct="1">
-              <a:lnSpc>
-                <a:spcPct val="90000"/>
-              </a:lnSpc>
-              <a:spcBef>
-                <a:spcPts val="1000"/>
-              </a:spcBef>
-              <a:buFont typeface="Arial" panose="020B0604020202020204" pitchFamily="34" charset="0"/>
-              <a:buChar char="•"/>
-              <a:defRPr sz="2800" kern="1200">
-                <a:solidFill>
-                  <a:schemeClr val="tx1"/>
-                </a:solidFill>
-                <a:latin typeface="+mn-lt"/>
-                <a:ea typeface="+mn-ea"/>
-                <a:cs typeface="+mn-cs"/>
-              </a:defRPr>
-            </a:lvl1pPr>
-            <a:lvl2pPr marL="685800" indent="-228600" algn="l" defTabSz="914400" rtl="0" eaLnBrk="1" latinLnBrk="0" hangingPunct="1">
-              <a:lnSpc>
-                <a:spcPct val="90000"/>
-              </a:lnSpc>
-              <a:spcBef>
-                <a:spcPts val="500"/>
-              </a:spcBef>
-              <a:buFont typeface="Arial" panose="020B0604020202020204" pitchFamily="34" charset="0"/>
-              <a:buChar char="•"/>
-              <a:defRPr sz="2400" kern="1200">
-                <a:solidFill>
-                  <a:schemeClr val="tx1"/>
-                </a:solidFill>
-                <a:latin typeface="+mn-lt"/>
-                <a:ea typeface="+mn-ea"/>
-                <a:cs typeface="+mn-cs"/>
-              </a:defRPr>
-            </a:lvl2pPr>
-            <a:lvl3pPr marL="1143000" indent="-228600" algn="l" defTabSz="914400" rtl="0" eaLnBrk="1" latinLnBrk="0" hangingPunct="1">
-              <a:lnSpc>
-                <a:spcPct val="90000"/>
-              </a:lnSpc>
-              <a:spcBef>
-                <a:spcPts val="500"/>
-              </a:spcBef>
-              <a:buFont typeface="Arial" panose="020B0604020202020204" pitchFamily="34" charset="0"/>
-              <a:buChar char="•"/>
-              <a:defRPr sz="2000" kern="1200">
-                <a:solidFill>
-                  <a:schemeClr val="tx1"/>
-                </a:solidFill>
-                <a:latin typeface="+mn-lt"/>
-                <a:ea typeface="+mn-ea"/>
-                <a:cs typeface="+mn-cs"/>
-              </a:defRPr>
-            </a:lvl3pPr>
-            <a:lvl4pPr marL="1600200" indent="-228600" algn="l" defTabSz="914400" rtl="0" eaLnBrk="1" latinLnBrk="0" hangingPunct="1">
-              <a:lnSpc>
-                <a:spcPct val="90000"/>
-              </a:lnSpc>
-              <a:spcBef>
-                <a:spcPts val="500"/>
-              </a:spcBef>
-              <a:buFont typeface="Arial" panose="020B0604020202020204" pitchFamily="34" charset="0"/>
-              <a:buChar char="•"/>
-              <a:defRPr sz="1800" kern="1200">
-                <a:solidFill>
-                  <a:schemeClr val="tx1"/>
-                </a:solidFill>
-                <a:latin typeface="+mn-lt"/>
-                <a:ea typeface="+mn-ea"/>
-                <a:cs typeface="+mn-cs"/>
-              </a:defRPr>
-            </a:lvl4pPr>
-            <a:lvl5pPr marL="2057400" indent="-228600" algn="l" defTabSz="914400" rtl="0" eaLnBrk="1" latinLnBrk="0" hangingPunct="1">
-              <a:lnSpc>
-                <a:spcPct val="90000"/>
-              </a:lnSpc>
-              <a:spcBef>
-                <a:spcPts val="500"/>
-              </a:spcBef>
-              <a:buFont typeface="Arial" panose="020B0604020202020204" pitchFamily="34" charset="0"/>
-              <a:buChar char="•"/>
-              <a:defRPr sz="1800" kern="1200">
-                <a:solidFill>
-                  <a:schemeClr val="tx1"/>
-                </a:solidFill>
-                <a:latin typeface="+mn-lt"/>
-                <a:ea typeface="+mn-ea"/>
-                <a:cs typeface="+mn-cs"/>
-              </a:defRPr>
-            </a:lvl5pPr>
-            <a:lvl6pPr marL="2514600" indent="-228600" algn="l" defTabSz="914400" rtl="0" eaLnBrk="1" latinLnBrk="0" hangingPunct="1">
-              <a:lnSpc>
-                <a:spcPct val="90000"/>
-              </a:lnSpc>
-              <a:spcBef>
-                <a:spcPts val="500"/>
-              </a:spcBef>
-              <a:buFont typeface="Arial" panose="020B0604020202020204" pitchFamily="34" charset="0"/>
-              <a:buChar char="•"/>
-              <a:defRPr sz="1800" kern="1200">
-                <a:solidFill>
-                  <a:schemeClr val="tx1"/>
-                </a:solidFill>
-                <a:latin typeface="+mn-lt"/>
-                <a:ea typeface="+mn-ea"/>
-                <a:cs typeface="+mn-cs"/>
-              </a:defRPr>
-            </a:lvl6pPr>
-            <a:lvl7pPr marL="2971800" indent="-228600" algn="l" defTabSz="914400" rtl="0" eaLnBrk="1" latinLnBrk="0" hangingPunct="1">
-              <a:lnSpc>
-                <a:spcPct val="90000"/>
-              </a:lnSpc>
-              <a:spcBef>
-                <a:spcPts val="500"/>
-              </a:spcBef>
-              <a:buFont typeface="Arial" panose="020B0604020202020204" pitchFamily="34" charset="0"/>
-              <a:buChar char="•"/>
-              <a:defRPr sz="1800" kern="1200">
-                <a:solidFill>
-                  <a:schemeClr val="tx1"/>
-                </a:solidFill>
-                <a:latin typeface="+mn-lt"/>
-                <a:ea typeface="+mn-ea"/>
-                <a:cs typeface="+mn-cs"/>
-              </a:defRPr>
-            </a:lvl7pPr>
-            <a:lvl8pPr marL="3429000" indent="-228600" algn="l" defTabSz="914400" rtl="0" eaLnBrk="1" latinLnBrk="0" hangingPunct="1">
-              <a:lnSpc>
-                <a:spcPct val="90000"/>
-              </a:lnSpc>
-              <a:spcBef>
-                <a:spcPts val="500"/>
-              </a:spcBef>
-              <a:buFont typeface="Arial" panose="020B0604020202020204" pitchFamily="34" charset="0"/>
-              <a:buChar char="•"/>
-              <a:defRPr sz="1800" kern="1200">
-                <a:solidFill>
-                  <a:schemeClr val="tx1"/>
-                </a:solidFill>
-                <a:latin typeface="+mn-lt"/>
-                <a:ea typeface="+mn-ea"/>
-                <a:cs typeface="+mn-cs"/>
-              </a:defRPr>
-            </a:lvl8pPr>
-            <a:lvl9pPr marL="3886200" indent="-228600" algn="l" defTabSz="914400" rtl="0" eaLnBrk="1" latinLnBrk="0" hangingPunct="1">
-              <a:lnSpc>
-                <a:spcPct val="90000"/>
-              </a:lnSpc>
-              <a:spcBef>
-                <a:spcPts val="500"/>
-              </a:spcBef>
-              <a:buFont typeface="Arial" panose="020B0604020202020204" pitchFamily="34" charset="0"/>
-              <a:buChar char="•"/>
-              <a:defRPr sz="1800" kern="1200">
-                <a:solidFill>
-                  <a:schemeClr val="tx1"/>
-                </a:solidFill>
-                <a:latin typeface="+mn-lt"/>
-                <a:ea typeface="+mn-ea"/>
-                <a:cs typeface="+mn-cs"/>
-              </a:defRPr>
-            </a:lvl9pPr>
-          </a:lstStyle>
-          <a:p>
-            <a:pPr marL="0" indent="0">
-              <a:buFont typeface="Arial" panose="020B0604020202020204" pitchFamily="34" charset="0"/>
-              <a:buNone/>
-            </a:pPr>
-            <a:r>
-              <a:rPr lang="en-US" sz="2200" dirty="0"/>
-              <a:t> </a:t>
-            </a:r>
-            <a:endParaRPr lang="ru-RU" sz="2000" dirty="0"/>
-          </a:p>
-        </p:txBody>
-      </p:sp>
-      <p:pic>
-        <p:nvPicPr>
-          <p:cNvPr id="8" name="Рисунок 7"/>
-          <p:cNvPicPr>
-            <a:picLocks noChangeAspect="1"/>
-          </p:cNvPicPr>
-          <p:nvPr/>
-        </p:nvPicPr>
-        <p:blipFill>
-          <a:blip r:embed="rId4"/>
-          <a:stretch>
-            <a:fillRect/>
-          </a:stretch>
-        </p:blipFill>
-        <p:spPr>
-          <a:xfrm>
-            <a:off x="5745954" y="3725671"/>
-            <a:ext cx="6283298" cy="2654546"/>
-          </a:xfrm>
-          <a:prstGeom prst="rect">
-            <a:avLst/>
-          </a:prstGeom>
-        </p:spPr>
-      </p:pic>
-      <p:sp>
-        <p:nvSpPr>
-          <p:cNvPr id="18" name="Прямоугольник 17"/>
-          <p:cNvSpPr/>
-          <p:nvPr/>
-        </p:nvSpPr>
-        <p:spPr>
-          <a:xfrm>
-            <a:off x="8201025" y="6359634"/>
-            <a:ext cx="5324475" cy="338554"/>
-          </a:xfrm>
-          <a:prstGeom prst="rect">
-            <a:avLst/>
-          </a:prstGeom>
-        </p:spPr>
-        <p:txBody>
-          <a:bodyPr wrap="square">
-            <a:spAutoFit/>
-          </a:bodyPr>
-          <a:lstStyle/>
-          <a:p>
-            <a:r>
-              <a:rPr lang="ru-RU" sz="1600" dirty="0"/>
-              <a:t>Аналогично мультипликативный тренд</a:t>
-            </a:r>
-          </a:p>
-        </p:txBody>
-      </p:sp>
-    </p:spTree>
-    <p:extLst>
-      <p:ext uri="{BB962C8B-B14F-4D97-AF65-F5344CB8AC3E}">
-        <p14:creationId xmlns:p14="http://schemas.microsoft.com/office/powerpoint/2010/main" val="2495676499"/>
-      </p:ext>
-    </p:extLst>
-  </p:cSld>
-  <p:clrMapOvr>
-    <a:masterClrMapping/>
-  </p:clrMapOvr>
-</p:sld>
-</file>
-
 <file path=ppt/theme/theme1.xml><?xml version="1.0" encoding="utf-8"?>
 <a:theme xmlns:a="http://schemas.openxmlformats.org/drawingml/2006/main" name="Тема Office">
   <a:themeElements>
